--- a/output/wordlabs-ist-suffix-3day.pptx
+++ b/output/wordlabs-ist-suffix-3day.pptx
@@ -4279,7 +4279,7 @@
                 <a:ea typeface="Calibri" pitchFamily="34" charset="-122"/>
                 <a:cs typeface="Calibri" pitchFamily="34" charset="-120"/>
               </a:rPr>
-              <a:t>Origin: Greek: -istes</a:t>
+              <a:t>Origin: Greek: -istēs</a:t>
             </a:r>
             <a:endParaRPr lang="en-US" sz="1300" dirty="0"/>
           </a:p>
@@ -6057,7 +6057,7 @@
                 <a:ea typeface="Calibri" pitchFamily="34" charset="-122"/>
                 <a:cs typeface="Calibri" pitchFamily="34" charset="-120"/>
               </a:rPr>
-              <a:t>finalist</a:t>
+              <a:t>cyclist</a:t>
             </a:r>
             <a:pPr algn="l" indent="0" marL="0">
               <a:buNone/>
@@ -6071,7 +6071,7 @@
                 <a:ea typeface="Calibri" pitchFamily="34" charset="-122"/>
                 <a:cs typeface="Calibri" pitchFamily="34" charset="-120"/>
               </a:rPr>
-              <a:t> was also a talented </a:t>
+              <a:t> and the </a:t>
             </a:r>
             <a:pPr algn="l" indent="0" marL="0">
               <a:buNone/>
@@ -6088,7 +6088,7 @@
                 <a:ea typeface="Calibri" pitchFamily="34" charset="-122"/>
                 <a:cs typeface="Calibri" pitchFamily="34" charset="-120"/>
               </a:rPr>
-              <a:t>cyclist</a:t>
+              <a:t>guitarist</a:t>
             </a:r>
             <a:pPr algn="l" indent="0" marL="0">
               <a:buNone/>
@@ -6102,7 +6102,7 @@
                 <a:ea typeface="Calibri" pitchFamily="34" charset="-122"/>
                 <a:cs typeface="Calibri" pitchFamily="34" charset="-120"/>
               </a:rPr>
-              <a:t> who had trained all year for the race.</a:t>
+              <a:t> performed together at the school festival.</a:t>
             </a:r>
             <a:endParaRPr lang="en-US" sz="1800" dirty="0"/>
           </a:p>
@@ -6257,7 +6257,7 @@
                 <a:ea typeface="Trebuchet MS" pitchFamily="34" charset="-122"/>
                 <a:cs typeface="Trebuchet MS" pitchFamily="34" charset="-120"/>
               </a:rPr>
-              <a:t>finalist</a:t>
+              <a:t>cyclist</a:t>
             </a:r>
             <a:endParaRPr lang="en-US" sz="1400" dirty="0"/>
           </a:p>
@@ -6385,7 +6385,7 @@
                 <a:ea typeface="Trebuchet MS" pitchFamily="34" charset="-122"/>
                 <a:cs typeface="Trebuchet MS" pitchFamily="34" charset="-120"/>
               </a:rPr>
-              <a:t>cyclist</a:t>
+              <a:t>guitarist</a:t>
             </a:r>
             <a:endParaRPr lang="en-US" sz="1400" dirty="0"/>
           </a:p>
@@ -6855,7 +6855,7 @@
                 <a:ea typeface="Trebuchet MS" pitchFamily="34" charset="-122"/>
                 <a:cs typeface="Trebuchet MS" pitchFamily="34" charset="-120"/>
               </a:rPr>
-              <a:t>finalist</a:t>
+              <a:t>cyclist</a:t>
             </a:r>
             <a:endParaRPr lang="en-US" sz="2800" dirty="0"/>
           </a:p>
@@ -7682,7 +7682,7 @@
                 <a:ea typeface="Trebuchet MS" pitchFamily="34" charset="-122"/>
                 <a:cs typeface="Trebuchet MS" pitchFamily="34" charset="-120"/>
               </a:rPr>
-              <a:t>finalist</a:t>
+              <a:t>cyclist</a:t>
             </a:r>
             <a:endParaRPr lang="en-US" sz="2800" dirty="0"/>
           </a:p>
@@ -7821,7 +7821,7 @@
                 <a:ea typeface="Trebuchet MS" pitchFamily="34" charset="-122"/>
                 <a:cs typeface="Trebuchet MS" pitchFamily="34" charset="-120"/>
               </a:rPr>
-              <a:t>final</a:t>
+              <a:t>cycl</a:t>
             </a:r>
             <a:endParaRPr lang="en-US" sz="1300" dirty="0"/>
           </a:p>
@@ -7860,7 +7860,7 @@
                 <a:ea typeface="Calibri" pitchFamily="34" charset="-122"/>
                 <a:cs typeface="Calibri" pitchFamily="34" charset="-120"/>
               </a:rPr>
-              <a:t>last or end</a:t>
+              <a:t>circle, wheel</a:t>
             </a:r>
             <a:endParaRPr lang="en-US" sz="850" dirty="0"/>
           </a:p>
@@ -7868,7 +7868,46 @@
       </p:sp>
       <p:sp>
         <p:nvSpPr>
-          <p:cNvPr id="19" name="Shape 17"/>
+          <p:cNvPr id="19" name="Text 17"/>
+          <p:cNvSpPr/>
+          <p:nvPr/>
+        </p:nvSpPr>
+        <p:spPr>
+          <a:xfrm>
+            <a:off x="2938272" y="2752344"/>
+            <a:ext cx="1828800" cy="182880"/>
+          </a:xfrm>
+          <a:prstGeom prst="rect">
+            <a:avLst/>
+          </a:prstGeom>
+          <a:noFill/>
+          <a:ln/>
+        </p:spPr>
+        <p:txBody>
+          <a:bodyPr wrap="square" lIns="0" tIns="0" rIns="0" bIns="0" rtlCol="0" anchor="t"/>
+          <a:lstStyle/>
+          <a:p>
+            <a:pPr algn="ctr" indent="0" marL="0">
+              <a:buNone/>
+            </a:pPr>
+            <a:r>
+              <a:rPr lang="en-US" sz="700" i="1" dirty="0">
+                <a:solidFill>
+                  <a:srgbClr val="94A3B8"/>
+                </a:solidFill>
+                <a:latin typeface="Calibri" pitchFamily="34" charset="0"/>
+                <a:ea typeface="Calibri" pitchFamily="34" charset="-122"/>
+                <a:cs typeface="Calibri" pitchFamily="34" charset="-120"/>
+              </a:rPr>
+              <a:t>'e' dropped before vowel suffix</a:t>
+            </a:r>
+            <a:endParaRPr lang="en-US" sz="700" dirty="0"/>
+          </a:p>
+        </p:txBody>
+      </p:sp>
+      <p:sp>
+        <p:nvSpPr>
+          <p:cNvPr id="20" name="Shape 18"/>
           <p:cNvSpPr/>
           <p:nvPr/>
         </p:nvSpPr>
@@ -7902,7 +7941,7 @@
       </p:sp>
       <p:sp>
         <p:nvSpPr>
-          <p:cNvPr id="20" name="Text 18"/>
+          <p:cNvPr id="21" name="Text 19"/>
           <p:cNvSpPr/>
           <p:nvPr/>
         </p:nvSpPr>
@@ -7941,7 +7980,7 @@
       </p:sp>
       <p:sp>
         <p:nvSpPr>
-          <p:cNvPr id="21" name="Text 19"/>
+          <p:cNvPr id="22" name="Text 20"/>
           <p:cNvSpPr/>
           <p:nvPr/>
         </p:nvSpPr>
@@ -7972,7 +8011,7 @@
                 <a:ea typeface="Calibri" pitchFamily="34" charset="-122"/>
                 <a:cs typeface="Calibri" pitchFamily="34" charset="-120"/>
               </a:rPr>
-              <a:t>person who does or believes</a:t>
+              <a:t>person who does</a:t>
             </a:r>
             <a:endParaRPr lang="en-US" sz="850" dirty="0"/>
           </a:p>
@@ -7980,7 +8019,7 @@
       </p:sp>
       <p:sp>
         <p:nvSpPr>
-          <p:cNvPr id="22" name="Shape 20"/>
+          <p:cNvPr id="23" name="Shape 21"/>
           <p:cNvSpPr/>
           <p:nvPr/>
         </p:nvSpPr>
@@ -8007,7 +8046,7 @@
       </p:sp>
       <p:sp>
         <p:nvSpPr>
-          <p:cNvPr id="23" name="Text 21"/>
+          <p:cNvPr id="24" name="Text 22"/>
           <p:cNvSpPr/>
           <p:nvPr/>
         </p:nvSpPr>
@@ -8046,7 +8085,7 @@
       </p:sp>
       <p:sp>
         <p:nvSpPr>
-          <p:cNvPr id="24" name="Shape 22"/>
+          <p:cNvPr id="25" name="Shape 23"/>
           <p:cNvSpPr/>
           <p:nvPr/>
         </p:nvSpPr>
@@ -8073,7 +8112,7 @@
       </p:sp>
       <p:sp>
         <p:nvSpPr>
-          <p:cNvPr id="25" name="Text 23"/>
+          <p:cNvPr id="26" name="Text 24"/>
           <p:cNvSpPr/>
           <p:nvPr/>
         </p:nvSpPr>
@@ -8112,7 +8151,7 @@
       </p:sp>
       <p:sp>
         <p:nvSpPr>
-          <p:cNvPr id="26" name="Shape 24"/>
+          <p:cNvPr id="27" name="Shape 25"/>
           <p:cNvSpPr/>
           <p:nvPr/>
         </p:nvSpPr>
@@ -8139,7 +8178,7 @@
       </p:sp>
       <p:sp>
         <p:nvSpPr>
-          <p:cNvPr id="27" name="Text 25"/>
+          <p:cNvPr id="28" name="Text 26"/>
           <p:cNvSpPr/>
           <p:nvPr/>
         </p:nvSpPr>
@@ -8178,7 +8217,7 @@
       </p:sp>
       <p:sp>
         <p:nvSpPr>
-          <p:cNvPr id="28" name="Shape 26"/>
+          <p:cNvPr id="29" name="Shape 27"/>
           <p:cNvSpPr/>
           <p:nvPr/>
         </p:nvSpPr>
@@ -8205,7 +8244,7 @@
       </p:sp>
       <p:sp>
         <p:nvSpPr>
-          <p:cNvPr id="29" name="Text 27"/>
+          <p:cNvPr id="30" name="Text 28"/>
           <p:cNvSpPr/>
           <p:nvPr/>
         </p:nvSpPr>
@@ -8667,7 +8706,7 @@
                 <a:ea typeface="Trebuchet MS" pitchFamily="34" charset="-122"/>
                 <a:cs typeface="Trebuchet MS" pitchFamily="34" charset="-120"/>
               </a:rPr>
-              <a:t>finalist</a:t>
+              <a:t>cyclist</a:t>
             </a:r>
             <a:endParaRPr lang="en-US" sz="2800" dirty="0"/>
           </a:p>
@@ -8806,7 +8845,7 @@
                 <a:ea typeface="Trebuchet MS" pitchFamily="34" charset="-122"/>
                 <a:cs typeface="Trebuchet MS" pitchFamily="34" charset="-120"/>
               </a:rPr>
-              <a:t>final</a:t>
+              <a:t>cycl</a:t>
             </a:r>
             <a:endParaRPr lang="en-US" sz="1300" dirty="0"/>
           </a:p>
@@ -8845,7 +8884,7 @@
                 <a:ea typeface="Calibri" pitchFamily="34" charset="-122"/>
                 <a:cs typeface="Calibri" pitchFamily="34" charset="-120"/>
               </a:rPr>
-              <a:t>last or end</a:t>
+              <a:t>circle, wheel</a:t>
             </a:r>
             <a:endParaRPr lang="en-US" sz="850" dirty="0"/>
           </a:p>
@@ -8853,7 +8892,46 @@
       </p:sp>
       <p:sp>
         <p:nvSpPr>
-          <p:cNvPr id="19" name="Shape 17"/>
+          <p:cNvPr id="19" name="Text 17"/>
+          <p:cNvSpPr/>
+          <p:nvPr/>
+        </p:nvSpPr>
+        <p:spPr>
+          <a:xfrm>
+            <a:off x="2938272" y="2752344"/>
+            <a:ext cx="1828800" cy="182880"/>
+          </a:xfrm>
+          <a:prstGeom prst="rect">
+            <a:avLst/>
+          </a:prstGeom>
+          <a:noFill/>
+          <a:ln/>
+        </p:spPr>
+        <p:txBody>
+          <a:bodyPr wrap="square" lIns="0" tIns="0" rIns="0" bIns="0" rtlCol="0" anchor="t"/>
+          <a:lstStyle/>
+          <a:p>
+            <a:pPr algn="ctr" indent="0" marL="0">
+              <a:buNone/>
+            </a:pPr>
+            <a:r>
+              <a:rPr lang="en-US" sz="700" i="1" dirty="0">
+                <a:solidFill>
+                  <a:srgbClr val="94A3B8"/>
+                </a:solidFill>
+                <a:latin typeface="Calibri" pitchFamily="34" charset="0"/>
+                <a:ea typeface="Calibri" pitchFamily="34" charset="-122"/>
+                <a:cs typeface="Calibri" pitchFamily="34" charset="-120"/>
+              </a:rPr>
+              <a:t>'e' dropped before vowel suffix</a:t>
+            </a:r>
+            <a:endParaRPr lang="en-US" sz="700" dirty="0"/>
+          </a:p>
+        </p:txBody>
+      </p:sp>
+      <p:sp>
+        <p:nvSpPr>
+          <p:cNvPr id="20" name="Shape 18"/>
           <p:cNvSpPr/>
           <p:nvPr/>
         </p:nvSpPr>
@@ -8887,7 +8965,7 @@
       </p:sp>
       <p:sp>
         <p:nvSpPr>
-          <p:cNvPr id="20" name="Text 18"/>
+          <p:cNvPr id="21" name="Text 19"/>
           <p:cNvSpPr/>
           <p:nvPr/>
         </p:nvSpPr>
@@ -8926,7 +9004,7 @@
       </p:sp>
       <p:sp>
         <p:nvSpPr>
-          <p:cNvPr id="21" name="Text 19"/>
+          <p:cNvPr id="22" name="Text 20"/>
           <p:cNvSpPr/>
           <p:nvPr/>
         </p:nvSpPr>
@@ -8957,7 +9035,7 @@
                 <a:ea typeface="Calibri" pitchFamily="34" charset="-122"/>
                 <a:cs typeface="Calibri" pitchFamily="34" charset="-120"/>
               </a:rPr>
-              <a:t>person who does or believes</a:t>
+              <a:t>person who does</a:t>
             </a:r>
             <a:endParaRPr lang="en-US" sz="850" dirty="0"/>
           </a:p>
@@ -8965,7 +9043,7 @@
       </p:sp>
       <p:sp>
         <p:nvSpPr>
-          <p:cNvPr id="22" name="Shape 20"/>
+          <p:cNvPr id="23" name="Shape 21"/>
           <p:cNvSpPr/>
           <p:nvPr/>
         </p:nvSpPr>
@@ -8992,7 +9070,7 @@
       </p:sp>
       <p:sp>
         <p:nvSpPr>
-          <p:cNvPr id="23" name="Text 21"/>
+          <p:cNvPr id="24" name="Text 22"/>
           <p:cNvSpPr/>
           <p:nvPr/>
         </p:nvSpPr>
@@ -9031,7 +9109,7 @@
       </p:sp>
       <p:sp>
         <p:nvSpPr>
-          <p:cNvPr id="24" name="Shape 22"/>
+          <p:cNvPr id="25" name="Shape 23"/>
           <p:cNvSpPr/>
           <p:nvPr/>
         </p:nvSpPr>
@@ -9058,13 +9136,13 @@
       </p:sp>
       <p:sp>
         <p:nvSpPr>
-          <p:cNvPr id="25" name="Shape 23"/>
-          <p:cNvSpPr/>
-          <p:nvPr/>
-        </p:nvSpPr>
-        <p:spPr>
-          <a:xfrm>
-            <a:off x="2313432" y="3364992"/>
+          <p:cNvPr id="26" name="Shape 24"/>
+          <p:cNvSpPr/>
+          <p:nvPr/>
+        </p:nvSpPr>
+        <p:spPr>
+          <a:xfrm>
+            <a:off x="2999232" y="3364992"/>
             <a:ext cx="1645920" cy="475488"/>
           </a:xfrm>
           <a:prstGeom prst="rect">
@@ -9085,13 +9163,13 @@
       </p:sp>
       <p:sp>
         <p:nvSpPr>
-          <p:cNvPr id="26" name="Text 24"/>
-          <p:cNvSpPr/>
-          <p:nvPr/>
-        </p:nvSpPr>
-        <p:spPr>
-          <a:xfrm>
-            <a:off x="2313432" y="3364992"/>
+          <p:cNvPr id="27" name="Text 25"/>
+          <p:cNvSpPr/>
+          <p:nvPr/>
+        </p:nvSpPr>
+        <p:spPr>
+          <a:xfrm>
+            <a:off x="2999232" y="3364992"/>
             <a:ext cx="1645920" cy="475488"/>
           </a:xfrm>
           <a:prstGeom prst="rect">
@@ -9116,7 +9194,7 @@
                 <a:ea typeface="Trebuchet MS" pitchFamily="34" charset="-122"/>
                 <a:cs typeface="Trebuchet MS" pitchFamily="34" charset="-120"/>
               </a:rPr>
-              <a:t>fi</a:t>
+              <a:t>cy</a:t>
             </a:r>
             <a:endParaRPr lang="en-US" sz="1400" dirty="0"/>
           </a:p>
@@ -9124,14 +9202,14 @@
       </p:sp>
       <p:sp>
         <p:nvSpPr>
-          <p:cNvPr id="27" name="Text 25"/>
-          <p:cNvSpPr/>
-          <p:nvPr/>
-        </p:nvSpPr>
-        <p:spPr>
-          <a:xfrm>
-            <a:off x="3959352" y="3364992"/>
-            <a:ext cx="411480" cy="475488"/>
+          <p:cNvPr id="28" name="Text 26"/>
+          <p:cNvSpPr/>
+          <p:nvPr/>
+        </p:nvSpPr>
+        <p:spPr>
+          <a:xfrm>
+            <a:off x="4645152" y="3364992"/>
+            <a:ext cx="1097280" cy="475488"/>
           </a:xfrm>
           <a:prstGeom prst="rect">
             <a:avLst/>
@@ -9163,13 +9241,13 @@
       </p:sp>
       <p:sp>
         <p:nvSpPr>
-          <p:cNvPr id="28" name="Shape 26"/>
-          <p:cNvSpPr/>
-          <p:nvPr/>
-        </p:nvSpPr>
-        <p:spPr>
-          <a:xfrm>
-            <a:off x="4370832" y="3364992"/>
+          <p:cNvPr id="29" name="Shape 27"/>
+          <p:cNvSpPr/>
+          <p:nvPr/>
+        </p:nvSpPr>
+        <p:spPr>
+          <a:xfrm>
+            <a:off x="5742432" y="3364992"/>
             <a:ext cx="1645920" cy="475488"/>
           </a:xfrm>
           <a:prstGeom prst="rect">
@@ -9190,13 +9268,13 @@
       </p:sp>
       <p:sp>
         <p:nvSpPr>
-          <p:cNvPr id="29" name="Text 27"/>
-          <p:cNvSpPr/>
-          <p:nvPr/>
-        </p:nvSpPr>
-        <p:spPr>
-          <a:xfrm>
-            <a:off x="4370832" y="3364992"/>
+          <p:cNvPr id="30" name="Text 28"/>
+          <p:cNvSpPr/>
+          <p:nvPr/>
+        </p:nvSpPr>
+        <p:spPr>
+          <a:xfrm>
+            <a:off x="5742432" y="3364992"/>
             <a:ext cx="1645920" cy="475488"/>
           </a:xfrm>
           <a:prstGeom prst="rect">
@@ -9221,7 +9299,7 @@
                 <a:ea typeface="Trebuchet MS" pitchFamily="34" charset="-122"/>
                 <a:cs typeface="Trebuchet MS" pitchFamily="34" charset="-120"/>
               </a:rPr>
-              <a:t>nal</a:t>
+              <a:t>clist</a:t>
             </a:r>
             <a:endParaRPr lang="en-US" sz="1400" dirty="0"/>
           </a:p>
@@ -9229,106 +9307,67 @@
       </p:sp>
       <p:sp>
         <p:nvSpPr>
-          <p:cNvPr id="30" name="Text 28"/>
-          <p:cNvSpPr/>
-          <p:nvPr/>
-        </p:nvSpPr>
-        <p:spPr>
-          <a:xfrm>
-            <a:off x="6016752" y="3364992"/>
-            <a:ext cx="411480" cy="475488"/>
-          </a:xfrm>
-          <a:prstGeom prst="rect">
-            <a:avLst/>
-          </a:prstGeom>
-          <a:noFill/>
-          <a:ln/>
-        </p:spPr>
-        <p:txBody>
-          <a:bodyPr wrap="square" lIns="0" tIns="0" rIns="0" bIns="0" rtlCol="0" anchor="ctr"/>
-          <a:lstStyle/>
-          <a:p>
-            <a:pPr algn="ctr" indent="0" marL="0">
-              <a:buNone/>
-            </a:pPr>
-            <a:r>
-              <a:rPr lang="en-US" sz="1600" b="1" dirty="0">
-                <a:solidFill>
-                  <a:srgbClr val="0D9488"/>
+          <p:cNvPr id="31" name="Shape 29"/>
+          <p:cNvSpPr/>
+          <p:nvPr/>
+        </p:nvSpPr>
+        <p:spPr>
+          <a:xfrm>
+            <a:off x="365760" y="4096512"/>
+            <a:ext cx="1371600" cy="804672"/>
+          </a:xfrm>
+          <a:prstGeom prst="rect">
+            <a:avLst>
+              <a:gd name="adj" fmla="val 6818"/>
+            </a:avLst>
+          </a:prstGeom>
+          <a:solidFill>
+            <a:srgbClr val="E2E8F0"/>
+          </a:solidFill>
+          <a:ln w="12700">
+            <a:solidFill>
+              <a:srgbClr val="E2E8F0"/>
+            </a:solidFill>
+            <a:prstDash val="solid"/>
+          </a:ln>
+        </p:spPr>
+      </p:sp>
+      <p:sp>
+        <p:nvSpPr>
+          <p:cNvPr id="32" name="Text 30"/>
+          <p:cNvSpPr/>
+          <p:nvPr/>
+        </p:nvSpPr>
+        <p:spPr>
+          <a:xfrm>
+            <a:off x="365760" y="4096512"/>
+            <a:ext cx="1371600" cy="804672"/>
+          </a:xfrm>
+          <a:prstGeom prst="rect">
+            <a:avLst/>
+          </a:prstGeom>
+          <a:noFill/>
+          <a:ln/>
+        </p:spPr>
+        <p:txBody>
+          <a:bodyPr wrap="square" lIns="0" tIns="0" rIns="0" bIns="0" rtlCol="0" anchor="ctr"/>
+          <a:lstStyle/>
+          <a:p>
+            <a:pPr algn="ctr" indent="0" marL="0">
+              <a:buNone/>
+            </a:pPr>
+            <a:r>
+              <a:rPr lang="en-US" sz="1100" b="1" dirty="0">
+                <a:solidFill>
+                  <a:srgbClr val="475569"/>
                 </a:solidFill>
                 <a:latin typeface="Trebuchet MS" pitchFamily="34" charset="0"/>
                 <a:ea typeface="Trebuchet MS" pitchFamily="34" charset="-122"/>
                 <a:cs typeface="Trebuchet MS" pitchFamily="34" charset="-120"/>
               </a:rPr>
-              <a:t>·</a:t>
-            </a:r>
-            <a:endParaRPr lang="en-US" sz="1600" dirty="0"/>
-          </a:p>
-        </p:txBody>
-      </p:sp>
-      <p:sp>
-        <p:nvSpPr>
-          <p:cNvPr id="31" name="Shape 29"/>
-          <p:cNvSpPr/>
-          <p:nvPr/>
-        </p:nvSpPr>
-        <p:spPr>
-          <a:xfrm>
-            <a:off x="6428232" y="3364992"/>
-            <a:ext cx="1645920" cy="475488"/>
-          </a:xfrm>
-          <a:prstGeom prst="rect">
-            <a:avLst>
-              <a:gd name="adj" fmla="val 9615"/>
-            </a:avLst>
-          </a:prstGeom>
-          <a:solidFill>
-            <a:srgbClr val="FFFFFF"/>
-          </a:solidFill>
-          <a:ln w="12700">
-            <a:solidFill>
-              <a:srgbClr val="0D9488"/>
-            </a:solidFill>
-            <a:prstDash val="solid"/>
-          </a:ln>
-        </p:spPr>
-      </p:sp>
-      <p:sp>
-        <p:nvSpPr>
-          <p:cNvPr id="32" name="Text 30"/>
-          <p:cNvSpPr/>
-          <p:nvPr/>
-        </p:nvSpPr>
-        <p:spPr>
-          <a:xfrm>
-            <a:off x="6428232" y="3364992"/>
-            <a:ext cx="1645920" cy="475488"/>
-          </a:xfrm>
-          <a:prstGeom prst="rect">
-            <a:avLst/>
-          </a:prstGeom>
-          <a:noFill/>
-          <a:ln/>
-        </p:spPr>
-        <p:txBody>
-          <a:bodyPr wrap="square" lIns="0" tIns="0" rIns="0" bIns="0" rtlCol="0" anchor="ctr"/>
-          <a:lstStyle/>
-          <a:p>
-            <a:pPr algn="ctr" indent="0" marL="0">
-              <a:buNone/>
-            </a:pPr>
-            <a:r>
-              <a:rPr lang="en-US" sz="1400" b="1" dirty="0">
-                <a:solidFill>
-                  <a:srgbClr val="0D9488"/>
-                </a:solidFill>
-                <a:latin typeface="Trebuchet MS" pitchFamily="34" charset="0"/>
-                <a:ea typeface="Trebuchet MS" pitchFamily="34" charset="-122"/>
-                <a:cs typeface="Trebuchet MS" pitchFamily="34" charset="-120"/>
-              </a:rPr>
-              <a:t>ist</a:t>
-            </a:r>
-            <a:endParaRPr lang="en-US" sz="1400" dirty="0"/>
+              <a:t>Phonemes</a:t>
+            </a:r>
+            <a:endParaRPr lang="en-US" sz="1100" dirty="0"/>
           </a:p>
         </p:txBody>
       </p:sp>
@@ -9340,8 +9379,8 @@
         </p:nvSpPr>
         <p:spPr>
           <a:xfrm>
-            <a:off x="365760" y="4096512"/>
-            <a:ext cx="1371600" cy="804672"/>
+            <a:off x="1874520" y="4096512"/>
+            <a:ext cx="6903720" cy="804672"/>
           </a:xfrm>
           <a:prstGeom prst="rect">
             <a:avLst>
@@ -9349,85 +9388,19 @@
             </a:avLst>
           </a:prstGeom>
           <a:solidFill>
-            <a:srgbClr val="E2E8F0"/>
+            <a:srgbClr val="F8FAFC"/>
           </a:solidFill>
           <a:ln w="12700">
             <a:solidFill>
               <a:srgbClr val="E2E8F0"/>
             </a:solidFill>
-            <a:prstDash val="solid"/>
+            <a:prstDash val="dash"/>
           </a:ln>
         </p:spPr>
       </p:sp>
       <p:sp>
         <p:nvSpPr>
           <p:cNvPr id="34" name="Text 32"/>
-          <p:cNvSpPr/>
-          <p:nvPr/>
-        </p:nvSpPr>
-        <p:spPr>
-          <a:xfrm>
-            <a:off x="365760" y="4096512"/>
-            <a:ext cx="1371600" cy="804672"/>
-          </a:xfrm>
-          <a:prstGeom prst="rect">
-            <a:avLst/>
-          </a:prstGeom>
-          <a:noFill/>
-          <a:ln/>
-        </p:spPr>
-        <p:txBody>
-          <a:bodyPr wrap="square" lIns="0" tIns="0" rIns="0" bIns="0" rtlCol="0" anchor="ctr"/>
-          <a:lstStyle/>
-          <a:p>
-            <a:pPr algn="ctr" indent="0" marL="0">
-              <a:buNone/>
-            </a:pPr>
-            <a:r>
-              <a:rPr lang="en-US" sz="1100" b="1" dirty="0">
-                <a:solidFill>
-                  <a:srgbClr val="475569"/>
-                </a:solidFill>
-                <a:latin typeface="Trebuchet MS" pitchFamily="34" charset="0"/>
-                <a:ea typeface="Trebuchet MS" pitchFamily="34" charset="-122"/>
-                <a:cs typeface="Trebuchet MS" pitchFamily="34" charset="-120"/>
-              </a:rPr>
-              <a:t>Phonemes</a:t>
-            </a:r>
-            <a:endParaRPr lang="en-US" sz="1100" dirty="0"/>
-          </a:p>
-        </p:txBody>
-      </p:sp>
-      <p:sp>
-        <p:nvSpPr>
-          <p:cNvPr id="35" name="Shape 33"/>
-          <p:cNvSpPr/>
-          <p:nvPr/>
-        </p:nvSpPr>
-        <p:spPr>
-          <a:xfrm>
-            <a:off x="1874520" y="4096512"/>
-            <a:ext cx="6903720" cy="804672"/>
-          </a:xfrm>
-          <a:prstGeom prst="rect">
-            <a:avLst>
-              <a:gd name="adj" fmla="val 6818"/>
-            </a:avLst>
-          </a:prstGeom>
-          <a:solidFill>
-            <a:srgbClr val="F8FAFC"/>
-          </a:solidFill>
-          <a:ln w="12700">
-            <a:solidFill>
-              <a:srgbClr val="E2E8F0"/>
-            </a:solidFill>
-            <a:prstDash val="dash"/>
-          </a:ln>
-        </p:spPr>
-      </p:sp>
-      <p:sp>
-        <p:nvSpPr>
-          <p:cNvPr id="36" name="Text 34"/>
           <p:cNvSpPr/>
           <p:nvPr/>
         </p:nvSpPr>
@@ -9889,7 +9862,7 @@
                 <a:ea typeface="Trebuchet MS" pitchFamily="34" charset="-122"/>
                 <a:cs typeface="Trebuchet MS" pitchFamily="34" charset="-120"/>
               </a:rPr>
-              <a:t>finalist</a:t>
+              <a:t>cyclist</a:t>
             </a:r>
             <a:endParaRPr lang="en-US" sz="2800" dirty="0"/>
           </a:p>
@@ -10028,7 +10001,7 @@
                 <a:ea typeface="Trebuchet MS" pitchFamily="34" charset="-122"/>
                 <a:cs typeface="Trebuchet MS" pitchFamily="34" charset="-120"/>
               </a:rPr>
-              <a:t>final</a:t>
+              <a:t>cycl</a:t>
             </a:r>
             <a:endParaRPr lang="en-US" sz="1300" dirty="0"/>
           </a:p>
@@ -10067,7 +10040,7 @@
                 <a:ea typeface="Calibri" pitchFamily="34" charset="-122"/>
                 <a:cs typeface="Calibri" pitchFamily="34" charset="-120"/>
               </a:rPr>
-              <a:t>last or end</a:t>
+              <a:t>circle, wheel</a:t>
             </a:r>
             <a:endParaRPr lang="en-US" sz="850" dirty="0"/>
           </a:p>
@@ -10075,7 +10048,46 @@
       </p:sp>
       <p:sp>
         <p:nvSpPr>
-          <p:cNvPr id="19" name="Shape 17"/>
+          <p:cNvPr id="19" name="Text 17"/>
+          <p:cNvSpPr/>
+          <p:nvPr/>
+        </p:nvSpPr>
+        <p:spPr>
+          <a:xfrm>
+            <a:off x="2938272" y="2752344"/>
+            <a:ext cx="1828800" cy="182880"/>
+          </a:xfrm>
+          <a:prstGeom prst="rect">
+            <a:avLst/>
+          </a:prstGeom>
+          <a:noFill/>
+          <a:ln/>
+        </p:spPr>
+        <p:txBody>
+          <a:bodyPr wrap="square" lIns="0" tIns="0" rIns="0" bIns="0" rtlCol="0" anchor="t"/>
+          <a:lstStyle/>
+          <a:p>
+            <a:pPr algn="ctr" indent="0" marL="0">
+              <a:buNone/>
+            </a:pPr>
+            <a:r>
+              <a:rPr lang="en-US" sz="700" i="1" dirty="0">
+                <a:solidFill>
+                  <a:srgbClr val="94A3B8"/>
+                </a:solidFill>
+                <a:latin typeface="Calibri" pitchFamily="34" charset="0"/>
+                <a:ea typeface="Calibri" pitchFamily="34" charset="-122"/>
+                <a:cs typeface="Calibri" pitchFamily="34" charset="-120"/>
+              </a:rPr>
+              <a:t>'e' dropped before vowel suffix</a:t>
+            </a:r>
+            <a:endParaRPr lang="en-US" sz="700" dirty="0"/>
+          </a:p>
+        </p:txBody>
+      </p:sp>
+      <p:sp>
+        <p:nvSpPr>
+          <p:cNvPr id="20" name="Shape 18"/>
           <p:cNvSpPr/>
           <p:nvPr/>
         </p:nvSpPr>
@@ -10109,7 +10121,7 @@
       </p:sp>
       <p:sp>
         <p:nvSpPr>
-          <p:cNvPr id="20" name="Text 18"/>
+          <p:cNvPr id="21" name="Text 19"/>
           <p:cNvSpPr/>
           <p:nvPr/>
         </p:nvSpPr>
@@ -10148,7 +10160,7 @@
       </p:sp>
       <p:sp>
         <p:nvSpPr>
-          <p:cNvPr id="21" name="Text 19"/>
+          <p:cNvPr id="22" name="Text 20"/>
           <p:cNvSpPr/>
           <p:nvPr/>
         </p:nvSpPr>
@@ -10179,7 +10191,7 @@
                 <a:ea typeface="Calibri" pitchFamily="34" charset="-122"/>
                 <a:cs typeface="Calibri" pitchFamily="34" charset="-120"/>
               </a:rPr>
-              <a:t>person who does or believes</a:t>
+              <a:t>person who does</a:t>
             </a:r>
             <a:endParaRPr lang="en-US" sz="850" dirty="0"/>
           </a:p>
@@ -10187,7 +10199,7 @@
       </p:sp>
       <p:sp>
         <p:nvSpPr>
-          <p:cNvPr id="22" name="Shape 20"/>
+          <p:cNvPr id="23" name="Shape 21"/>
           <p:cNvSpPr/>
           <p:nvPr/>
         </p:nvSpPr>
@@ -10214,7 +10226,7 @@
       </p:sp>
       <p:sp>
         <p:nvSpPr>
-          <p:cNvPr id="23" name="Text 21"/>
+          <p:cNvPr id="24" name="Text 22"/>
           <p:cNvSpPr/>
           <p:nvPr/>
         </p:nvSpPr>
@@ -10253,7 +10265,7 @@
       </p:sp>
       <p:sp>
         <p:nvSpPr>
-          <p:cNvPr id="24" name="Shape 22"/>
+          <p:cNvPr id="25" name="Shape 23"/>
           <p:cNvSpPr/>
           <p:nvPr/>
         </p:nvSpPr>
@@ -10280,13 +10292,13 @@
       </p:sp>
       <p:sp>
         <p:nvSpPr>
-          <p:cNvPr id="25" name="Shape 23"/>
-          <p:cNvSpPr/>
-          <p:nvPr/>
-        </p:nvSpPr>
-        <p:spPr>
-          <a:xfrm>
-            <a:off x="2313432" y="3364992"/>
+          <p:cNvPr id="26" name="Shape 24"/>
+          <p:cNvSpPr/>
+          <p:nvPr/>
+        </p:nvSpPr>
+        <p:spPr>
+          <a:xfrm>
+            <a:off x="2999232" y="3364992"/>
             <a:ext cx="1645920" cy="475488"/>
           </a:xfrm>
           <a:prstGeom prst="rect">
@@ -10307,13 +10319,13 @@
       </p:sp>
       <p:sp>
         <p:nvSpPr>
-          <p:cNvPr id="26" name="Text 24"/>
-          <p:cNvSpPr/>
-          <p:nvPr/>
-        </p:nvSpPr>
-        <p:spPr>
-          <a:xfrm>
-            <a:off x="2313432" y="3364992"/>
+          <p:cNvPr id="27" name="Text 25"/>
+          <p:cNvSpPr/>
+          <p:nvPr/>
+        </p:nvSpPr>
+        <p:spPr>
+          <a:xfrm>
+            <a:off x="2999232" y="3364992"/>
             <a:ext cx="1645920" cy="475488"/>
           </a:xfrm>
           <a:prstGeom prst="rect">
@@ -10338,7 +10350,7 @@
                 <a:ea typeface="Trebuchet MS" pitchFamily="34" charset="-122"/>
                 <a:cs typeface="Trebuchet MS" pitchFamily="34" charset="-120"/>
               </a:rPr>
-              <a:t>fi</a:t>
+              <a:t>cy</a:t>
             </a:r>
             <a:endParaRPr lang="en-US" sz="1400" dirty="0"/>
           </a:p>
@@ -10346,14 +10358,14 @@
       </p:sp>
       <p:sp>
         <p:nvSpPr>
-          <p:cNvPr id="27" name="Text 25"/>
-          <p:cNvSpPr/>
-          <p:nvPr/>
-        </p:nvSpPr>
-        <p:spPr>
-          <a:xfrm>
-            <a:off x="3959352" y="3364992"/>
-            <a:ext cx="411480" cy="475488"/>
+          <p:cNvPr id="28" name="Text 26"/>
+          <p:cNvSpPr/>
+          <p:nvPr/>
+        </p:nvSpPr>
+        <p:spPr>
+          <a:xfrm>
+            <a:off x="4645152" y="3364992"/>
+            <a:ext cx="1097280" cy="475488"/>
           </a:xfrm>
           <a:prstGeom prst="rect">
             <a:avLst/>
@@ -10385,13 +10397,13 @@
       </p:sp>
       <p:sp>
         <p:nvSpPr>
-          <p:cNvPr id="28" name="Shape 26"/>
-          <p:cNvSpPr/>
-          <p:nvPr/>
-        </p:nvSpPr>
-        <p:spPr>
-          <a:xfrm>
-            <a:off x="4370832" y="3364992"/>
+          <p:cNvPr id="29" name="Shape 27"/>
+          <p:cNvSpPr/>
+          <p:nvPr/>
+        </p:nvSpPr>
+        <p:spPr>
+          <a:xfrm>
+            <a:off x="5742432" y="3364992"/>
             <a:ext cx="1645920" cy="475488"/>
           </a:xfrm>
           <a:prstGeom prst="rect">
@@ -10412,13 +10424,13 @@
       </p:sp>
       <p:sp>
         <p:nvSpPr>
-          <p:cNvPr id="29" name="Text 27"/>
-          <p:cNvSpPr/>
-          <p:nvPr/>
-        </p:nvSpPr>
-        <p:spPr>
-          <a:xfrm>
-            <a:off x="4370832" y="3364992"/>
+          <p:cNvPr id="30" name="Text 28"/>
+          <p:cNvSpPr/>
+          <p:nvPr/>
+        </p:nvSpPr>
+        <p:spPr>
+          <a:xfrm>
+            <a:off x="5742432" y="3364992"/>
             <a:ext cx="1645920" cy="475488"/>
           </a:xfrm>
           <a:prstGeom prst="rect">
@@ -10443,7 +10455,7 @@
                 <a:ea typeface="Trebuchet MS" pitchFamily="34" charset="-122"/>
                 <a:cs typeface="Trebuchet MS" pitchFamily="34" charset="-120"/>
               </a:rPr>
-              <a:t>nal</a:t>
+              <a:t>clist</a:t>
             </a:r>
             <a:endParaRPr lang="en-US" sz="1400" dirty="0"/>
           </a:p>
@@ -10451,193 +10463,286 @@
       </p:sp>
       <p:sp>
         <p:nvSpPr>
-          <p:cNvPr id="30" name="Text 28"/>
-          <p:cNvSpPr/>
-          <p:nvPr/>
-        </p:nvSpPr>
-        <p:spPr>
-          <a:xfrm>
-            <a:off x="6016752" y="3364992"/>
-            <a:ext cx="411480" cy="475488"/>
-          </a:xfrm>
-          <a:prstGeom prst="rect">
-            <a:avLst/>
-          </a:prstGeom>
-          <a:noFill/>
-          <a:ln/>
-        </p:spPr>
-        <p:txBody>
-          <a:bodyPr wrap="square" lIns="0" tIns="0" rIns="0" bIns="0" rtlCol="0" anchor="ctr"/>
-          <a:lstStyle/>
-          <a:p>
-            <a:pPr algn="ctr" indent="0" marL="0">
-              <a:buNone/>
-            </a:pPr>
-            <a:r>
-              <a:rPr lang="en-US" sz="1600" b="1" dirty="0">
-                <a:solidFill>
-                  <a:srgbClr val="0D9488"/>
+          <p:cNvPr id="31" name="Shape 29"/>
+          <p:cNvSpPr/>
+          <p:nvPr/>
+        </p:nvSpPr>
+        <p:spPr>
+          <a:xfrm>
+            <a:off x="365760" y="4096512"/>
+            <a:ext cx="1371600" cy="804672"/>
+          </a:xfrm>
+          <a:prstGeom prst="rect">
+            <a:avLst>
+              <a:gd name="adj" fmla="val 6818"/>
+            </a:avLst>
+          </a:prstGeom>
+          <a:solidFill>
+            <a:srgbClr val="E2E8F0"/>
+          </a:solidFill>
+          <a:ln w="12700">
+            <a:solidFill>
+              <a:srgbClr val="E2E8F0"/>
+            </a:solidFill>
+            <a:prstDash val="solid"/>
+          </a:ln>
+        </p:spPr>
+      </p:sp>
+      <p:sp>
+        <p:nvSpPr>
+          <p:cNvPr id="32" name="Text 30"/>
+          <p:cNvSpPr/>
+          <p:nvPr/>
+        </p:nvSpPr>
+        <p:spPr>
+          <a:xfrm>
+            <a:off x="365760" y="4096512"/>
+            <a:ext cx="1371600" cy="804672"/>
+          </a:xfrm>
+          <a:prstGeom prst="rect">
+            <a:avLst/>
+          </a:prstGeom>
+          <a:noFill/>
+          <a:ln/>
+        </p:spPr>
+        <p:txBody>
+          <a:bodyPr wrap="square" lIns="0" tIns="0" rIns="0" bIns="0" rtlCol="0" anchor="ctr"/>
+          <a:lstStyle/>
+          <a:p>
+            <a:pPr algn="ctr" indent="0" marL="0">
+              <a:buNone/>
+            </a:pPr>
+            <a:r>
+              <a:rPr lang="en-US" sz="1100" b="1" dirty="0">
+                <a:solidFill>
+                  <a:srgbClr val="475569"/>
                 </a:solidFill>
                 <a:latin typeface="Trebuchet MS" pitchFamily="34" charset="0"/>
                 <a:ea typeface="Trebuchet MS" pitchFamily="34" charset="-122"/>
                 <a:cs typeface="Trebuchet MS" pitchFamily="34" charset="-120"/>
               </a:rPr>
-              <a:t>·</a:t>
-            </a:r>
-            <a:endParaRPr lang="en-US" sz="1600" dirty="0"/>
-          </a:p>
-        </p:txBody>
-      </p:sp>
-      <p:sp>
-        <p:nvSpPr>
-          <p:cNvPr id="31" name="Shape 29"/>
-          <p:cNvSpPr/>
-          <p:nvPr/>
-        </p:nvSpPr>
-        <p:spPr>
-          <a:xfrm>
-            <a:off x="6428232" y="3364992"/>
-            <a:ext cx="1645920" cy="475488"/>
+              <a:t>Phonemes</a:t>
+            </a:r>
+            <a:endParaRPr lang="en-US" sz="1100" dirty="0"/>
+          </a:p>
+        </p:txBody>
+      </p:sp>
+      <p:sp>
+        <p:nvSpPr>
+          <p:cNvPr id="33" name="Shape 31"/>
+          <p:cNvSpPr/>
+          <p:nvPr/>
+        </p:nvSpPr>
+        <p:spPr>
+          <a:xfrm>
+            <a:off x="1874520" y="4096512"/>
+            <a:ext cx="6903720" cy="804672"/>
           </a:xfrm>
           <a:prstGeom prst="rect">
             <a:avLst>
-              <a:gd name="adj" fmla="val 9615"/>
+              <a:gd name="adj" fmla="val 6818"/>
             </a:avLst>
           </a:prstGeom>
           <a:solidFill>
+            <a:srgbClr val="FCE7F3"/>
+          </a:solidFill>
+          <a:ln w="12700">
+            <a:solidFill>
+              <a:srgbClr val="DB2777"/>
+            </a:solidFill>
+            <a:prstDash val="solid"/>
+          </a:ln>
+        </p:spPr>
+      </p:sp>
+      <p:sp>
+        <p:nvSpPr>
+          <p:cNvPr id="34" name="Shape 32"/>
+          <p:cNvSpPr/>
+          <p:nvPr/>
+        </p:nvSpPr>
+        <p:spPr>
+          <a:xfrm>
+            <a:off x="2254649" y="4169664"/>
+            <a:ext cx="685800" cy="384048"/>
+          </a:xfrm>
+          <a:prstGeom prst="rect">
+            <a:avLst>
+              <a:gd name="adj" fmla="val 9524"/>
+            </a:avLst>
+          </a:prstGeom>
+          <a:solidFill>
             <a:srgbClr val="FFFFFF"/>
           </a:solidFill>
           <a:ln w="12700">
             <a:solidFill>
-              <a:srgbClr val="0D9488"/>
-            </a:solidFill>
-            <a:prstDash val="solid"/>
-          </a:ln>
-        </p:spPr>
-      </p:sp>
-      <p:sp>
-        <p:nvSpPr>
-          <p:cNvPr id="32" name="Text 30"/>
-          <p:cNvSpPr/>
-          <p:nvPr/>
-        </p:nvSpPr>
-        <p:spPr>
-          <a:xfrm>
-            <a:off x="6428232" y="3364992"/>
-            <a:ext cx="1645920" cy="475488"/>
-          </a:xfrm>
-          <a:prstGeom prst="rect">
-            <a:avLst/>
-          </a:prstGeom>
-          <a:noFill/>
-          <a:ln/>
-        </p:spPr>
-        <p:txBody>
-          <a:bodyPr wrap="square" lIns="0" tIns="0" rIns="0" bIns="0" rtlCol="0" anchor="ctr"/>
-          <a:lstStyle/>
-          <a:p>
-            <a:pPr algn="ctr" indent="0" marL="0">
-              <a:buNone/>
-            </a:pPr>
-            <a:r>
-              <a:rPr lang="en-US" sz="1400" b="1" dirty="0">
-                <a:solidFill>
-                  <a:srgbClr val="0D9488"/>
+              <a:srgbClr val="DB2777"/>
+            </a:solidFill>
+            <a:prstDash val="solid"/>
+          </a:ln>
+        </p:spPr>
+      </p:sp>
+      <p:sp>
+        <p:nvSpPr>
+          <p:cNvPr id="35" name="Text 33"/>
+          <p:cNvSpPr/>
+          <p:nvPr/>
+        </p:nvSpPr>
+        <p:spPr>
+          <a:xfrm>
+            <a:off x="2254649" y="4169664"/>
+            <a:ext cx="685800" cy="384048"/>
+          </a:xfrm>
+          <a:prstGeom prst="rect">
+            <a:avLst/>
+          </a:prstGeom>
+          <a:noFill/>
+          <a:ln/>
+        </p:spPr>
+        <p:txBody>
+          <a:bodyPr wrap="square" lIns="0" tIns="0" rIns="0" bIns="0" rtlCol="0" anchor="ctr"/>
+          <a:lstStyle/>
+          <a:p>
+            <a:pPr algn="ctr" indent="0" marL="0">
+              <a:buNone/>
+            </a:pPr>
+            <a:r>
+              <a:rPr lang="en-US" sz="900" b="1" dirty="0">
+                <a:solidFill>
+                  <a:srgbClr val="9D174D"/>
                 </a:solidFill>
                 <a:latin typeface="Trebuchet MS" pitchFamily="34" charset="0"/>
                 <a:ea typeface="Trebuchet MS" pitchFamily="34" charset="-122"/>
                 <a:cs typeface="Trebuchet MS" pitchFamily="34" charset="-120"/>
               </a:rPr>
-              <a:t>ist</a:t>
-            </a:r>
-            <a:endParaRPr lang="en-US" sz="1400" dirty="0"/>
-          </a:p>
-        </p:txBody>
-      </p:sp>
-      <p:sp>
-        <p:nvSpPr>
-          <p:cNvPr id="33" name="Shape 31"/>
-          <p:cNvSpPr/>
-          <p:nvPr/>
-        </p:nvSpPr>
-        <p:spPr>
-          <a:xfrm>
-            <a:off x="365760" y="4096512"/>
-            <a:ext cx="1371600" cy="804672"/>
+              <a:t>c</a:t>
+            </a:r>
+            <a:endParaRPr lang="en-US" sz="900" dirty="0"/>
+          </a:p>
+        </p:txBody>
+      </p:sp>
+      <p:sp>
+        <p:nvSpPr>
+          <p:cNvPr id="36" name="Text 34"/>
+          <p:cNvSpPr/>
+          <p:nvPr/>
+        </p:nvSpPr>
+        <p:spPr>
+          <a:xfrm>
+            <a:off x="2254649" y="4572000"/>
+            <a:ext cx="685800" cy="219456"/>
+          </a:xfrm>
+          <a:prstGeom prst="rect">
+            <a:avLst/>
+          </a:prstGeom>
+          <a:noFill/>
+          <a:ln/>
+        </p:spPr>
+        <p:txBody>
+          <a:bodyPr wrap="square" lIns="0" tIns="0" rIns="0" bIns="0" rtlCol="0" anchor="t"/>
+          <a:lstStyle/>
+          <a:p>
+            <a:pPr algn="ctr" indent="0" marL="0">
+              <a:buNone/>
+            </a:pPr>
+            <a:r>
+              <a:rPr lang="en-US" sz="750" i="1" dirty="0">
+                <a:solidFill>
+                  <a:srgbClr val="94A3B8"/>
+                </a:solidFill>
+                <a:latin typeface="Calibri" pitchFamily="34" charset="0"/>
+                <a:ea typeface="Calibri" pitchFamily="34" charset="-122"/>
+                <a:cs typeface="Calibri" pitchFamily="34" charset="-120"/>
+              </a:rPr>
+              <a:t>/s/</a:t>
+            </a:r>
+            <a:endParaRPr lang="en-US" sz="750" dirty="0"/>
+          </a:p>
+        </p:txBody>
+      </p:sp>
+      <p:sp>
+        <p:nvSpPr>
+          <p:cNvPr id="37" name="Shape 35"/>
+          <p:cNvSpPr/>
+          <p:nvPr/>
+        </p:nvSpPr>
+        <p:spPr>
+          <a:xfrm>
+            <a:off x="3293146" y="4169664"/>
+            <a:ext cx="685800" cy="384048"/>
           </a:xfrm>
           <a:prstGeom prst="rect">
             <a:avLst>
-              <a:gd name="adj" fmla="val 6818"/>
+              <a:gd name="adj" fmla="val 9524"/>
             </a:avLst>
           </a:prstGeom>
           <a:solidFill>
-            <a:srgbClr val="E2E8F0"/>
-          </a:solidFill>
-          <a:ln w="12700">
-            <a:solidFill>
-              <a:srgbClr val="E2E8F0"/>
-            </a:solidFill>
-            <a:prstDash val="solid"/>
-          </a:ln>
-        </p:spPr>
-      </p:sp>
-      <p:sp>
-        <p:nvSpPr>
-          <p:cNvPr id="34" name="Text 32"/>
-          <p:cNvSpPr/>
-          <p:nvPr/>
-        </p:nvSpPr>
-        <p:spPr>
-          <a:xfrm>
-            <a:off x="365760" y="4096512"/>
-            <a:ext cx="1371600" cy="804672"/>
-          </a:xfrm>
-          <a:prstGeom prst="rect">
-            <a:avLst/>
-          </a:prstGeom>
-          <a:noFill/>
-          <a:ln/>
-        </p:spPr>
-        <p:txBody>
-          <a:bodyPr wrap="square" lIns="0" tIns="0" rIns="0" bIns="0" rtlCol="0" anchor="ctr"/>
-          <a:lstStyle/>
-          <a:p>
-            <a:pPr algn="ctr" indent="0" marL="0">
-              <a:buNone/>
-            </a:pPr>
-            <a:r>
-              <a:rPr lang="en-US" sz="1100" b="1" dirty="0">
-                <a:solidFill>
-                  <a:srgbClr val="475569"/>
+            <a:srgbClr val="FFFFFF"/>
+          </a:solidFill>
+          <a:ln w="12700">
+            <a:solidFill>
+              <a:srgbClr val="DB2777"/>
+            </a:solidFill>
+            <a:prstDash val="solid"/>
+          </a:ln>
+        </p:spPr>
+      </p:sp>
+      <p:sp>
+        <p:nvSpPr>
+          <p:cNvPr id="38" name="Text 36"/>
+          <p:cNvSpPr/>
+          <p:nvPr/>
+        </p:nvSpPr>
+        <p:spPr>
+          <a:xfrm>
+            <a:off x="3293146" y="4169664"/>
+            <a:ext cx="685800" cy="384048"/>
+          </a:xfrm>
+          <a:prstGeom prst="rect">
+            <a:avLst/>
+          </a:prstGeom>
+          <a:noFill/>
+          <a:ln/>
+        </p:spPr>
+        <p:txBody>
+          <a:bodyPr wrap="square" lIns="0" tIns="0" rIns="0" bIns="0" rtlCol="0" anchor="ctr"/>
+          <a:lstStyle/>
+          <a:p>
+            <a:pPr algn="ctr" indent="0" marL="0">
+              <a:buNone/>
+            </a:pPr>
+            <a:r>
+              <a:rPr lang="en-US" sz="900" b="1" dirty="0">
+                <a:solidFill>
+                  <a:srgbClr val="9D174D"/>
                 </a:solidFill>
                 <a:latin typeface="Trebuchet MS" pitchFamily="34" charset="0"/>
                 <a:ea typeface="Trebuchet MS" pitchFamily="34" charset="-122"/>
                 <a:cs typeface="Trebuchet MS" pitchFamily="34" charset="-120"/>
               </a:rPr>
-              <a:t>Phonemes</a:t>
-            </a:r>
-            <a:endParaRPr lang="en-US" sz="1100" dirty="0"/>
-          </a:p>
-        </p:txBody>
-      </p:sp>
-      <p:sp>
-        <p:nvSpPr>
-          <p:cNvPr id="35" name="Shape 33"/>
-          <p:cNvSpPr/>
-          <p:nvPr/>
-        </p:nvSpPr>
-        <p:spPr>
-          <a:xfrm>
-            <a:off x="1874520" y="4096512"/>
-            <a:ext cx="6903720" cy="658368"/>
+              <a:t>y</a:t>
+            </a:r>
+            <a:endParaRPr lang="en-US" sz="900" dirty="0"/>
+          </a:p>
+        </p:txBody>
+      </p:sp>
+      <p:sp>
+        <p:nvSpPr>
+          <p:cNvPr id="39" name="Shape 37"/>
+          <p:cNvSpPr/>
+          <p:nvPr/>
+        </p:nvSpPr>
+        <p:spPr>
+          <a:xfrm>
+            <a:off x="4331643" y="4169664"/>
+            <a:ext cx="685800" cy="384048"/>
           </a:xfrm>
           <a:prstGeom prst="rect">
             <a:avLst>
-              <a:gd name="adj" fmla="val 8333"/>
+              <a:gd name="adj" fmla="val 9524"/>
             </a:avLst>
           </a:prstGeom>
           <a:solidFill>
-            <a:srgbClr val="FCE7F3"/>
+            <a:srgbClr val="FFFFFF"/>
           </a:solidFill>
           <a:ln w="12700">
             <a:solidFill>
@@ -10649,41 +10754,14 @@
       </p:sp>
       <p:sp>
         <p:nvSpPr>
-          <p:cNvPr id="36" name="Shape 34"/>
-          <p:cNvSpPr/>
-          <p:nvPr/>
-        </p:nvSpPr>
-        <p:spPr>
-          <a:xfrm>
-            <a:off x="2023872" y="4169664"/>
-            <a:ext cx="685800" cy="475488"/>
-          </a:xfrm>
-          <a:prstGeom prst="rect">
-            <a:avLst>
-              <a:gd name="adj" fmla="val 7692"/>
-            </a:avLst>
-          </a:prstGeom>
-          <a:solidFill>
-            <a:srgbClr val="FFFFFF"/>
-          </a:solidFill>
-          <a:ln w="12700">
-            <a:solidFill>
-              <a:srgbClr val="DB2777"/>
-            </a:solidFill>
-            <a:prstDash val="solid"/>
-          </a:ln>
-        </p:spPr>
-      </p:sp>
-      <p:sp>
-        <p:nvSpPr>
-          <p:cNvPr id="37" name="Text 35"/>
-          <p:cNvSpPr/>
-          <p:nvPr/>
-        </p:nvSpPr>
-        <p:spPr>
-          <a:xfrm>
-            <a:off x="2023872" y="4169664"/>
-            <a:ext cx="685800" cy="475488"/>
+          <p:cNvPr id="40" name="Text 38"/>
+          <p:cNvSpPr/>
+          <p:nvPr/>
+        </p:nvSpPr>
+        <p:spPr>
+          <a:xfrm>
+            <a:off x="4331643" y="4169664"/>
+            <a:ext cx="685800" cy="384048"/>
           </a:xfrm>
           <a:prstGeom prst="rect">
             <a:avLst/>
@@ -10707,7 +10785,7 @@
                 <a:ea typeface="Trebuchet MS" pitchFamily="34" charset="-122"/>
                 <a:cs typeface="Trebuchet MS" pitchFamily="34" charset="-120"/>
               </a:rPr>
-              <a:t>f</a:t>
+              <a:t>cl</a:t>
             </a:r>
             <a:endParaRPr lang="en-US" sz="900" dirty="0"/>
           </a:p>
@@ -10715,18 +10793,18 @@
       </p:sp>
       <p:sp>
         <p:nvSpPr>
-          <p:cNvPr id="38" name="Shape 36"/>
-          <p:cNvSpPr/>
-          <p:nvPr/>
-        </p:nvSpPr>
-        <p:spPr>
-          <a:xfrm>
-            <a:off x="2831592" y="4169664"/>
-            <a:ext cx="685800" cy="475488"/>
+          <p:cNvPr id="41" name="Shape 39"/>
+          <p:cNvSpPr/>
+          <p:nvPr/>
+        </p:nvSpPr>
+        <p:spPr>
+          <a:xfrm>
+            <a:off x="5370141" y="4169664"/>
+            <a:ext cx="685800" cy="384048"/>
           </a:xfrm>
           <a:prstGeom prst="rect">
             <a:avLst>
-              <a:gd name="adj" fmla="val 7692"/>
+              <a:gd name="adj" fmla="val 9524"/>
             </a:avLst>
           </a:prstGeom>
           <a:solidFill>
@@ -10742,14 +10820,14 @@
       </p:sp>
       <p:sp>
         <p:nvSpPr>
-          <p:cNvPr id="39" name="Text 37"/>
-          <p:cNvSpPr/>
-          <p:nvPr/>
-        </p:nvSpPr>
-        <p:spPr>
-          <a:xfrm>
-            <a:off x="2831592" y="4169664"/>
-            <a:ext cx="685800" cy="475488"/>
+          <p:cNvPr id="42" name="Text 40"/>
+          <p:cNvSpPr/>
+          <p:nvPr/>
+        </p:nvSpPr>
+        <p:spPr>
+          <a:xfrm>
+            <a:off x="5370141" y="4169664"/>
+            <a:ext cx="685800" cy="384048"/>
           </a:xfrm>
           <a:prstGeom prst="rect">
             <a:avLst/>
@@ -10781,18 +10859,18 @@
       </p:sp>
       <p:sp>
         <p:nvSpPr>
-          <p:cNvPr id="40" name="Shape 38"/>
-          <p:cNvSpPr/>
-          <p:nvPr/>
-        </p:nvSpPr>
-        <p:spPr>
-          <a:xfrm>
-            <a:off x="3639312" y="4169664"/>
-            <a:ext cx="685800" cy="475488"/>
+          <p:cNvPr id="43" name="Shape 41"/>
+          <p:cNvSpPr/>
+          <p:nvPr/>
+        </p:nvSpPr>
+        <p:spPr>
+          <a:xfrm>
+            <a:off x="6408638" y="4169664"/>
+            <a:ext cx="685800" cy="384048"/>
           </a:xfrm>
           <a:prstGeom prst="rect">
             <a:avLst>
-              <a:gd name="adj" fmla="val 7692"/>
+              <a:gd name="adj" fmla="val 9524"/>
             </a:avLst>
           </a:prstGeom>
           <a:solidFill>
@@ -10808,14 +10886,14 @@
       </p:sp>
       <p:sp>
         <p:nvSpPr>
-          <p:cNvPr id="41" name="Text 39"/>
-          <p:cNvSpPr/>
-          <p:nvPr/>
-        </p:nvSpPr>
-        <p:spPr>
-          <a:xfrm>
-            <a:off x="3639312" y="4169664"/>
-            <a:ext cx="685800" cy="475488"/>
+          <p:cNvPr id="44" name="Text 42"/>
+          <p:cNvSpPr/>
+          <p:nvPr/>
+        </p:nvSpPr>
+        <p:spPr>
+          <a:xfrm>
+            <a:off x="6408638" y="4169664"/>
+            <a:ext cx="685800" cy="384048"/>
           </a:xfrm>
           <a:prstGeom prst="rect">
             <a:avLst/>
@@ -10839,7 +10917,7 @@
                 <a:ea typeface="Trebuchet MS" pitchFamily="34" charset="-122"/>
                 <a:cs typeface="Trebuchet MS" pitchFamily="34" charset="-120"/>
               </a:rPr>
-              <a:t>n</a:t>
+              <a:t>s</a:t>
             </a:r>
             <a:endParaRPr lang="en-US" sz="900" dirty="0"/>
           </a:p>
@@ -10847,18 +10925,18 @@
       </p:sp>
       <p:sp>
         <p:nvSpPr>
-          <p:cNvPr id="42" name="Shape 40"/>
-          <p:cNvSpPr/>
-          <p:nvPr/>
-        </p:nvSpPr>
-        <p:spPr>
-          <a:xfrm>
-            <a:off x="4447032" y="4169664"/>
-            <a:ext cx="685800" cy="475488"/>
+          <p:cNvPr id="45" name="Shape 43"/>
+          <p:cNvSpPr/>
+          <p:nvPr/>
+        </p:nvSpPr>
+        <p:spPr>
+          <a:xfrm>
+            <a:off x="7447135" y="4169664"/>
+            <a:ext cx="685800" cy="384048"/>
           </a:xfrm>
           <a:prstGeom prst="rect">
             <a:avLst>
-              <a:gd name="adj" fmla="val 7692"/>
+              <a:gd name="adj" fmla="val 9524"/>
             </a:avLst>
           </a:prstGeom>
           <a:solidFill>
@@ -10874,278 +10952,14 @@
       </p:sp>
       <p:sp>
         <p:nvSpPr>
-          <p:cNvPr id="43" name="Text 41"/>
-          <p:cNvSpPr/>
-          <p:nvPr/>
-        </p:nvSpPr>
-        <p:spPr>
-          <a:xfrm>
-            <a:off x="4447032" y="4169664"/>
-            <a:ext cx="685800" cy="475488"/>
-          </a:xfrm>
-          <a:prstGeom prst="rect">
-            <a:avLst/>
-          </a:prstGeom>
-          <a:noFill/>
-          <a:ln/>
-        </p:spPr>
-        <p:txBody>
-          <a:bodyPr wrap="square" lIns="0" tIns="0" rIns="0" bIns="0" rtlCol="0" anchor="ctr"/>
-          <a:lstStyle/>
-          <a:p>
-            <a:pPr algn="ctr" indent="0" marL="0">
-              <a:buNone/>
-            </a:pPr>
-            <a:r>
-              <a:rPr lang="en-US" sz="900" b="1" dirty="0">
-                <a:solidFill>
-                  <a:srgbClr val="9D174D"/>
-                </a:solidFill>
-                <a:latin typeface="Trebuchet MS" pitchFamily="34" charset="0"/>
-                <a:ea typeface="Trebuchet MS" pitchFamily="34" charset="-122"/>
-                <a:cs typeface="Trebuchet MS" pitchFamily="34" charset="-120"/>
-              </a:rPr>
-              <a:t>a</a:t>
-            </a:r>
-            <a:endParaRPr lang="en-US" sz="900" dirty="0"/>
-          </a:p>
-        </p:txBody>
-      </p:sp>
-      <p:sp>
-        <p:nvSpPr>
-          <p:cNvPr id="44" name="Shape 42"/>
-          <p:cNvSpPr/>
-          <p:nvPr/>
-        </p:nvSpPr>
-        <p:spPr>
-          <a:xfrm>
-            <a:off x="5254752" y="4169664"/>
-            <a:ext cx="685800" cy="475488"/>
-          </a:xfrm>
-          <a:prstGeom prst="rect">
-            <a:avLst>
-              <a:gd name="adj" fmla="val 7692"/>
-            </a:avLst>
-          </a:prstGeom>
-          <a:solidFill>
-            <a:srgbClr val="FFFFFF"/>
-          </a:solidFill>
-          <a:ln w="12700">
-            <a:solidFill>
-              <a:srgbClr val="DB2777"/>
-            </a:solidFill>
-            <a:prstDash val="solid"/>
-          </a:ln>
-        </p:spPr>
-      </p:sp>
-      <p:sp>
-        <p:nvSpPr>
-          <p:cNvPr id="45" name="Text 43"/>
-          <p:cNvSpPr/>
-          <p:nvPr/>
-        </p:nvSpPr>
-        <p:spPr>
-          <a:xfrm>
-            <a:off x="5254752" y="4169664"/>
-            <a:ext cx="685800" cy="475488"/>
-          </a:xfrm>
-          <a:prstGeom prst="rect">
-            <a:avLst/>
-          </a:prstGeom>
-          <a:noFill/>
-          <a:ln/>
-        </p:spPr>
-        <p:txBody>
-          <a:bodyPr wrap="square" lIns="0" tIns="0" rIns="0" bIns="0" rtlCol="0" anchor="ctr"/>
-          <a:lstStyle/>
-          <a:p>
-            <a:pPr algn="ctr" indent="0" marL="0">
-              <a:buNone/>
-            </a:pPr>
-            <a:r>
-              <a:rPr lang="en-US" sz="900" b="1" dirty="0">
-                <a:solidFill>
-                  <a:srgbClr val="9D174D"/>
-                </a:solidFill>
-                <a:latin typeface="Trebuchet MS" pitchFamily="34" charset="0"/>
-                <a:ea typeface="Trebuchet MS" pitchFamily="34" charset="-122"/>
-                <a:cs typeface="Trebuchet MS" pitchFamily="34" charset="-120"/>
-              </a:rPr>
-              <a:t>l</a:t>
-            </a:r>
-            <a:endParaRPr lang="en-US" sz="900" dirty="0"/>
-          </a:p>
-        </p:txBody>
-      </p:sp>
-      <p:sp>
-        <p:nvSpPr>
-          <p:cNvPr id="46" name="Shape 44"/>
-          <p:cNvSpPr/>
-          <p:nvPr/>
-        </p:nvSpPr>
-        <p:spPr>
-          <a:xfrm>
-            <a:off x="6062472" y="4169664"/>
-            <a:ext cx="685800" cy="475488"/>
-          </a:xfrm>
-          <a:prstGeom prst="rect">
-            <a:avLst>
-              <a:gd name="adj" fmla="val 7692"/>
-            </a:avLst>
-          </a:prstGeom>
-          <a:solidFill>
-            <a:srgbClr val="FFFFFF"/>
-          </a:solidFill>
-          <a:ln w="12700">
-            <a:solidFill>
-              <a:srgbClr val="DB2777"/>
-            </a:solidFill>
-            <a:prstDash val="solid"/>
-          </a:ln>
-        </p:spPr>
-      </p:sp>
-      <p:sp>
-        <p:nvSpPr>
-          <p:cNvPr id="47" name="Text 45"/>
-          <p:cNvSpPr/>
-          <p:nvPr/>
-        </p:nvSpPr>
-        <p:spPr>
-          <a:xfrm>
-            <a:off x="6062472" y="4169664"/>
-            <a:ext cx="685800" cy="475488"/>
-          </a:xfrm>
-          <a:prstGeom prst="rect">
-            <a:avLst/>
-          </a:prstGeom>
-          <a:noFill/>
-          <a:ln/>
-        </p:spPr>
-        <p:txBody>
-          <a:bodyPr wrap="square" lIns="0" tIns="0" rIns="0" bIns="0" rtlCol="0" anchor="ctr"/>
-          <a:lstStyle/>
-          <a:p>
-            <a:pPr algn="ctr" indent="0" marL="0">
-              <a:buNone/>
-            </a:pPr>
-            <a:r>
-              <a:rPr lang="en-US" sz="900" b="1" dirty="0">
-                <a:solidFill>
-                  <a:srgbClr val="9D174D"/>
-                </a:solidFill>
-                <a:latin typeface="Trebuchet MS" pitchFamily="34" charset="0"/>
-                <a:ea typeface="Trebuchet MS" pitchFamily="34" charset="-122"/>
-                <a:cs typeface="Trebuchet MS" pitchFamily="34" charset="-120"/>
-              </a:rPr>
-              <a:t>i</a:t>
-            </a:r>
-            <a:endParaRPr lang="en-US" sz="900" dirty="0"/>
-          </a:p>
-        </p:txBody>
-      </p:sp>
-      <p:sp>
-        <p:nvSpPr>
-          <p:cNvPr id="48" name="Shape 46"/>
-          <p:cNvSpPr/>
-          <p:nvPr/>
-        </p:nvSpPr>
-        <p:spPr>
-          <a:xfrm>
-            <a:off x="6870192" y="4169664"/>
-            <a:ext cx="685800" cy="475488"/>
-          </a:xfrm>
-          <a:prstGeom prst="rect">
-            <a:avLst>
-              <a:gd name="adj" fmla="val 7692"/>
-            </a:avLst>
-          </a:prstGeom>
-          <a:solidFill>
-            <a:srgbClr val="FFFFFF"/>
-          </a:solidFill>
-          <a:ln w="12700">
-            <a:solidFill>
-              <a:srgbClr val="DB2777"/>
-            </a:solidFill>
-            <a:prstDash val="solid"/>
-          </a:ln>
-        </p:spPr>
-      </p:sp>
-      <p:sp>
-        <p:nvSpPr>
-          <p:cNvPr id="49" name="Text 47"/>
-          <p:cNvSpPr/>
-          <p:nvPr/>
-        </p:nvSpPr>
-        <p:spPr>
-          <a:xfrm>
-            <a:off x="6870192" y="4169664"/>
-            <a:ext cx="685800" cy="475488"/>
-          </a:xfrm>
-          <a:prstGeom prst="rect">
-            <a:avLst/>
-          </a:prstGeom>
-          <a:noFill/>
-          <a:ln/>
-        </p:spPr>
-        <p:txBody>
-          <a:bodyPr wrap="square" lIns="0" tIns="0" rIns="0" bIns="0" rtlCol="0" anchor="ctr"/>
-          <a:lstStyle/>
-          <a:p>
-            <a:pPr algn="ctr" indent="0" marL="0">
-              <a:buNone/>
-            </a:pPr>
-            <a:r>
-              <a:rPr lang="en-US" sz="900" b="1" dirty="0">
-                <a:solidFill>
-                  <a:srgbClr val="9D174D"/>
-                </a:solidFill>
-                <a:latin typeface="Trebuchet MS" pitchFamily="34" charset="0"/>
-                <a:ea typeface="Trebuchet MS" pitchFamily="34" charset="-122"/>
-                <a:cs typeface="Trebuchet MS" pitchFamily="34" charset="-120"/>
-              </a:rPr>
-              <a:t>s</a:t>
-            </a:r>
-            <a:endParaRPr lang="en-US" sz="900" dirty="0"/>
-          </a:p>
-        </p:txBody>
-      </p:sp>
-      <p:sp>
-        <p:nvSpPr>
-          <p:cNvPr id="50" name="Shape 48"/>
-          <p:cNvSpPr/>
-          <p:nvPr/>
-        </p:nvSpPr>
-        <p:spPr>
-          <a:xfrm>
-            <a:off x="7677912" y="4169664"/>
-            <a:ext cx="685800" cy="475488"/>
-          </a:xfrm>
-          <a:prstGeom prst="rect">
-            <a:avLst>
-              <a:gd name="adj" fmla="val 7692"/>
-            </a:avLst>
-          </a:prstGeom>
-          <a:solidFill>
-            <a:srgbClr val="FFFFFF"/>
-          </a:solidFill>
-          <a:ln w="12700">
-            <a:solidFill>
-              <a:srgbClr val="DB2777"/>
-            </a:solidFill>
-            <a:prstDash val="solid"/>
-          </a:ln>
-        </p:spPr>
-      </p:sp>
-      <p:sp>
-        <p:nvSpPr>
-          <p:cNvPr id="51" name="Text 49"/>
-          <p:cNvSpPr/>
-          <p:nvPr/>
-        </p:nvSpPr>
-        <p:spPr>
-          <a:xfrm>
-            <a:off x="7677912" y="4169664"/>
-            <a:ext cx="685800" cy="475488"/>
+          <p:cNvPr id="46" name="Text 44"/>
+          <p:cNvSpPr/>
+          <p:nvPr/>
+        </p:nvSpPr>
+        <p:spPr>
+          <a:xfrm>
+            <a:off x="7447135" y="4169664"/>
+            <a:ext cx="685800" cy="384048"/>
           </a:xfrm>
           <a:prstGeom prst="rect">
             <a:avLst/>
@@ -11600,7 +11414,7 @@
                 <a:ea typeface="Trebuchet MS" pitchFamily="34" charset="-122"/>
                 <a:cs typeface="Trebuchet MS" pitchFamily="34" charset="-120"/>
               </a:rPr>
-              <a:t>cyclist</a:t>
+              <a:t>guitarist</a:t>
             </a:r>
             <a:endParaRPr lang="en-US" sz="2800" dirty="0"/>
           </a:p>
@@ -12427,7 +12241,7 @@
                 <a:ea typeface="Trebuchet MS" pitchFamily="34" charset="-122"/>
                 <a:cs typeface="Trebuchet MS" pitchFamily="34" charset="-120"/>
               </a:rPr>
-              <a:t>cyclist</a:t>
+              <a:t>guitarist</a:t>
             </a:r>
             <a:endParaRPr lang="en-US" sz="2800" dirty="0"/>
           </a:p>
@@ -12566,7 +12380,7 @@
                 <a:ea typeface="Trebuchet MS" pitchFamily="34" charset="-122"/>
                 <a:cs typeface="Trebuchet MS" pitchFamily="34" charset="-120"/>
               </a:rPr>
-              <a:t>cycl</a:t>
+              <a:t>guitar</a:t>
             </a:r>
             <a:endParaRPr lang="en-US" sz="1300" dirty="0"/>
           </a:p>
@@ -12605,7 +12419,7 @@
                 <a:ea typeface="Calibri" pitchFamily="34" charset="-122"/>
                 <a:cs typeface="Calibri" pitchFamily="34" charset="-120"/>
               </a:rPr>
-              <a:t>circle or wheel</a:t>
+              <a:t>a stringed instrument</a:t>
             </a:r>
             <a:endParaRPr lang="en-US" sz="850" dirty="0"/>
           </a:p>
@@ -12717,7 +12531,7 @@
                 <a:ea typeface="Calibri" pitchFamily="34" charset="-122"/>
                 <a:cs typeface="Calibri" pitchFamily="34" charset="-120"/>
               </a:rPr>
-              <a:t>person who does or believes</a:t>
+              <a:t>person who does</a:t>
             </a:r>
             <a:endParaRPr lang="en-US" sz="850" dirty="0"/>
           </a:p>
@@ -13412,7 +13226,7 @@
                 <a:ea typeface="Trebuchet MS" pitchFamily="34" charset="-122"/>
                 <a:cs typeface="Trebuchet MS" pitchFamily="34" charset="-120"/>
               </a:rPr>
-              <a:t>cyclist</a:t>
+              <a:t>guitarist</a:t>
             </a:r>
             <a:endParaRPr lang="en-US" sz="2800" dirty="0"/>
           </a:p>
@@ -13551,7 +13365,7 @@
                 <a:ea typeface="Trebuchet MS" pitchFamily="34" charset="-122"/>
                 <a:cs typeface="Trebuchet MS" pitchFamily="34" charset="-120"/>
               </a:rPr>
-              <a:t>cycl</a:t>
+              <a:t>guitar</a:t>
             </a:r>
             <a:endParaRPr lang="en-US" sz="1300" dirty="0"/>
           </a:p>
@@ -13590,7 +13404,7 @@
                 <a:ea typeface="Calibri" pitchFamily="34" charset="-122"/>
                 <a:cs typeface="Calibri" pitchFamily="34" charset="-120"/>
               </a:rPr>
-              <a:t>circle or wheel</a:t>
+              <a:t>a stringed instrument</a:t>
             </a:r>
             <a:endParaRPr lang="en-US" sz="850" dirty="0"/>
           </a:p>
@@ -13702,7 +13516,7 @@
                 <a:ea typeface="Calibri" pitchFamily="34" charset="-122"/>
                 <a:cs typeface="Calibri" pitchFamily="34" charset="-120"/>
               </a:rPr>
-              <a:t>person who does or believes</a:t>
+              <a:t>person who does</a:t>
             </a:r>
             <a:endParaRPr lang="en-US" sz="850" dirty="0"/>
           </a:p>
@@ -13809,7 +13623,7 @@
         </p:nvSpPr>
         <p:spPr>
           <a:xfrm>
-            <a:off x="2999232" y="3364992"/>
+            <a:off x="2313432" y="3364992"/>
             <a:ext cx="1645920" cy="475488"/>
           </a:xfrm>
           <a:prstGeom prst="rect">
@@ -13836,7 +13650,7 @@
         </p:nvSpPr>
         <p:spPr>
           <a:xfrm>
-            <a:off x="2999232" y="3364992"/>
+            <a:off x="2313432" y="3364992"/>
             <a:ext cx="1645920" cy="475488"/>
           </a:xfrm>
           <a:prstGeom prst="rect">
@@ -13861,7 +13675,7 @@
                 <a:ea typeface="Trebuchet MS" pitchFamily="34" charset="-122"/>
                 <a:cs typeface="Trebuchet MS" pitchFamily="34" charset="-120"/>
               </a:rPr>
-              <a:t>cy</a:t>
+              <a:t>gui</a:t>
             </a:r>
             <a:endParaRPr lang="en-US" sz="1400" dirty="0"/>
           </a:p>
@@ -13875,8 +13689,8 @@
         </p:nvSpPr>
         <p:spPr>
           <a:xfrm>
-            <a:off x="4645152" y="3364992"/>
-            <a:ext cx="1097280" cy="475488"/>
+            <a:off x="3959352" y="3364992"/>
+            <a:ext cx="411480" cy="475488"/>
           </a:xfrm>
           <a:prstGeom prst="rect">
             <a:avLst/>
@@ -13914,7 +13728,7 @@
         </p:nvSpPr>
         <p:spPr>
           <a:xfrm>
-            <a:off x="5742432" y="3364992"/>
+            <a:off x="4370832" y="3364992"/>
             <a:ext cx="1645920" cy="475488"/>
           </a:xfrm>
           <a:prstGeom prst="rect">
@@ -13941,7 +13755,7 @@
         </p:nvSpPr>
         <p:spPr>
           <a:xfrm>
-            <a:off x="5742432" y="3364992"/>
+            <a:off x="4370832" y="3364992"/>
             <a:ext cx="1645920" cy="475488"/>
           </a:xfrm>
           <a:prstGeom prst="rect">
@@ -13966,7 +13780,7 @@
                 <a:ea typeface="Trebuchet MS" pitchFamily="34" charset="-122"/>
                 <a:cs typeface="Trebuchet MS" pitchFamily="34" charset="-120"/>
               </a:rPr>
-              <a:t>clist</a:t>
+              <a:t>tar</a:t>
             </a:r>
             <a:endParaRPr lang="en-US" sz="1400" dirty="0"/>
           </a:p>
@@ -13974,7 +13788,112 @@
       </p:sp>
       <p:sp>
         <p:nvSpPr>
-          <p:cNvPr id="30" name="Shape 28"/>
+          <p:cNvPr id="30" name="Text 28"/>
+          <p:cNvSpPr/>
+          <p:nvPr/>
+        </p:nvSpPr>
+        <p:spPr>
+          <a:xfrm>
+            <a:off x="6016752" y="3364992"/>
+            <a:ext cx="411480" cy="475488"/>
+          </a:xfrm>
+          <a:prstGeom prst="rect">
+            <a:avLst/>
+          </a:prstGeom>
+          <a:noFill/>
+          <a:ln/>
+        </p:spPr>
+        <p:txBody>
+          <a:bodyPr wrap="square" lIns="0" tIns="0" rIns="0" bIns="0" rtlCol="0" anchor="ctr"/>
+          <a:lstStyle/>
+          <a:p>
+            <a:pPr algn="ctr" indent="0" marL="0">
+              <a:buNone/>
+            </a:pPr>
+            <a:r>
+              <a:rPr lang="en-US" sz="1600" b="1" dirty="0">
+                <a:solidFill>
+                  <a:srgbClr val="0D9488"/>
+                </a:solidFill>
+                <a:latin typeface="Trebuchet MS" pitchFamily="34" charset="0"/>
+                <a:ea typeface="Trebuchet MS" pitchFamily="34" charset="-122"/>
+                <a:cs typeface="Trebuchet MS" pitchFamily="34" charset="-120"/>
+              </a:rPr>
+              <a:t>·</a:t>
+            </a:r>
+            <a:endParaRPr lang="en-US" sz="1600" dirty="0"/>
+          </a:p>
+        </p:txBody>
+      </p:sp>
+      <p:sp>
+        <p:nvSpPr>
+          <p:cNvPr id="31" name="Shape 29"/>
+          <p:cNvSpPr/>
+          <p:nvPr/>
+        </p:nvSpPr>
+        <p:spPr>
+          <a:xfrm>
+            <a:off x="6428232" y="3364992"/>
+            <a:ext cx="1645920" cy="475488"/>
+          </a:xfrm>
+          <a:prstGeom prst="rect">
+            <a:avLst>
+              <a:gd name="adj" fmla="val 9615"/>
+            </a:avLst>
+          </a:prstGeom>
+          <a:solidFill>
+            <a:srgbClr val="FFFFFF"/>
+          </a:solidFill>
+          <a:ln w="12700">
+            <a:solidFill>
+              <a:srgbClr val="0D9488"/>
+            </a:solidFill>
+            <a:prstDash val="solid"/>
+          </a:ln>
+        </p:spPr>
+      </p:sp>
+      <p:sp>
+        <p:nvSpPr>
+          <p:cNvPr id="32" name="Text 30"/>
+          <p:cNvSpPr/>
+          <p:nvPr/>
+        </p:nvSpPr>
+        <p:spPr>
+          <a:xfrm>
+            <a:off x="6428232" y="3364992"/>
+            <a:ext cx="1645920" cy="475488"/>
+          </a:xfrm>
+          <a:prstGeom prst="rect">
+            <a:avLst/>
+          </a:prstGeom>
+          <a:noFill/>
+          <a:ln/>
+        </p:spPr>
+        <p:txBody>
+          <a:bodyPr wrap="square" lIns="0" tIns="0" rIns="0" bIns="0" rtlCol="0" anchor="ctr"/>
+          <a:lstStyle/>
+          <a:p>
+            <a:pPr algn="ctr" indent="0" marL="0">
+              <a:buNone/>
+            </a:pPr>
+            <a:r>
+              <a:rPr lang="en-US" sz="1400" b="1" dirty="0">
+                <a:solidFill>
+                  <a:srgbClr val="0D9488"/>
+                </a:solidFill>
+                <a:latin typeface="Trebuchet MS" pitchFamily="34" charset="0"/>
+                <a:ea typeface="Trebuchet MS" pitchFamily="34" charset="-122"/>
+                <a:cs typeface="Trebuchet MS" pitchFamily="34" charset="-120"/>
+              </a:rPr>
+              <a:t>ist</a:t>
+            </a:r>
+            <a:endParaRPr lang="en-US" sz="1400" dirty="0"/>
+          </a:p>
+        </p:txBody>
+      </p:sp>
+      <p:sp>
+        <p:nvSpPr>
+          <p:cNvPr id="33" name="Shape 31"/>
           <p:cNvSpPr/>
           <p:nvPr/>
         </p:nvSpPr>
@@ -14001,7 +13920,7 @@
       </p:sp>
       <p:sp>
         <p:nvSpPr>
-          <p:cNvPr id="31" name="Text 29"/>
+          <p:cNvPr id="34" name="Text 32"/>
           <p:cNvSpPr/>
           <p:nvPr/>
         </p:nvSpPr>
@@ -14040,7 +13959,7 @@
       </p:sp>
       <p:sp>
         <p:nvSpPr>
-          <p:cNvPr id="32" name="Shape 30"/>
+          <p:cNvPr id="35" name="Shape 33"/>
           <p:cNvSpPr/>
           <p:nvPr/>
         </p:nvSpPr>
@@ -14067,7 +13986,7 @@
       </p:sp>
       <p:sp>
         <p:nvSpPr>
-          <p:cNvPr id="33" name="Text 31"/>
+          <p:cNvPr id="36" name="Text 34"/>
           <p:cNvSpPr/>
           <p:nvPr/>
         </p:nvSpPr>
@@ -14794,7 +14713,7 @@
                 <a:ea typeface="Trebuchet MS" pitchFamily="34" charset="-122"/>
                 <a:cs typeface="Trebuchet MS" pitchFamily="34" charset="-120"/>
               </a:rPr>
-              <a:t>cyclist</a:t>
+              <a:t>guitarist</a:t>
             </a:r>
             <a:endParaRPr lang="en-US" sz="2800" dirty="0"/>
           </a:p>
@@ -14933,7 +14852,7 @@
                 <a:ea typeface="Trebuchet MS" pitchFamily="34" charset="-122"/>
                 <a:cs typeface="Trebuchet MS" pitchFamily="34" charset="-120"/>
               </a:rPr>
-              <a:t>cycl</a:t>
+              <a:t>guitar</a:t>
             </a:r>
             <a:endParaRPr lang="en-US" sz="1300" dirty="0"/>
           </a:p>
@@ -14972,7 +14891,7 @@
                 <a:ea typeface="Calibri" pitchFamily="34" charset="-122"/>
                 <a:cs typeface="Calibri" pitchFamily="34" charset="-120"/>
               </a:rPr>
-              <a:t>circle or wheel</a:t>
+              <a:t>a stringed instrument</a:t>
             </a:r>
             <a:endParaRPr lang="en-US" sz="850" dirty="0"/>
           </a:p>
@@ -15084,7 +15003,7 @@
                 <a:ea typeface="Calibri" pitchFamily="34" charset="-122"/>
                 <a:cs typeface="Calibri" pitchFamily="34" charset="-120"/>
               </a:rPr>
-              <a:t>person who does or believes</a:t>
+              <a:t>person who does</a:t>
             </a:r>
             <a:endParaRPr lang="en-US" sz="850" dirty="0"/>
           </a:p>
@@ -15191,7 +15110,7 @@
         </p:nvSpPr>
         <p:spPr>
           <a:xfrm>
-            <a:off x="2999232" y="3364992"/>
+            <a:off x="2313432" y="3364992"/>
             <a:ext cx="1645920" cy="475488"/>
           </a:xfrm>
           <a:prstGeom prst="rect">
@@ -15218,7 +15137,7 @@
         </p:nvSpPr>
         <p:spPr>
           <a:xfrm>
-            <a:off x="2999232" y="3364992"/>
+            <a:off x="2313432" y="3364992"/>
             <a:ext cx="1645920" cy="475488"/>
           </a:xfrm>
           <a:prstGeom prst="rect">
@@ -15243,7 +15162,7 @@
                 <a:ea typeface="Trebuchet MS" pitchFamily="34" charset="-122"/>
                 <a:cs typeface="Trebuchet MS" pitchFamily="34" charset="-120"/>
               </a:rPr>
-              <a:t>cy</a:t>
+              <a:t>gui</a:t>
             </a:r>
             <a:endParaRPr lang="en-US" sz="1400" dirty="0"/>
           </a:p>
@@ -15257,8 +15176,8 @@
         </p:nvSpPr>
         <p:spPr>
           <a:xfrm>
-            <a:off x="4645152" y="3364992"/>
-            <a:ext cx="1097280" cy="475488"/>
+            <a:off x="3959352" y="3364992"/>
+            <a:ext cx="411480" cy="475488"/>
           </a:xfrm>
           <a:prstGeom prst="rect">
             <a:avLst/>
@@ -15296,7 +15215,7 @@
         </p:nvSpPr>
         <p:spPr>
           <a:xfrm>
-            <a:off x="5742432" y="3364992"/>
+            <a:off x="4370832" y="3364992"/>
             <a:ext cx="1645920" cy="475488"/>
           </a:xfrm>
           <a:prstGeom prst="rect">
@@ -15323,7 +15242,7 @@
         </p:nvSpPr>
         <p:spPr>
           <a:xfrm>
-            <a:off x="5742432" y="3364992"/>
+            <a:off x="4370832" y="3364992"/>
             <a:ext cx="1645920" cy="475488"/>
           </a:xfrm>
           <a:prstGeom prst="rect">
@@ -15348,7 +15267,7 @@
                 <a:ea typeface="Trebuchet MS" pitchFamily="34" charset="-122"/>
                 <a:cs typeface="Trebuchet MS" pitchFamily="34" charset="-120"/>
               </a:rPr>
-              <a:t>clist</a:t>
+              <a:t>tar</a:t>
             </a:r>
             <a:endParaRPr lang="en-US" sz="1400" dirty="0"/>
           </a:p>
@@ -15356,7 +15275,112 @@
       </p:sp>
       <p:sp>
         <p:nvSpPr>
-          <p:cNvPr id="30" name="Shape 28"/>
+          <p:cNvPr id="30" name="Text 28"/>
+          <p:cNvSpPr/>
+          <p:nvPr/>
+        </p:nvSpPr>
+        <p:spPr>
+          <a:xfrm>
+            <a:off x="6016752" y="3364992"/>
+            <a:ext cx="411480" cy="475488"/>
+          </a:xfrm>
+          <a:prstGeom prst="rect">
+            <a:avLst/>
+          </a:prstGeom>
+          <a:noFill/>
+          <a:ln/>
+        </p:spPr>
+        <p:txBody>
+          <a:bodyPr wrap="square" lIns="0" tIns="0" rIns="0" bIns="0" rtlCol="0" anchor="ctr"/>
+          <a:lstStyle/>
+          <a:p>
+            <a:pPr algn="ctr" indent="0" marL="0">
+              <a:buNone/>
+            </a:pPr>
+            <a:r>
+              <a:rPr lang="en-US" sz="1600" b="1" dirty="0">
+                <a:solidFill>
+                  <a:srgbClr val="0D9488"/>
+                </a:solidFill>
+                <a:latin typeface="Trebuchet MS" pitchFamily="34" charset="0"/>
+                <a:ea typeface="Trebuchet MS" pitchFamily="34" charset="-122"/>
+                <a:cs typeface="Trebuchet MS" pitchFamily="34" charset="-120"/>
+              </a:rPr>
+              <a:t>·</a:t>
+            </a:r>
+            <a:endParaRPr lang="en-US" sz="1600" dirty="0"/>
+          </a:p>
+        </p:txBody>
+      </p:sp>
+      <p:sp>
+        <p:nvSpPr>
+          <p:cNvPr id="31" name="Shape 29"/>
+          <p:cNvSpPr/>
+          <p:nvPr/>
+        </p:nvSpPr>
+        <p:spPr>
+          <a:xfrm>
+            <a:off x="6428232" y="3364992"/>
+            <a:ext cx="1645920" cy="475488"/>
+          </a:xfrm>
+          <a:prstGeom prst="rect">
+            <a:avLst>
+              <a:gd name="adj" fmla="val 9615"/>
+            </a:avLst>
+          </a:prstGeom>
+          <a:solidFill>
+            <a:srgbClr val="FFFFFF"/>
+          </a:solidFill>
+          <a:ln w="12700">
+            <a:solidFill>
+              <a:srgbClr val="0D9488"/>
+            </a:solidFill>
+            <a:prstDash val="solid"/>
+          </a:ln>
+        </p:spPr>
+      </p:sp>
+      <p:sp>
+        <p:nvSpPr>
+          <p:cNvPr id="32" name="Text 30"/>
+          <p:cNvSpPr/>
+          <p:nvPr/>
+        </p:nvSpPr>
+        <p:spPr>
+          <a:xfrm>
+            <a:off x="6428232" y="3364992"/>
+            <a:ext cx="1645920" cy="475488"/>
+          </a:xfrm>
+          <a:prstGeom prst="rect">
+            <a:avLst/>
+          </a:prstGeom>
+          <a:noFill/>
+          <a:ln/>
+        </p:spPr>
+        <p:txBody>
+          <a:bodyPr wrap="square" lIns="0" tIns="0" rIns="0" bIns="0" rtlCol="0" anchor="ctr"/>
+          <a:lstStyle/>
+          <a:p>
+            <a:pPr algn="ctr" indent="0" marL="0">
+              <a:buNone/>
+            </a:pPr>
+            <a:r>
+              <a:rPr lang="en-US" sz="1400" b="1" dirty="0">
+                <a:solidFill>
+                  <a:srgbClr val="0D9488"/>
+                </a:solidFill>
+                <a:latin typeface="Trebuchet MS" pitchFamily="34" charset="0"/>
+                <a:ea typeface="Trebuchet MS" pitchFamily="34" charset="-122"/>
+                <a:cs typeface="Trebuchet MS" pitchFamily="34" charset="-120"/>
+              </a:rPr>
+              <a:t>ist</a:t>
+            </a:r>
+            <a:endParaRPr lang="en-US" sz="1400" dirty="0"/>
+          </a:p>
+        </p:txBody>
+      </p:sp>
+      <p:sp>
+        <p:nvSpPr>
+          <p:cNvPr id="33" name="Shape 31"/>
           <p:cNvSpPr/>
           <p:nvPr/>
         </p:nvSpPr>
@@ -15383,7 +15407,7 @@
       </p:sp>
       <p:sp>
         <p:nvSpPr>
-          <p:cNvPr id="31" name="Text 29"/>
+          <p:cNvPr id="34" name="Text 32"/>
           <p:cNvSpPr/>
           <p:nvPr/>
         </p:nvSpPr>
@@ -15422,7 +15446,7 @@
       </p:sp>
       <p:sp>
         <p:nvSpPr>
-          <p:cNvPr id="32" name="Shape 30"/>
+          <p:cNvPr id="35" name="Shape 33"/>
           <p:cNvSpPr/>
           <p:nvPr/>
         </p:nvSpPr>
@@ -15449,7 +15473,7 @@
       </p:sp>
       <p:sp>
         <p:nvSpPr>
-          <p:cNvPr id="33" name="Shape 31"/>
+          <p:cNvPr id="36" name="Shape 34"/>
           <p:cNvSpPr/>
           <p:nvPr/>
         </p:nvSpPr>
@@ -15476,7 +15500,7 @@
       </p:sp>
       <p:sp>
         <p:nvSpPr>
-          <p:cNvPr id="34" name="Text 32"/>
+          <p:cNvPr id="37" name="Text 35"/>
           <p:cNvSpPr/>
           <p:nvPr/>
         </p:nvSpPr>
@@ -15507,7 +15531,7 @@
                 <a:ea typeface="Trebuchet MS" pitchFamily="34" charset="-122"/>
                 <a:cs typeface="Trebuchet MS" pitchFamily="34" charset="-120"/>
               </a:rPr>
-              <a:t>c</a:t>
+              <a:t>g</a:t>
             </a:r>
             <a:endParaRPr lang="en-US" sz="900" dirty="0"/>
           </a:p>
@@ -15515,13 +15539,79 @@
       </p:sp>
       <p:sp>
         <p:nvSpPr>
-          <p:cNvPr id="35" name="Text 33"/>
-          <p:cNvSpPr/>
-          <p:nvPr/>
-        </p:nvSpPr>
-        <p:spPr>
-          <a:xfrm>
-            <a:off x="2124837" y="4572000"/>
+          <p:cNvPr id="38" name="Shape 36"/>
+          <p:cNvSpPr/>
+          <p:nvPr/>
+        </p:nvSpPr>
+        <p:spPr>
+          <a:xfrm>
+            <a:off x="3033522" y="4169664"/>
+            <a:ext cx="685800" cy="384048"/>
+          </a:xfrm>
+          <a:prstGeom prst="rect">
+            <a:avLst>
+              <a:gd name="adj" fmla="val 9524"/>
+            </a:avLst>
+          </a:prstGeom>
+          <a:solidFill>
+            <a:srgbClr val="FFFFFF"/>
+          </a:solidFill>
+          <a:ln w="12700">
+            <a:solidFill>
+              <a:srgbClr val="DB2777"/>
+            </a:solidFill>
+            <a:prstDash val="solid"/>
+          </a:ln>
+        </p:spPr>
+      </p:sp>
+      <p:sp>
+        <p:nvSpPr>
+          <p:cNvPr id="39" name="Text 37"/>
+          <p:cNvSpPr/>
+          <p:nvPr/>
+        </p:nvSpPr>
+        <p:spPr>
+          <a:xfrm>
+            <a:off x="3033522" y="4169664"/>
+            <a:ext cx="685800" cy="384048"/>
+          </a:xfrm>
+          <a:prstGeom prst="rect">
+            <a:avLst/>
+          </a:prstGeom>
+          <a:noFill/>
+          <a:ln/>
+        </p:spPr>
+        <p:txBody>
+          <a:bodyPr wrap="square" lIns="0" tIns="0" rIns="0" bIns="0" rtlCol="0" anchor="ctr"/>
+          <a:lstStyle/>
+          <a:p>
+            <a:pPr algn="ctr" indent="0" marL="0">
+              <a:buNone/>
+            </a:pPr>
+            <a:r>
+              <a:rPr lang="en-US" sz="900" b="1" dirty="0">
+                <a:solidFill>
+                  <a:srgbClr val="9D174D"/>
+                </a:solidFill>
+                <a:latin typeface="Trebuchet MS" pitchFamily="34" charset="0"/>
+                <a:ea typeface="Trebuchet MS" pitchFamily="34" charset="-122"/>
+                <a:cs typeface="Trebuchet MS" pitchFamily="34" charset="-120"/>
+              </a:rPr>
+              <a:t>ui</a:t>
+            </a:r>
+            <a:endParaRPr lang="en-US" sz="900" dirty="0"/>
+          </a:p>
+        </p:txBody>
+      </p:sp>
+      <p:sp>
+        <p:nvSpPr>
+          <p:cNvPr id="40" name="Text 38"/>
+          <p:cNvSpPr/>
+          <p:nvPr/>
+        </p:nvSpPr>
+        <p:spPr>
+          <a:xfrm>
+            <a:off x="3033522" y="4572000"/>
             <a:ext cx="685800" cy="219456"/>
           </a:xfrm>
           <a:prstGeom prst="rect">
@@ -15546,7 +15636,7 @@
                 <a:ea typeface="Calibri" pitchFamily="34" charset="-122"/>
                 <a:cs typeface="Calibri" pitchFamily="34" charset="-120"/>
               </a:rPr>
-              <a:t>/s/</a:t>
+              <a:t>/i/</a:t>
             </a:r>
             <a:endParaRPr lang="en-US" sz="750" dirty="0"/>
           </a:p>
@@ -15554,13 +15644,13 @@
       </p:sp>
       <p:sp>
         <p:nvSpPr>
-          <p:cNvPr id="36" name="Shape 34"/>
-          <p:cNvSpPr/>
-          <p:nvPr/>
-        </p:nvSpPr>
-        <p:spPr>
-          <a:xfrm>
-            <a:off x="3033522" y="4169664"/>
+          <p:cNvPr id="41" name="Shape 39"/>
+          <p:cNvSpPr/>
+          <p:nvPr/>
+        </p:nvSpPr>
+        <p:spPr>
+          <a:xfrm>
+            <a:off x="3942207" y="4169664"/>
             <a:ext cx="685800" cy="384048"/>
           </a:xfrm>
           <a:prstGeom prst="rect">
@@ -15581,13 +15671,13 @@
       </p:sp>
       <p:sp>
         <p:nvSpPr>
-          <p:cNvPr id="37" name="Text 35"/>
-          <p:cNvSpPr/>
-          <p:nvPr/>
-        </p:nvSpPr>
-        <p:spPr>
-          <a:xfrm>
-            <a:off x="3033522" y="4169664"/>
+          <p:cNvPr id="42" name="Text 40"/>
+          <p:cNvSpPr/>
+          <p:nvPr/>
+        </p:nvSpPr>
+        <p:spPr>
+          <a:xfrm>
+            <a:off x="3942207" y="4169664"/>
             <a:ext cx="685800" cy="384048"/>
           </a:xfrm>
           <a:prstGeom prst="rect">
@@ -15612,7 +15702,7 @@
                 <a:ea typeface="Trebuchet MS" pitchFamily="34" charset="-122"/>
                 <a:cs typeface="Trebuchet MS" pitchFamily="34" charset="-120"/>
               </a:rPr>
-              <a:t>y</a:t>
+              <a:t>t</a:t>
             </a:r>
             <a:endParaRPr lang="en-US" sz="900" dirty="0"/>
           </a:p>
@@ -15620,52 +15710,13 @@
       </p:sp>
       <p:sp>
         <p:nvSpPr>
-          <p:cNvPr id="38" name="Text 36"/>
-          <p:cNvSpPr/>
-          <p:nvPr/>
-        </p:nvSpPr>
-        <p:spPr>
-          <a:xfrm>
-            <a:off x="3033522" y="4572000"/>
-            <a:ext cx="685800" cy="219456"/>
-          </a:xfrm>
-          <a:prstGeom prst="rect">
-            <a:avLst/>
-          </a:prstGeom>
-          <a:noFill/>
-          <a:ln/>
-        </p:spPr>
-        <p:txBody>
-          <a:bodyPr wrap="square" lIns="0" tIns="0" rIns="0" bIns="0" rtlCol="0" anchor="t"/>
-          <a:lstStyle/>
-          <a:p>
-            <a:pPr algn="ctr" indent="0" marL="0">
-              <a:buNone/>
-            </a:pPr>
-            <a:r>
-              <a:rPr lang="en-US" sz="750" i="1" dirty="0">
-                <a:solidFill>
-                  <a:srgbClr val="94A3B8"/>
-                </a:solidFill>
-                <a:latin typeface="Calibri" pitchFamily="34" charset="0"/>
-                <a:ea typeface="Calibri" pitchFamily="34" charset="-122"/>
-                <a:cs typeface="Calibri" pitchFamily="34" charset="-120"/>
-              </a:rPr>
-              <a:t>/ie/</a:t>
-            </a:r>
-            <a:endParaRPr lang="en-US" sz="750" dirty="0"/>
-          </a:p>
-        </p:txBody>
-      </p:sp>
-      <p:sp>
-        <p:nvSpPr>
-          <p:cNvPr id="39" name="Shape 37"/>
-          <p:cNvSpPr/>
-          <p:nvPr/>
-        </p:nvSpPr>
-        <p:spPr>
-          <a:xfrm>
-            <a:off x="3942207" y="4169664"/>
+          <p:cNvPr id="43" name="Shape 41"/>
+          <p:cNvSpPr/>
+          <p:nvPr/>
+        </p:nvSpPr>
+        <p:spPr>
+          <a:xfrm>
+            <a:off x="4850892" y="4169664"/>
             <a:ext cx="685800" cy="384048"/>
           </a:xfrm>
           <a:prstGeom prst="rect">
@@ -15686,13 +15737,13 @@
       </p:sp>
       <p:sp>
         <p:nvSpPr>
-          <p:cNvPr id="40" name="Text 38"/>
-          <p:cNvSpPr/>
-          <p:nvPr/>
-        </p:nvSpPr>
-        <p:spPr>
-          <a:xfrm>
-            <a:off x="3942207" y="4169664"/>
+          <p:cNvPr id="44" name="Text 42"/>
+          <p:cNvSpPr/>
+          <p:nvPr/>
+        </p:nvSpPr>
+        <p:spPr>
+          <a:xfrm>
+            <a:off x="4850892" y="4169664"/>
             <a:ext cx="685800" cy="384048"/>
           </a:xfrm>
           <a:prstGeom prst="rect">
@@ -15717,7 +15768,7 @@
                 <a:ea typeface="Trebuchet MS" pitchFamily="34" charset="-122"/>
                 <a:cs typeface="Trebuchet MS" pitchFamily="34" charset="-120"/>
               </a:rPr>
-              <a:t>c</a:t>
+              <a:t>ar</a:t>
             </a:r>
             <a:endParaRPr lang="en-US" sz="900" dirty="0"/>
           </a:p>
@@ -15725,52 +15776,13 @@
       </p:sp>
       <p:sp>
         <p:nvSpPr>
-          <p:cNvPr id="41" name="Text 39"/>
-          <p:cNvSpPr/>
-          <p:nvPr/>
-        </p:nvSpPr>
-        <p:spPr>
-          <a:xfrm>
-            <a:off x="3942207" y="4572000"/>
-            <a:ext cx="685800" cy="219456"/>
-          </a:xfrm>
-          <a:prstGeom prst="rect">
-            <a:avLst/>
-          </a:prstGeom>
-          <a:noFill/>
-          <a:ln/>
-        </p:spPr>
-        <p:txBody>
-          <a:bodyPr wrap="square" lIns="0" tIns="0" rIns="0" bIns="0" rtlCol="0" anchor="t"/>
-          <a:lstStyle/>
-          <a:p>
-            <a:pPr algn="ctr" indent="0" marL="0">
-              <a:buNone/>
-            </a:pPr>
-            <a:r>
-              <a:rPr lang="en-US" sz="750" i="1" dirty="0">
-                <a:solidFill>
-                  <a:srgbClr val="94A3B8"/>
-                </a:solidFill>
-                <a:latin typeface="Calibri" pitchFamily="34" charset="0"/>
-                <a:ea typeface="Calibri" pitchFamily="34" charset="-122"/>
-                <a:cs typeface="Calibri" pitchFamily="34" charset="-120"/>
-              </a:rPr>
-              <a:t>/k/</a:t>
-            </a:r>
-            <a:endParaRPr lang="en-US" sz="750" dirty="0"/>
-          </a:p>
-        </p:txBody>
-      </p:sp>
-      <p:sp>
-        <p:nvSpPr>
-          <p:cNvPr id="42" name="Shape 40"/>
-          <p:cNvSpPr/>
-          <p:nvPr/>
-        </p:nvSpPr>
-        <p:spPr>
-          <a:xfrm>
-            <a:off x="4850892" y="4169664"/>
+          <p:cNvPr id="45" name="Shape 43"/>
+          <p:cNvSpPr/>
+          <p:nvPr/>
+        </p:nvSpPr>
+        <p:spPr>
+          <a:xfrm>
+            <a:off x="5759577" y="4169664"/>
             <a:ext cx="685800" cy="384048"/>
           </a:xfrm>
           <a:prstGeom prst="rect">
@@ -15791,13 +15803,13 @@
       </p:sp>
       <p:sp>
         <p:nvSpPr>
-          <p:cNvPr id="43" name="Text 41"/>
-          <p:cNvSpPr/>
-          <p:nvPr/>
-        </p:nvSpPr>
-        <p:spPr>
-          <a:xfrm>
-            <a:off x="4850892" y="4169664"/>
+          <p:cNvPr id="46" name="Text 44"/>
+          <p:cNvSpPr/>
+          <p:nvPr/>
+        </p:nvSpPr>
+        <p:spPr>
+          <a:xfrm>
+            <a:off x="5759577" y="4169664"/>
             <a:ext cx="685800" cy="384048"/>
           </a:xfrm>
           <a:prstGeom prst="rect">
@@ -15822,7 +15834,7 @@
                 <a:ea typeface="Trebuchet MS" pitchFamily="34" charset="-122"/>
                 <a:cs typeface="Trebuchet MS" pitchFamily="34" charset="-120"/>
               </a:rPr>
-              <a:t>l</a:t>
+              <a:t>i</a:t>
             </a:r>
             <a:endParaRPr lang="en-US" sz="900" dirty="0"/>
           </a:p>
@@ -15830,13 +15842,13 @@
       </p:sp>
       <p:sp>
         <p:nvSpPr>
-          <p:cNvPr id="44" name="Shape 42"/>
-          <p:cNvSpPr/>
-          <p:nvPr/>
-        </p:nvSpPr>
-        <p:spPr>
-          <a:xfrm>
-            <a:off x="5759577" y="4169664"/>
+          <p:cNvPr id="47" name="Shape 45"/>
+          <p:cNvSpPr/>
+          <p:nvPr/>
+        </p:nvSpPr>
+        <p:spPr>
+          <a:xfrm>
+            <a:off x="6668262" y="4169664"/>
             <a:ext cx="685800" cy="384048"/>
           </a:xfrm>
           <a:prstGeom prst="rect">
@@ -15857,13 +15869,13 @@
       </p:sp>
       <p:sp>
         <p:nvSpPr>
-          <p:cNvPr id="45" name="Text 43"/>
-          <p:cNvSpPr/>
-          <p:nvPr/>
-        </p:nvSpPr>
-        <p:spPr>
-          <a:xfrm>
-            <a:off x="5759577" y="4169664"/>
+          <p:cNvPr id="48" name="Text 46"/>
+          <p:cNvSpPr/>
+          <p:nvPr/>
+        </p:nvSpPr>
+        <p:spPr>
+          <a:xfrm>
+            <a:off x="6668262" y="4169664"/>
             <a:ext cx="685800" cy="384048"/>
           </a:xfrm>
           <a:prstGeom prst="rect">
@@ -15888,7 +15900,7 @@
                 <a:ea typeface="Trebuchet MS" pitchFamily="34" charset="-122"/>
                 <a:cs typeface="Trebuchet MS" pitchFamily="34" charset="-120"/>
               </a:rPr>
-              <a:t>i</a:t>
+              <a:t>s</a:t>
             </a:r>
             <a:endParaRPr lang="en-US" sz="900" dirty="0"/>
           </a:p>
@@ -15896,13 +15908,13 @@
       </p:sp>
       <p:sp>
         <p:nvSpPr>
-          <p:cNvPr id="46" name="Shape 44"/>
-          <p:cNvSpPr/>
-          <p:nvPr/>
-        </p:nvSpPr>
-        <p:spPr>
-          <a:xfrm>
-            <a:off x="6668262" y="4169664"/>
+          <p:cNvPr id="49" name="Shape 47"/>
+          <p:cNvSpPr/>
+          <p:nvPr/>
+        </p:nvSpPr>
+        <p:spPr>
+          <a:xfrm>
+            <a:off x="7576947" y="4169664"/>
             <a:ext cx="685800" cy="384048"/>
           </a:xfrm>
           <a:prstGeom prst="rect">
@@ -15923,73 +15935,7 @@
       </p:sp>
       <p:sp>
         <p:nvSpPr>
-          <p:cNvPr id="47" name="Text 45"/>
-          <p:cNvSpPr/>
-          <p:nvPr/>
-        </p:nvSpPr>
-        <p:spPr>
-          <a:xfrm>
-            <a:off x="6668262" y="4169664"/>
-            <a:ext cx="685800" cy="384048"/>
-          </a:xfrm>
-          <a:prstGeom prst="rect">
-            <a:avLst/>
-          </a:prstGeom>
-          <a:noFill/>
-          <a:ln/>
-        </p:spPr>
-        <p:txBody>
-          <a:bodyPr wrap="square" lIns="0" tIns="0" rIns="0" bIns="0" rtlCol="0" anchor="ctr"/>
-          <a:lstStyle/>
-          <a:p>
-            <a:pPr algn="ctr" indent="0" marL="0">
-              <a:buNone/>
-            </a:pPr>
-            <a:r>
-              <a:rPr lang="en-US" sz="900" b="1" dirty="0">
-                <a:solidFill>
-                  <a:srgbClr val="9D174D"/>
-                </a:solidFill>
-                <a:latin typeface="Trebuchet MS" pitchFamily="34" charset="0"/>
-                <a:ea typeface="Trebuchet MS" pitchFamily="34" charset="-122"/>
-                <a:cs typeface="Trebuchet MS" pitchFamily="34" charset="-120"/>
-              </a:rPr>
-              <a:t>s</a:t>
-            </a:r>
-            <a:endParaRPr lang="en-US" sz="900" dirty="0"/>
-          </a:p>
-        </p:txBody>
-      </p:sp>
-      <p:sp>
-        <p:nvSpPr>
-          <p:cNvPr id="48" name="Shape 46"/>
-          <p:cNvSpPr/>
-          <p:nvPr/>
-        </p:nvSpPr>
-        <p:spPr>
-          <a:xfrm>
-            <a:off x="7576947" y="4169664"/>
-            <a:ext cx="685800" cy="384048"/>
-          </a:xfrm>
-          <a:prstGeom prst="rect">
-            <a:avLst>
-              <a:gd name="adj" fmla="val 9524"/>
-            </a:avLst>
-          </a:prstGeom>
-          <a:solidFill>
-            <a:srgbClr val="FFFFFF"/>
-          </a:solidFill>
-          <a:ln w="12700">
-            <a:solidFill>
-              <a:srgbClr val="DB2777"/>
-            </a:solidFill>
-            <a:prstDash val="solid"/>
-          </a:ln>
-        </p:spPr>
-      </p:sp>
-      <p:sp>
-        <p:nvSpPr>
-          <p:cNvPr id="49" name="Text 47"/>
+          <p:cNvPr id="50" name="Text 48"/>
           <p:cNvSpPr/>
           <p:nvPr/>
         </p:nvSpPr>
@@ -17377,7 +17323,7 @@
                 <a:ea typeface="Calibri" pitchFamily="34" charset="-122"/>
                 <a:cs typeface="Calibri" pitchFamily="34" charset="-120"/>
               </a:rPr>
-              <a:t> interviewed the </a:t>
+              <a:t> interviewed a </a:t>
             </a:r>
             <a:pPr algn="l" indent="0" marL="0">
               <a:buNone/>
@@ -17408,7 +17354,7 @@
                 <a:ea typeface="Calibri" pitchFamily="34" charset="-122"/>
                 <a:cs typeface="Calibri" pitchFamily="34" charset="-120"/>
               </a:rPr>
-              <a:t> and the </a:t>
+              <a:t> and a </a:t>
             </a:r>
             <a:pPr algn="l" indent="0" marL="0">
               <a:buNone/>
@@ -17425,7 +17371,7 @@
                 <a:ea typeface="Calibri" pitchFamily="34" charset="-122"/>
                 <a:cs typeface="Calibri" pitchFamily="34" charset="-120"/>
               </a:rPr>
-              <a:t>specialist</a:t>
+              <a:t>finalist</a:t>
             </a:r>
             <a:pPr algn="l" indent="0" marL="0">
               <a:buNone/>
@@ -17439,7 +17385,7 @@
                 <a:ea typeface="Calibri" pitchFamily="34" charset="-122"/>
                 <a:cs typeface="Calibri" pitchFamily="34" charset="-120"/>
               </a:rPr>
-              <a:t> about their important new discovery.</a:t>
+              <a:t> from the nature competition.</a:t>
             </a:r>
             <a:endParaRPr lang="en-US" sz="1800" dirty="0"/>
           </a:p>
@@ -17850,7 +17796,7 @@
                 <a:ea typeface="Trebuchet MS" pitchFamily="34" charset="-122"/>
                 <a:cs typeface="Trebuchet MS" pitchFamily="34" charset="-120"/>
               </a:rPr>
-              <a:t>specialist</a:t>
+              <a:t>finalist</a:t>
             </a:r>
             <a:endParaRPr lang="en-US" sz="1400" dirty="0"/>
           </a:p>
@@ -19325,7 +19271,7 @@
                 <a:ea typeface="Calibri" pitchFamily="34" charset="-122"/>
                 <a:cs typeface="Calibri" pitchFamily="34" charset="-120"/>
               </a:rPr>
-              <a:t>a daily record or publication</a:t>
+              <a:t>a daily record or news publication</a:t>
             </a:r>
             <a:endParaRPr lang="en-US" sz="850" dirty="0"/>
           </a:p>
@@ -19437,7 +19383,7 @@
                 <a:ea typeface="Calibri" pitchFamily="34" charset="-122"/>
                 <a:cs typeface="Calibri" pitchFamily="34" charset="-120"/>
               </a:rPr>
-              <a:t>person who does or believes</a:t>
+              <a:t>person who does</a:t>
             </a:r>
             <a:endParaRPr lang="en-US" sz="850" dirty="0"/>
           </a:p>
@@ -20310,7 +20256,7 @@
                 <a:ea typeface="Calibri" pitchFamily="34" charset="-122"/>
                 <a:cs typeface="Calibri" pitchFamily="34" charset="-120"/>
               </a:rPr>
-              <a:t>a daily record or publication</a:t>
+              <a:t>a daily record or news publication</a:t>
             </a:r>
             <a:endParaRPr lang="en-US" sz="850" dirty="0"/>
           </a:p>
@@ -20422,7 +20368,7 @@
                 <a:ea typeface="Calibri" pitchFamily="34" charset="-122"/>
                 <a:cs typeface="Calibri" pitchFamily="34" charset="-120"/>
               </a:rPr>
-              <a:t>person who does or believes</a:t>
+              <a:t>person who does</a:t>
             </a:r>
             <a:endParaRPr lang="en-US" sz="850" dirty="0"/>
           </a:p>
@@ -21532,7 +21478,7 @@
                 <a:ea typeface="Calibri" pitchFamily="34" charset="-122"/>
                 <a:cs typeface="Calibri" pitchFamily="34" charset="-120"/>
               </a:rPr>
-              <a:t>a daily record or publication</a:t>
+              <a:t>a daily record or news publication</a:t>
             </a:r>
             <a:endParaRPr lang="en-US" sz="850" dirty="0"/>
           </a:p>
@@ -21644,7 +21590,7 @@
                 <a:ea typeface="Calibri" pitchFamily="34" charset="-122"/>
                 <a:cs typeface="Calibri" pitchFamily="34" charset="-120"/>
               </a:rPr>
-              <a:t>person who does or believes</a:t>
+              <a:t>person who does</a:t>
             </a:r>
             <a:endParaRPr lang="en-US" sz="850" dirty="0"/>
           </a:p>
@@ -24011,7 +23957,7 @@
         </p:nvSpPr>
         <p:spPr>
           <a:xfrm>
-            <a:off x="2221992" y="2258568"/>
+            <a:off x="2938272" y="2258568"/>
             <a:ext cx="1828800" cy="292608"/>
           </a:xfrm>
           <a:prstGeom prst="rect">
@@ -24045,7 +23991,7 @@
         </p:nvSpPr>
         <p:spPr>
           <a:xfrm>
-            <a:off x="2221992" y="2258568"/>
+            <a:off x="2938272" y="2258568"/>
             <a:ext cx="1828800" cy="292608"/>
           </a:xfrm>
           <a:prstGeom prst="rect">
@@ -24070,7 +24016,7 @@
                 <a:ea typeface="Trebuchet MS" pitchFamily="34" charset="-122"/>
                 <a:cs typeface="Trebuchet MS" pitchFamily="34" charset="-120"/>
               </a:rPr>
-              <a:t>scien</a:t>
+              <a:t>scienc</a:t>
             </a:r>
             <a:endParaRPr lang="en-US" sz="1300" dirty="0"/>
           </a:p>
@@ -24084,7 +24030,7 @@
         </p:nvSpPr>
         <p:spPr>
           <a:xfrm>
-            <a:off x="2221992" y="2569464"/>
+            <a:off x="2938272" y="2569464"/>
             <a:ext cx="1828800" cy="201168"/>
           </a:xfrm>
           <a:prstGeom prst="rect">
@@ -24109,7 +24055,7 @@
                 <a:ea typeface="Calibri" pitchFamily="34" charset="-122"/>
                 <a:cs typeface="Calibri" pitchFamily="34" charset="-120"/>
               </a:rPr>
-              <a:t>knowledge</a:t>
+              <a:t>knowledge, study of nature</a:t>
             </a:r>
             <a:endParaRPr lang="en-US" sz="850" dirty="0"/>
           </a:p>
@@ -24117,13 +24063,52 @@
       </p:sp>
       <p:sp>
         <p:nvSpPr>
-          <p:cNvPr id="19" name="Shape 17"/>
-          <p:cNvSpPr/>
-          <p:nvPr/>
-        </p:nvSpPr>
-        <p:spPr>
-          <a:xfrm>
-            <a:off x="4370832" y="2258568"/>
+          <p:cNvPr id="19" name="Text 17"/>
+          <p:cNvSpPr/>
+          <p:nvPr/>
+        </p:nvSpPr>
+        <p:spPr>
+          <a:xfrm>
+            <a:off x="2938272" y="2752344"/>
+            <a:ext cx="1828800" cy="182880"/>
+          </a:xfrm>
+          <a:prstGeom prst="rect">
+            <a:avLst/>
+          </a:prstGeom>
+          <a:noFill/>
+          <a:ln/>
+        </p:spPr>
+        <p:txBody>
+          <a:bodyPr wrap="square" lIns="0" tIns="0" rIns="0" bIns="0" rtlCol="0" anchor="t"/>
+          <a:lstStyle/>
+          <a:p>
+            <a:pPr algn="ctr" indent="0" marL="0">
+              <a:buNone/>
+            </a:pPr>
+            <a:r>
+              <a:rPr lang="en-US" sz="700" i="1" dirty="0">
+                <a:solidFill>
+                  <a:srgbClr val="94A3B8"/>
+                </a:solidFill>
+                <a:latin typeface="Calibri" pitchFamily="34" charset="0"/>
+                <a:ea typeface="Calibri" pitchFamily="34" charset="-122"/>
+                <a:cs typeface="Calibri" pitchFamily="34" charset="-120"/>
+              </a:rPr>
+              <a:t>'e' dropped before vowel suffix</a:t>
+            </a:r>
+            <a:endParaRPr lang="en-US" sz="700" dirty="0"/>
+          </a:p>
+        </p:txBody>
+      </p:sp>
+      <p:sp>
+        <p:nvSpPr>
+          <p:cNvPr id="20" name="Shape 18"/>
+          <p:cNvSpPr/>
+          <p:nvPr/>
+        </p:nvSpPr>
+        <p:spPr>
+          <a:xfrm>
+            <a:off x="5803392" y="2258568"/>
             <a:ext cx="1828800" cy="292608"/>
           </a:xfrm>
           <a:prstGeom prst="rect">
@@ -24132,11 +24117,11 @@
             </a:avLst>
           </a:prstGeom>
           <a:solidFill>
-            <a:srgbClr val="FCE7F3"/>
+            <a:srgbClr val="CCFBF1"/>
           </a:solidFill>
           <a:ln w="19050">
             <a:solidFill>
-              <a:srgbClr val="DB2777"/>
+              <a:srgbClr val="0D9488"/>
             </a:solidFill>
             <a:prstDash val="solid"/>
           </a:ln>
@@ -24151,13 +24136,13 @@
       </p:sp>
       <p:sp>
         <p:nvSpPr>
-          <p:cNvPr id="20" name="Text 18"/>
-          <p:cNvSpPr/>
-          <p:nvPr/>
-        </p:nvSpPr>
-        <p:spPr>
-          <a:xfrm>
-            <a:off x="4370832" y="2258568"/>
+          <p:cNvPr id="21" name="Text 19"/>
+          <p:cNvSpPr/>
+          <p:nvPr/>
+        </p:nvSpPr>
+        <p:spPr>
+          <a:xfrm>
+            <a:off x="5803392" y="2258568"/>
             <a:ext cx="1828800" cy="292608"/>
           </a:xfrm>
           <a:prstGeom prst="rect">
@@ -24176,13 +24161,13 @@
             <a:r>
               <a:rPr lang="en-US" sz="1300" b="1" dirty="0">
                 <a:solidFill>
-                  <a:srgbClr val="9D174D"/>
+                  <a:srgbClr val="0F766E"/>
                 </a:solidFill>
                 <a:latin typeface="Trebuchet MS" pitchFamily="34" charset="0"/>
                 <a:ea typeface="Trebuchet MS" pitchFamily="34" charset="-122"/>
                 <a:cs typeface="Trebuchet MS" pitchFamily="34" charset="-120"/>
               </a:rPr>
-              <a:t>t</a:t>
+              <a:t>ist</a:t>
             </a:r>
             <a:endParaRPr lang="en-US" sz="1300" dirty="0"/>
           </a:p>
@@ -24190,13 +24175,13 @@
       </p:sp>
       <p:sp>
         <p:nvSpPr>
-          <p:cNvPr id="21" name="Text 19"/>
-          <p:cNvSpPr/>
-          <p:nvPr/>
-        </p:nvSpPr>
-        <p:spPr>
-          <a:xfrm>
-            <a:off x="4370832" y="2569464"/>
+          <p:cNvPr id="22" name="Text 20"/>
+          <p:cNvSpPr/>
+          <p:nvPr/>
+        </p:nvSpPr>
+        <p:spPr>
+          <a:xfrm>
+            <a:off x="5803392" y="2569464"/>
             <a:ext cx="1828800" cy="201168"/>
           </a:xfrm>
           <a:prstGeom prst="rect">
@@ -24221,7 +24206,7 @@
                 <a:ea typeface="Calibri" pitchFamily="34" charset="-122"/>
                 <a:cs typeface="Calibri" pitchFamily="34" charset="-120"/>
               </a:rPr>
-              <a:t>connecting letter</a:t>
+              <a:t>person who does</a:t>
             </a:r>
             <a:endParaRPr lang="en-US" sz="850" dirty="0"/>
           </a:p>
@@ -24229,130 +24214,150 @@
       </p:sp>
       <p:sp>
         <p:nvSpPr>
-          <p:cNvPr id="22" name="Shape 20"/>
-          <p:cNvSpPr/>
-          <p:nvPr/>
-        </p:nvSpPr>
-        <p:spPr>
-          <a:xfrm>
-            <a:off x="6519672" y="2258568"/>
-            <a:ext cx="1828800" cy="292608"/>
+          <p:cNvPr id="23" name="Shape 21"/>
+          <p:cNvSpPr/>
+          <p:nvPr/>
+        </p:nvSpPr>
+        <p:spPr>
+          <a:xfrm>
+            <a:off x="365760" y="3273552"/>
+            <a:ext cx="1371600" cy="658368"/>
           </a:xfrm>
           <a:prstGeom prst="rect">
             <a:avLst>
-              <a:gd name="adj" fmla="val 25000"/>
+              <a:gd name="adj" fmla="val 8333"/>
             </a:avLst>
           </a:prstGeom>
           <a:solidFill>
-            <a:srgbClr val="CCFBF1"/>
-          </a:solidFill>
-          <a:ln w="19050">
-            <a:solidFill>
-              <a:srgbClr val="0D9488"/>
-            </a:solidFill>
-            <a:prstDash val="solid"/>
-          </a:ln>
-          <a:effectLst>
-            <a:outerShdw sx="100000" sy="100000" kx="0" ky="0" algn="bl" rotWithShape="0" blurRad="101600" dist="38100" dir="8100000">
-              <a:srgbClr val="000000">
-                <a:alpha val="12000"/>
-              </a:srgbClr>
-            </a:outerShdw>
-          </a:effectLst>
-        </p:spPr>
-      </p:sp>
-      <p:sp>
-        <p:nvSpPr>
-          <p:cNvPr id="23" name="Text 21"/>
-          <p:cNvSpPr/>
-          <p:nvPr/>
-        </p:nvSpPr>
-        <p:spPr>
-          <a:xfrm>
-            <a:off x="6519672" y="2258568"/>
-            <a:ext cx="1828800" cy="292608"/>
-          </a:xfrm>
-          <a:prstGeom prst="rect">
-            <a:avLst/>
-          </a:prstGeom>
-          <a:noFill/>
-          <a:ln/>
-        </p:spPr>
-        <p:txBody>
-          <a:bodyPr wrap="square" lIns="0" tIns="0" rIns="0" bIns="0" rtlCol="0" anchor="ctr"/>
-          <a:lstStyle/>
-          <a:p>
-            <a:pPr algn="ctr" indent="0" marL="0">
-              <a:buNone/>
-            </a:pPr>
-            <a:r>
-              <a:rPr lang="en-US" sz="1300" b="1" dirty="0">
-                <a:solidFill>
-                  <a:srgbClr val="0F766E"/>
+            <a:srgbClr val="E2E8F0"/>
+          </a:solidFill>
+          <a:ln w="12700">
+            <a:solidFill>
+              <a:srgbClr val="E2E8F0"/>
+            </a:solidFill>
+            <a:prstDash val="solid"/>
+          </a:ln>
+        </p:spPr>
+      </p:sp>
+      <p:sp>
+        <p:nvSpPr>
+          <p:cNvPr id="24" name="Text 22"/>
+          <p:cNvSpPr/>
+          <p:nvPr/>
+        </p:nvSpPr>
+        <p:spPr>
+          <a:xfrm>
+            <a:off x="365760" y="3273552"/>
+            <a:ext cx="1371600" cy="658368"/>
+          </a:xfrm>
+          <a:prstGeom prst="rect">
+            <a:avLst/>
+          </a:prstGeom>
+          <a:noFill/>
+          <a:ln/>
+        </p:spPr>
+        <p:txBody>
+          <a:bodyPr wrap="square" lIns="0" tIns="0" rIns="0" bIns="0" rtlCol="0" anchor="ctr"/>
+          <a:lstStyle/>
+          <a:p>
+            <a:pPr algn="ctr" indent="0" marL="0">
+              <a:buNone/>
+            </a:pPr>
+            <a:r>
+              <a:rPr lang="en-US" sz="1100" b="1" dirty="0">
+                <a:solidFill>
+                  <a:srgbClr val="475569"/>
                 </a:solidFill>
                 <a:latin typeface="Trebuchet MS" pitchFamily="34" charset="0"/>
                 <a:ea typeface="Trebuchet MS" pitchFamily="34" charset="-122"/>
                 <a:cs typeface="Trebuchet MS" pitchFamily="34" charset="-120"/>
               </a:rPr>
-              <a:t>ist</a:t>
-            </a:r>
-            <a:endParaRPr lang="en-US" sz="1300" dirty="0"/>
-          </a:p>
-        </p:txBody>
-      </p:sp>
-      <p:sp>
-        <p:nvSpPr>
-          <p:cNvPr id="24" name="Text 22"/>
-          <p:cNvSpPr/>
-          <p:nvPr/>
-        </p:nvSpPr>
-        <p:spPr>
-          <a:xfrm>
-            <a:off x="6519672" y="2569464"/>
-            <a:ext cx="1828800" cy="201168"/>
-          </a:xfrm>
-          <a:prstGeom prst="rect">
-            <a:avLst/>
-          </a:prstGeom>
-          <a:noFill/>
-          <a:ln/>
-        </p:spPr>
-        <p:txBody>
-          <a:bodyPr wrap="square" lIns="0" tIns="0" rIns="0" bIns="0" rtlCol="0" anchor="t"/>
-          <a:lstStyle/>
-          <a:p>
-            <a:pPr algn="ctr" indent="0" marL="0">
-              <a:buNone/>
-            </a:pPr>
-            <a:r>
-              <a:rPr lang="en-US" sz="850" dirty="0">
-                <a:solidFill>
-                  <a:srgbClr val="475569"/>
+              <a:t>Syllables</a:t>
+            </a:r>
+            <a:endParaRPr lang="en-US" sz="1100" dirty="0"/>
+          </a:p>
+        </p:txBody>
+      </p:sp>
+      <p:sp>
+        <p:nvSpPr>
+          <p:cNvPr id="25" name="Shape 23"/>
+          <p:cNvSpPr/>
+          <p:nvPr/>
+        </p:nvSpPr>
+        <p:spPr>
+          <a:xfrm>
+            <a:off x="1874520" y="3273552"/>
+            <a:ext cx="6903720" cy="658368"/>
+          </a:xfrm>
+          <a:prstGeom prst="rect">
+            <a:avLst>
+              <a:gd name="adj" fmla="val 8333"/>
+            </a:avLst>
+          </a:prstGeom>
+          <a:solidFill>
+            <a:srgbClr val="F8FAFC"/>
+          </a:solidFill>
+          <a:ln w="12700">
+            <a:solidFill>
+              <a:srgbClr val="E2E8F0"/>
+            </a:solidFill>
+            <a:prstDash val="dash"/>
+          </a:ln>
+        </p:spPr>
+      </p:sp>
+      <p:sp>
+        <p:nvSpPr>
+          <p:cNvPr id="26" name="Text 24"/>
+          <p:cNvSpPr/>
+          <p:nvPr/>
+        </p:nvSpPr>
+        <p:spPr>
+          <a:xfrm>
+            <a:off x="1874520" y="3273552"/>
+            <a:ext cx="6903720" cy="658368"/>
+          </a:xfrm>
+          <a:prstGeom prst="rect">
+            <a:avLst/>
+          </a:prstGeom>
+          <a:noFill/>
+          <a:ln/>
+        </p:spPr>
+        <p:txBody>
+          <a:bodyPr wrap="square" rtlCol="0" anchor="ctr"/>
+          <a:lstStyle/>
+          <a:p>
+            <a:pPr algn="ctr" indent="0" marL="0">
+              <a:buNone/>
+            </a:pPr>
+            <a:r>
+              <a:rPr lang="en-US" sz="1100" i="1" dirty="0">
+                <a:solidFill>
+                  <a:srgbClr val="CBD5E1"/>
                 </a:solidFill>
                 <a:latin typeface="Calibri" pitchFamily="34" charset="0"/>
                 <a:ea typeface="Calibri" pitchFamily="34" charset="-122"/>
                 <a:cs typeface="Calibri" pitchFamily="34" charset="-120"/>
               </a:rPr>
-              <a:t>person who does or believes</a:t>
-            </a:r>
-            <a:endParaRPr lang="en-US" sz="850" dirty="0"/>
-          </a:p>
-        </p:txBody>
-      </p:sp>
-      <p:sp>
-        <p:nvSpPr>
-          <p:cNvPr id="25" name="Shape 23"/>
-          <p:cNvSpPr/>
-          <p:nvPr/>
-        </p:nvSpPr>
-        <p:spPr>
-          <a:xfrm>
-            <a:off x="365760" y="3273552"/>
-            <a:ext cx="1371600" cy="658368"/>
+              <a:t>Write here...</a:t>
+            </a:r>
+            <a:endParaRPr lang="en-US" sz="1100" dirty="0"/>
+          </a:p>
+        </p:txBody>
+      </p:sp>
+      <p:sp>
+        <p:nvSpPr>
+          <p:cNvPr id="27" name="Shape 25"/>
+          <p:cNvSpPr/>
+          <p:nvPr/>
+        </p:nvSpPr>
+        <p:spPr>
+          <a:xfrm>
+            <a:off x="365760" y="4096512"/>
+            <a:ext cx="1371600" cy="804672"/>
           </a:xfrm>
           <a:prstGeom prst="rect">
             <a:avLst>
-              <a:gd name="adj" fmla="val 8333"/>
+              <a:gd name="adj" fmla="val 6818"/>
             </a:avLst>
           </a:prstGeom>
           <a:solidFill>
@@ -24368,14 +24373,14 @@
       </p:sp>
       <p:sp>
         <p:nvSpPr>
-          <p:cNvPr id="26" name="Text 24"/>
-          <p:cNvSpPr/>
-          <p:nvPr/>
-        </p:nvSpPr>
-        <p:spPr>
-          <a:xfrm>
-            <a:off x="365760" y="3273552"/>
-            <a:ext cx="1371600" cy="658368"/>
+          <p:cNvPr id="28" name="Text 26"/>
+          <p:cNvSpPr/>
+          <p:nvPr/>
+        </p:nvSpPr>
+        <p:spPr>
+          <a:xfrm>
+            <a:off x="365760" y="4096512"/>
+            <a:ext cx="1371600" cy="804672"/>
           </a:xfrm>
           <a:prstGeom prst="rect">
             <a:avLst/>
@@ -24399,7 +24404,7 @@
                 <a:ea typeface="Trebuchet MS" pitchFamily="34" charset="-122"/>
                 <a:cs typeface="Trebuchet MS" pitchFamily="34" charset="-120"/>
               </a:rPr>
-              <a:t>Syllables</a:t>
+              <a:t>Phonemes</a:t>
             </a:r>
             <a:endParaRPr lang="en-US" sz="1100" dirty="0"/>
           </a:p>
@@ -24407,80 +24412,14 @@
       </p:sp>
       <p:sp>
         <p:nvSpPr>
-          <p:cNvPr id="27" name="Shape 25"/>
-          <p:cNvSpPr/>
-          <p:nvPr/>
-        </p:nvSpPr>
-        <p:spPr>
-          <a:xfrm>
-            <a:off x="1874520" y="3273552"/>
-            <a:ext cx="6903720" cy="658368"/>
-          </a:xfrm>
-          <a:prstGeom prst="rect">
-            <a:avLst>
-              <a:gd name="adj" fmla="val 8333"/>
-            </a:avLst>
-          </a:prstGeom>
-          <a:solidFill>
-            <a:srgbClr val="F8FAFC"/>
-          </a:solidFill>
-          <a:ln w="12700">
-            <a:solidFill>
-              <a:srgbClr val="E2E8F0"/>
-            </a:solidFill>
-            <a:prstDash val="dash"/>
-          </a:ln>
-        </p:spPr>
-      </p:sp>
-      <p:sp>
-        <p:nvSpPr>
-          <p:cNvPr id="28" name="Text 26"/>
-          <p:cNvSpPr/>
-          <p:nvPr/>
-        </p:nvSpPr>
-        <p:spPr>
-          <a:xfrm>
-            <a:off x="1874520" y="3273552"/>
-            <a:ext cx="6903720" cy="658368"/>
-          </a:xfrm>
-          <a:prstGeom prst="rect">
-            <a:avLst/>
-          </a:prstGeom>
-          <a:noFill/>
-          <a:ln/>
-        </p:spPr>
-        <p:txBody>
-          <a:bodyPr wrap="square" rtlCol="0" anchor="ctr"/>
-          <a:lstStyle/>
-          <a:p>
-            <a:pPr algn="ctr" indent="0" marL="0">
-              <a:buNone/>
-            </a:pPr>
-            <a:r>
-              <a:rPr lang="en-US" sz="1100" i="1" dirty="0">
-                <a:solidFill>
-                  <a:srgbClr val="CBD5E1"/>
-                </a:solidFill>
-                <a:latin typeface="Calibri" pitchFamily="34" charset="0"/>
-                <a:ea typeface="Calibri" pitchFamily="34" charset="-122"/>
-                <a:cs typeface="Calibri" pitchFamily="34" charset="-120"/>
-              </a:rPr>
-              <a:t>Write here...</a:t>
-            </a:r>
-            <a:endParaRPr lang="en-US" sz="1100" dirty="0"/>
-          </a:p>
-        </p:txBody>
-      </p:sp>
-      <p:sp>
-        <p:nvSpPr>
           <p:cNvPr id="29" name="Shape 27"/>
           <p:cNvSpPr/>
           <p:nvPr/>
         </p:nvSpPr>
         <p:spPr>
           <a:xfrm>
-            <a:off x="365760" y="4096512"/>
-            <a:ext cx="1371600" cy="804672"/>
+            <a:off x="1874520" y="4096512"/>
+            <a:ext cx="6903720" cy="804672"/>
           </a:xfrm>
           <a:prstGeom prst="rect">
             <a:avLst>
@@ -24488,85 +24427,19 @@
             </a:avLst>
           </a:prstGeom>
           <a:solidFill>
-            <a:srgbClr val="E2E8F0"/>
+            <a:srgbClr val="F8FAFC"/>
           </a:solidFill>
           <a:ln w="12700">
             <a:solidFill>
               <a:srgbClr val="E2E8F0"/>
             </a:solidFill>
-            <a:prstDash val="solid"/>
+            <a:prstDash val="dash"/>
           </a:ln>
         </p:spPr>
       </p:sp>
       <p:sp>
         <p:nvSpPr>
           <p:cNvPr id="30" name="Text 28"/>
-          <p:cNvSpPr/>
-          <p:nvPr/>
-        </p:nvSpPr>
-        <p:spPr>
-          <a:xfrm>
-            <a:off x="365760" y="4096512"/>
-            <a:ext cx="1371600" cy="804672"/>
-          </a:xfrm>
-          <a:prstGeom prst="rect">
-            <a:avLst/>
-          </a:prstGeom>
-          <a:noFill/>
-          <a:ln/>
-        </p:spPr>
-        <p:txBody>
-          <a:bodyPr wrap="square" lIns="0" tIns="0" rIns="0" bIns="0" rtlCol="0" anchor="ctr"/>
-          <a:lstStyle/>
-          <a:p>
-            <a:pPr algn="ctr" indent="0" marL="0">
-              <a:buNone/>
-            </a:pPr>
-            <a:r>
-              <a:rPr lang="en-US" sz="1100" b="1" dirty="0">
-                <a:solidFill>
-                  <a:srgbClr val="475569"/>
-                </a:solidFill>
-                <a:latin typeface="Trebuchet MS" pitchFamily="34" charset="0"/>
-                <a:ea typeface="Trebuchet MS" pitchFamily="34" charset="-122"/>
-                <a:cs typeface="Trebuchet MS" pitchFamily="34" charset="-120"/>
-              </a:rPr>
-              <a:t>Phonemes</a:t>
-            </a:r>
-            <a:endParaRPr lang="en-US" sz="1100" dirty="0"/>
-          </a:p>
-        </p:txBody>
-      </p:sp>
-      <p:sp>
-        <p:nvSpPr>
-          <p:cNvPr id="31" name="Shape 29"/>
-          <p:cNvSpPr/>
-          <p:nvPr/>
-        </p:nvSpPr>
-        <p:spPr>
-          <a:xfrm>
-            <a:off x="1874520" y="4096512"/>
-            <a:ext cx="6903720" cy="804672"/>
-          </a:xfrm>
-          <a:prstGeom prst="rect">
-            <a:avLst>
-              <a:gd name="adj" fmla="val 6818"/>
-            </a:avLst>
-          </a:prstGeom>
-          <a:solidFill>
-            <a:srgbClr val="F8FAFC"/>
-          </a:solidFill>
-          <a:ln w="12700">
-            <a:solidFill>
-              <a:srgbClr val="E2E8F0"/>
-            </a:solidFill>
-            <a:prstDash val="dash"/>
-          </a:ln>
-        </p:spPr>
-      </p:sp>
-      <p:sp>
-        <p:nvSpPr>
-          <p:cNvPr id="32" name="Text 30"/>
           <p:cNvSpPr/>
           <p:nvPr/>
         </p:nvSpPr>
@@ -25827,7 +25700,7 @@
         </p:nvSpPr>
         <p:spPr>
           <a:xfrm>
-            <a:off x="2221992" y="2258568"/>
+            <a:off x="2938272" y="2258568"/>
             <a:ext cx="1828800" cy="292608"/>
           </a:xfrm>
           <a:prstGeom prst="rect">
@@ -25861,7 +25734,7 @@
         </p:nvSpPr>
         <p:spPr>
           <a:xfrm>
-            <a:off x="2221992" y="2258568"/>
+            <a:off x="2938272" y="2258568"/>
             <a:ext cx="1828800" cy="292608"/>
           </a:xfrm>
           <a:prstGeom prst="rect">
@@ -25886,7 +25759,7 @@
                 <a:ea typeface="Trebuchet MS" pitchFamily="34" charset="-122"/>
                 <a:cs typeface="Trebuchet MS" pitchFamily="34" charset="-120"/>
               </a:rPr>
-              <a:t>scien</a:t>
+              <a:t>scienc</a:t>
             </a:r>
             <a:endParaRPr lang="en-US" sz="1300" dirty="0"/>
           </a:p>
@@ -25900,7 +25773,7 @@
         </p:nvSpPr>
         <p:spPr>
           <a:xfrm>
-            <a:off x="2221992" y="2569464"/>
+            <a:off x="2938272" y="2569464"/>
             <a:ext cx="1828800" cy="201168"/>
           </a:xfrm>
           <a:prstGeom prst="rect">
@@ -25925,7 +25798,7 @@
                 <a:ea typeface="Calibri" pitchFamily="34" charset="-122"/>
                 <a:cs typeface="Calibri" pitchFamily="34" charset="-120"/>
               </a:rPr>
-              <a:t>knowledge</a:t>
+              <a:t>knowledge, study of nature</a:t>
             </a:r>
             <a:endParaRPr lang="en-US" sz="850" dirty="0"/>
           </a:p>
@@ -25933,13 +25806,52 @@
       </p:sp>
       <p:sp>
         <p:nvSpPr>
-          <p:cNvPr id="19" name="Shape 17"/>
-          <p:cNvSpPr/>
-          <p:nvPr/>
-        </p:nvSpPr>
-        <p:spPr>
-          <a:xfrm>
-            <a:off x="4370832" y="2258568"/>
+          <p:cNvPr id="19" name="Text 17"/>
+          <p:cNvSpPr/>
+          <p:nvPr/>
+        </p:nvSpPr>
+        <p:spPr>
+          <a:xfrm>
+            <a:off x="2938272" y="2752344"/>
+            <a:ext cx="1828800" cy="182880"/>
+          </a:xfrm>
+          <a:prstGeom prst="rect">
+            <a:avLst/>
+          </a:prstGeom>
+          <a:noFill/>
+          <a:ln/>
+        </p:spPr>
+        <p:txBody>
+          <a:bodyPr wrap="square" lIns="0" tIns="0" rIns="0" bIns="0" rtlCol="0" anchor="t"/>
+          <a:lstStyle/>
+          <a:p>
+            <a:pPr algn="ctr" indent="0" marL="0">
+              <a:buNone/>
+            </a:pPr>
+            <a:r>
+              <a:rPr lang="en-US" sz="700" i="1" dirty="0">
+                <a:solidFill>
+                  <a:srgbClr val="94A3B8"/>
+                </a:solidFill>
+                <a:latin typeface="Calibri" pitchFamily="34" charset="0"/>
+                <a:ea typeface="Calibri" pitchFamily="34" charset="-122"/>
+                <a:cs typeface="Calibri" pitchFamily="34" charset="-120"/>
+              </a:rPr>
+              <a:t>'e' dropped before vowel suffix</a:t>
+            </a:r>
+            <a:endParaRPr lang="en-US" sz="700" dirty="0"/>
+          </a:p>
+        </p:txBody>
+      </p:sp>
+      <p:sp>
+        <p:nvSpPr>
+          <p:cNvPr id="20" name="Shape 18"/>
+          <p:cNvSpPr/>
+          <p:nvPr/>
+        </p:nvSpPr>
+        <p:spPr>
+          <a:xfrm>
+            <a:off x="5803392" y="2258568"/>
             <a:ext cx="1828800" cy="292608"/>
           </a:xfrm>
           <a:prstGeom prst="rect">
@@ -25948,11 +25860,11 @@
             </a:avLst>
           </a:prstGeom>
           <a:solidFill>
-            <a:srgbClr val="FCE7F3"/>
+            <a:srgbClr val="CCFBF1"/>
           </a:solidFill>
           <a:ln w="19050">
             <a:solidFill>
-              <a:srgbClr val="DB2777"/>
+              <a:srgbClr val="0D9488"/>
             </a:solidFill>
             <a:prstDash val="solid"/>
           </a:ln>
@@ -25967,13 +25879,13 @@
       </p:sp>
       <p:sp>
         <p:nvSpPr>
-          <p:cNvPr id="20" name="Text 18"/>
-          <p:cNvSpPr/>
-          <p:nvPr/>
-        </p:nvSpPr>
-        <p:spPr>
-          <a:xfrm>
-            <a:off x="4370832" y="2258568"/>
+          <p:cNvPr id="21" name="Text 19"/>
+          <p:cNvSpPr/>
+          <p:nvPr/>
+        </p:nvSpPr>
+        <p:spPr>
+          <a:xfrm>
+            <a:off x="5803392" y="2258568"/>
             <a:ext cx="1828800" cy="292608"/>
           </a:xfrm>
           <a:prstGeom prst="rect">
@@ -25992,13 +25904,13 @@
             <a:r>
               <a:rPr lang="en-US" sz="1300" b="1" dirty="0">
                 <a:solidFill>
-                  <a:srgbClr val="9D174D"/>
+                  <a:srgbClr val="0F766E"/>
                 </a:solidFill>
                 <a:latin typeface="Trebuchet MS" pitchFamily="34" charset="0"/>
                 <a:ea typeface="Trebuchet MS" pitchFamily="34" charset="-122"/>
                 <a:cs typeface="Trebuchet MS" pitchFamily="34" charset="-120"/>
               </a:rPr>
-              <a:t>t</a:t>
+              <a:t>ist</a:t>
             </a:r>
             <a:endParaRPr lang="en-US" sz="1300" dirty="0"/>
           </a:p>
@@ -26006,13 +25918,13 @@
       </p:sp>
       <p:sp>
         <p:nvSpPr>
-          <p:cNvPr id="21" name="Text 19"/>
-          <p:cNvSpPr/>
-          <p:nvPr/>
-        </p:nvSpPr>
-        <p:spPr>
-          <a:xfrm>
-            <a:off x="4370832" y="2569464"/>
+          <p:cNvPr id="22" name="Text 20"/>
+          <p:cNvSpPr/>
+          <p:nvPr/>
+        </p:nvSpPr>
+        <p:spPr>
+          <a:xfrm>
+            <a:off x="5803392" y="2569464"/>
             <a:ext cx="1828800" cy="201168"/>
           </a:xfrm>
           <a:prstGeom prst="rect">
@@ -26037,7 +25949,7 @@
                 <a:ea typeface="Calibri" pitchFamily="34" charset="-122"/>
                 <a:cs typeface="Calibri" pitchFamily="34" charset="-120"/>
               </a:rPr>
-              <a:t>connecting letter</a:t>
+              <a:t>person who does</a:t>
             </a:r>
             <a:endParaRPr lang="en-US" sz="850" dirty="0"/>
           </a:p>
@@ -26045,113 +25957,67 @@
       </p:sp>
       <p:sp>
         <p:nvSpPr>
-          <p:cNvPr id="22" name="Shape 20"/>
-          <p:cNvSpPr/>
-          <p:nvPr/>
-        </p:nvSpPr>
-        <p:spPr>
-          <a:xfrm>
-            <a:off x="6519672" y="2258568"/>
-            <a:ext cx="1828800" cy="292608"/>
+          <p:cNvPr id="23" name="Shape 21"/>
+          <p:cNvSpPr/>
+          <p:nvPr/>
+        </p:nvSpPr>
+        <p:spPr>
+          <a:xfrm>
+            <a:off x="365760" y="3273552"/>
+            <a:ext cx="1371600" cy="658368"/>
           </a:xfrm>
           <a:prstGeom prst="rect">
             <a:avLst>
-              <a:gd name="adj" fmla="val 25000"/>
+              <a:gd name="adj" fmla="val 8333"/>
             </a:avLst>
           </a:prstGeom>
           <a:solidFill>
-            <a:srgbClr val="CCFBF1"/>
-          </a:solidFill>
-          <a:ln w="19050">
-            <a:solidFill>
-              <a:srgbClr val="0D9488"/>
-            </a:solidFill>
-            <a:prstDash val="solid"/>
-          </a:ln>
-          <a:effectLst>
-            <a:outerShdw sx="100000" sy="100000" kx="0" ky="0" algn="bl" rotWithShape="0" blurRad="101600" dist="38100" dir="8100000">
-              <a:srgbClr val="000000">
-                <a:alpha val="12000"/>
-              </a:srgbClr>
-            </a:outerShdw>
-          </a:effectLst>
-        </p:spPr>
-      </p:sp>
-      <p:sp>
-        <p:nvSpPr>
-          <p:cNvPr id="23" name="Text 21"/>
-          <p:cNvSpPr/>
-          <p:nvPr/>
-        </p:nvSpPr>
-        <p:spPr>
-          <a:xfrm>
-            <a:off x="6519672" y="2258568"/>
-            <a:ext cx="1828800" cy="292608"/>
-          </a:xfrm>
-          <a:prstGeom prst="rect">
-            <a:avLst/>
-          </a:prstGeom>
-          <a:noFill/>
-          <a:ln/>
-        </p:spPr>
-        <p:txBody>
-          <a:bodyPr wrap="square" lIns="0" tIns="0" rIns="0" bIns="0" rtlCol="0" anchor="ctr"/>
-          <a:lstStyle/>
-          <a:p>
-            <a:pPr algn="ctr" indent="0" marL="0">
-              <a:buNone/>
-            </a:pPr>
-            <a:r>
-              <a:rPr lang="en-US" sz="1300" b="1" dirty="0">
-                <a:solidFill>
-                  <a:srgbClr val="0F766E"/>
+            <a:srgbClr val="E2E8F0"/>
+          </a:solidFill>
+          <a:ln w="12700">
+            <a:solidFill>
+              <a:srgbClr val="E2E8F0"/>
+            </a:solidFill>
+            <a:prstDash val="solid"/>
+          </a:ln>
+        </p:spPr>
+      </p:sp>
+      <p:sp>
+        <p:nvSpPr>
+          <p:cNvPr id="24" name="Text 22"/>
+          <p:cNvSpPr/>
+          <p:nvPr/>
+        </p:nvSpPr>
+        <p:spPr>
+          <a:xfrm>
+            <a:off x="365760" y="3273552"/>
+            <a:ext cx="1371600" cy="658368"/>
+          </a:xfrm>
+          <a:prstGeom prst="rect">
+            <a:avLst/>
+          </a:prstGeom>
+          <a:noFill/>
+          <a:ln/>
+        </p:spPr>
+        <p:txBody>
+          <a:bodyPr wrap="square" lIns="0" tIns="0" rIns="0" bIns="0" rtlCol="0" anchor="ctr"/>
+          <a:lstStyle/>
+          <a:p>
+            <a:pPr algn="ctr" indent="0" marL="0">
+              <a:buNone/>
+            </a:pPr>
+            <a:r>
+              <a:rPr lang="en-US" sz="1100" b="1" dirty="0">
+                <a:solidFill>
+                  <a:srgbClr val="475569"/>
                 </a:solidFill>
                 <a:latin typeface="Trebuchet MS" pitchFamily="34" charset="0"/>
                 <a:ea typeface="Trebuchet MS" pitchFamily="34" charset="-122"/>
                 <a:cs typeface="Trebuchet MS" pitchFamily="34" charset="-120"/>
               </a:rPr>
-              <a:t>ist</a:t>
-            </a:r>
-            <a:endParaRPr lang="en-US" sz="1300" dirty="0"/>
-          </a:p>
-        </p:txBody>
-      </p:sp>
-      <p:sp>
-        <p:nvSpPr>
-          <p:cNvPr id="24" name="Text 22"/>
-          <p:cNvSpPr/>
-          <p:nvPr/>
-        </p:nvSpPr>
-        <p:spPr>
-          <a:xfrm>
-            <a:off x="6519672" y="2569464"/>
-            <a:ext cx="1828800" cy="201168"/>
-          </a:xfrm>
-          <a:prstGeom prst="rect">
-            <a:avLst/>
-          </a:prstGeom>
-          <a:noFill/>
-          <a:ln/>
-        </p:spPr>
-        <p:txBody>
-          <a:bodyPr wrap="square" lIns="0" tIns="0" rIns="0" bIns="0" rtlCol="0" anchor="t"/>
-          <a:lstStyle/>
-          <a:p>
-            <a:pPr algn="ctr" indent="0" marL="0">
-              <a:buNone/>
-            </a:pPr>
-            <a:r>
-              <a:rPr lang="en-US" sz="850" dirty="0">
-                <a:solidFill>
-                  <a:srgbClr val="475569"/>
-                </a:solidFill>
-                <a:latin typeface="Calibri" pitchFamily="34" charset="0"/>
-                <a:ea typeface="Calibri" pitchFamily="34" charset="-122"/>
-                <a:cs typeface="Calibri" pitchFamily="34" charset="-120"/>
-              </a:rPr>
-              <a:t>person who does or believes</a:t>
-            </a:r>
-            <a:endParaRPr lang="en-US" sz="850" dirty="0"/>
+              <a:t>Syllables</a:t>
+            </a:r>
+            <a:endParaRPr lang="en-US" sz="1100" dirty="0"/>
           </a:p>
         </p:txBody>
       </p:sp>
@@ -26163,8 +26029,8 @@
         </p:nvSpPr>
         <p:spPr>
           <a:xfrm>
-            <a:off x="365760" y="3273552"/>
-            <a:ext cx="1371600" cy="658368"/>
+            <a:off x="1874520" y="3273552"/>
+            <a:ext cx="6903720" cy="658368"/>
           </a:xfrm>
           <a:prstGeom prst="rect">
             <a:avLst>
@@ -26172,91 +26038,130 @@
             </a:avLst>
           </a:prstGeom>
           <a:solidFill>
-            <a:srgbClr val="E2E8F0"/>
-          </a:solidFill>
-          <a:ln w="12700">
-            <a:solidFill>
-              <a:srgbClr val="E2E8F0"/>
-            </a:solidFill>
-            <a:prstDash val="solid"/>
-          </a:ln>
-        </p:spPr>
-      </p:sp>
-      <p:sp>
-        <p:nvSpPr>
-          <p:cNvPr id="26" name="Text 24"/>
-          <p:cNvSpPr/>
-          <p:nvPr/>
-        </p:nvSpPr>
-        <p:spPr>
-          <a:xfrm>
-            <a:off x="365760" y="3273552"/>
-            <a:ext cx="1371600" cy="658368"/>
-          </a:xfrm>
-          <a:prstGeom prst="rect">
-            <a:avLst/>
-          </a:prstGeom>
-          <a:noFill/>
-          <a:ln/>
-        </p:spPr>
-        <p:txBody>
-          <a:bodyPr wrap="square" lIns="0" tIns="0" rIns="0" bIns="0" rtlCol="0" anchor="ctr"/>
-          <a:lstStyle/>
-          <a:p>
-            <a:pPr algn="ctr" indent="0" marL="0">
-              <a:buNone/>
-            </a:pPr>
-            <a:r>
-              <a:rPr lang="en-US" sz="1100" b="1" dirty="0">
-                <a:solidFill>
-                  <a:srgbClr val="475569"/>
+            <a:srgbClr val="CCFBF1"/>
+          </a:solidFill>
+          <a:ln w="12700">
+            <a:solidFill>
+              <a:srgbClr val="0D9488"/>
+            </a:solidFill>
+            <a:prstDash val="solid"/>
+          </a:ln>
+        </p:spPr>
+      </p:sp>
+      <p:sp>
+        <p:nvSpPr>
+          <p:cNvPr id="26" name="Shape 24"/>
+          <p:cNvSpPr/>
+          <p:nvPr/>
+        </p:nvSpPr>
+        <p:spPr>
+          <a:xfrm>
+            <a:off x="2313432" y="3364992"/>
+            <a:ext cx="1645920" cy="475488"/>
+          </a:xfrm>
+          <a:prstGeom prst="rect">
+            <a:avLst>
+              <a:gd name="adj" fmla="val 9615"/>
+            </a:avLst>
+          </a:prstGeom>
+          <a:solidFill>
+            <a:srgbClr val="FFFFFF"/>
+          </a:solidFill>
+          <a:ln w="12700">
+            <a:solidFill>
+              <a:srgbClr val="0D9488"/>
+            </a:solidFill>
+            <a:prstDash val="solid"/>
+          </a:ln>
+        </p:spPr>
+      </p:sp>
+      <p:sp>
+        <p:nvSpPr>
+          <p:cNvPr id="27" name="Text 25"/>
+          <p:cNvSpPr/>
+          <p:nvPr/>
+        </p:nvSpPr>
+        <p:spPr>
+          <a:xfrm>
+            <a:off x="2313432" y="3364992"/>
+            <a:ext cx="1645920" cy="475488"/>
+          </a:xfrm>
+          <a:prstGeom prst="rect">
+            <a:avLst/>
+          </a:prstGeom>
+          <a:noFill/>
+          <a:ln/>
+        </p:spPr>
+        <p:txBody>
+          <a:bodyPr wrap="square" lIns="0" tIns="0" rIns="0" bIns="0" rtlCol="0" anchor="ctr"/>
+          <a:lstStyle/>
+          <a:p>
+            <a:pPr algn="ctr" indent="0" marL="0">
+              <a:buNone/>
+            </a:pPr>
+            <a:r>
+              <a:rPr lang="en-US" sz="1400" b="1" dirty="0">
+                <a:solidFill>
+                  <a:srgbClr val="0D9488"/>
                 </a:solidFill>
                 <a:latin typeface="Trebuchet MS" pitchFamily="34" charset="0"/>
                 <a:ea typeface="Trebuchet MS" pitchFamily="34" charset="-122"/>
                 <a:cs typeface="Trebuchet MS" pitchFamily="34" charset="-120"/>
               </a:rPr>
-              <a:t>Syllables</a:t>
-            </a:r>
-            <a:endParaRPr lang="en-US" sz="1100" dirty="0"/>
-          </a:p>
-        </p:txBody>
-      </p:sp>
-      <p:sp>
-        <p:nvSpPr>
-          <p:cNvPr id="27" name="Shape 25"/>
-          <p:cNvSpPr/>
-          <p:nvPr/>
-        </p:nvSpPr>
-        <p:spPr>
-          <a:xfrm>
-            <a:off x="1874520" y="3273552"/>
-            <a:ext cx="6903720" cy="658368"/>
-          </a:xfrm>
-          <a:prstGeom prst="rect">
-            <a:avLst>
-              <a:gd name="adj" fmla="val 8333"/>
-            </a:avLst>
-          </a:prstGeom>
-          <a:solidFill>
-            <a:srgbClr val="CCFBF1"/>
-          </a:solidFill>
-          <a:ln w="12700">
-            <a:solidFill>
-              <a:srgbClr val="0D9488"/>
-            </a:solidFill>
-            <a:prstDash val="solid"/>
-          </a:ln>
-        </p:spPr>
-      </p:sp>
-      <p:sp>
-        <p:nvSpPr>
-          <p:cNvPr id="28" name="Shape 26"/>
-          <p:cNvSpPr/>
-          <p:nvPr/>
-        </p:nvSpPr>
-        <p:spPr>
-          <a:xfrm>
-            <a:off x="2313432" y="3364992"/>
+              <a:t>sci</a:t>
+            </a:r>
+            <a:endParaRPr lang="en-US" sz="1400" dirty="0"/>
+          </a:p>
+        </p:txBody>
+      </p:sp>
+      <p:sp>
+        <p:nvSpPr>
+          <p:cNvPr id="28" name="Text 26"/>
+          <p:cNvSpPr/>
+          <p:nvPr/>
+        </p:nvSpPr>
+        <p:spPr>
+          <a:xfrm>
+            <a:off x="3959352" y="3364992"/>
+            <a:ext cx="411480" cy="475488"/>
+          </a:xfrm>
+          <a:prstGeom prst="rect">
+            <a:avLst/>
+          </a:prstGeom>
+          <a:noFill/>
+          <a:ln/>
+        </p:spPr>
+        <p:txBody>
+          <a:bodyPr wrap="square" lIns="0" tIns="0" rIns="0" bIns="0" rtlCol="0" anchor="ctr"/>
+          <a:lstStyle/>
+          <a:p>
+            <a:pPr algn="ctr" indent="0" marL="0">
+              <a:buNone/>
+            </a:pPr>
+            <a:r>
+              <a:rPr lang="en-US" sz="1600" b="1" dirty="0">
+                <a:solidFill>
+                  <a:srgbClr val="0D9488"/>
+                </a:solidFill>
+                <a:latin typeface="Trebuchet MS" pitchFamily="34" charset="0"/>
+                <a:ea typeface="Trebuchet MS" pitchFamily="34" charset="-122"/>
+                <a:cs typeface="Trebuchet MS" pitchFamily="34" charset="-120"/>
+              </a:rPr>
+              <a:t>·</a:t>
+            </a:r>
+            <a:endParaRPr lang="en-US" sz="1600" dirty="0"/>
+          </a:p>
+        </p:txBody>
+      </p:sp>
+      <p:sp>
+        <p:nvSpPr>
+          <p:cNvPr id="29" name="Shape 27"/>
+          <p:cNvSpPr/>
+          <p:nvPr/>
+        </p:nvSpPr>
+        <p:spPr>
+          <a:xfrm>
+            <a:off x="4370832" y="3364992"/>
             <a:ext cx="1645920" cy="475488"/>
           </a:xfrm>
           <a:prstGeom prst="rect">
@@ -26277,13 +26182,13 @@
       </p:sp>
       <p:sp>
         <p:nvSpPr>
-          <p:cNvPr id="29" name="Text 27"/>
-          <p:cNvSpPr/>
-          <p:nvPr/>
-        </p:nvSpPr>
-        <p:spPr>
-          <a:xfrm>
-            <a:off x="2313432" y="3364992"/>
+          <p:cNvPr id="30" name="Text 28"/>
+          <p:cNvSpPr/>
+          <p:nvPr/>
+        </p:nvSpPr>
+        <p:spPr>
+          <a:xfrm>
+            <a:off x="4370832" y="3364992"/>
             <a:ext cx="1645920" cy="475488"/>
           </a:xfrm>
           <a:prstGeom prst="rect">
@@ -26308,7 +26213,7 @@
                 <a:ea typeface="Trebuchet MS" pitchFamily="34" charset="-122"/>
                 <a:cs typeface="Trebuchet MS" pitchFamily="34" charset="-120"/>
               </a:rPr>
-              <a:t>sci</a:t>
+              <a:t>en</a:t>
             </a:r>
             <a:endParaRPr lang="en-US" sz="1400" dirty="0"/>
           </a:p>
@@ -26316,13 +26221,13 @@
       </p:sp>
       <p:sp>
         <p:nvSpPr>
-          <p:cNvPr id="30" name="Text 28"/>
-          <p:cNvSpPr/>
-          <p:nvPr/>
-        </p:nvSpPr>
-        <p:spPr>
-          <a:xfrm>
-            <a:off x="3959352" y="3364992"/>
+          <p:cNvPr id="31" name="Text 29"/>
+          <p:cNvSpPr/>
+          <p:nvPr/>
+        </p:nvSpPr>
+        <p:spPr>
+          <a:xfrm>
+            <a:off x="6016752" y="3364992"/>
             <a:ext cx="411480" cy="475488"/>
           </a:xfrm>
           <a:prstGeom prst="rect">
@@ -26355,13 +26260,13 @@
       </p:sp>
       <p:sp>
         <p:nvSpPr>
-          <p:cNvPr id="31" name="Shape 29"/>
-          <p:cNvSpPr/>
-          <p:nvPr/>
-        </p:nvSpPr>
-        <p:spPr>
-          <a:xfrm>
-            <a:off x="4370832" y="3364992"/>
+          <p:cNvPr id="32" name="Shape 30"/>
+          <p:cNvSpPr/>
+          <p:nvPr/>
+        </p:nvSpPr>
+        <p:spPr>
+          <a:xfrm>
+            <a:off x="6428232" y="3364992"/>
             <a:ext cx="1645920" cy="475488"/>
           </a:xfrm>
           <a:prstGeom prst="rect">
@@ -26382,13 +26287,13 @@
       </p:sp>
       <p:sp>
         <p:nvSpPr>
-          <p:cNvPr id="32" name="Text 30"/>
-          <p:cNvSpPr/>
-          <p:nvPr/>
-        </p:nvSpPr>
-        <p:spPr>
-          <a:xfrm>
-            <a:off x="4370832" y="3364992"/>
+          <p:cNvPr id="33" name="Text 31"/>
+          <p:cNvSpPr/>
+          <p:nvPr/>
+        </p:nvSpPr>
+        <p:spPr>
+          <a:xfrm>
+            <a:off x="6428232" y="3364992"/>
             <a:ext cx="1645920" cy="475488"/>
           </a:xfrm>
           <a:prstGeom prst="rect">
@@ -26413,7 +26318,7 @@
                 <a:ea typeface="Trebuchet MS" pitchFamily="34" charset="-122"/>
                 <a:cs typeface="Trebuchet MS" pitchFamily="34" charset="-120"/>
               </a:rPr>
-              <a:t>en</a:t>
+              <a:t>tist</a:t>
             </a:r>
             <a:endParaRPr lang="en-US" sz="1400" dirty="0"/>
           </a:p>
@@ -26421,106 +26326,67 @@
       </p:sp>
       <p:sp>
         <p:nvSpPr>
-          <p:cNvPr id="33" name="Text 31"/>
-          <p:cNvSpPr/>
-          <p:nvPr/>
-        </p:nvSpPr>
-        <p:spPr>
-          <a:xfrm>
-            <a:off x="6016752" y="3364992"/>
-            <a:ext cx="411480" cy="475488"/>
-          </a:xfrm>
-          <a:prstGeom prst="rect">
-            <a:avLst/>
-          </a:prstGeom>
-          <a:noFill/>
-          <a:ln/>
-        </p:spPr>
-        <p:txBody>
-          <a:bodyPr wrap="square" lIns="0" tIns="0" rIns="0" bIns="0" rtlCol="0" anchor="ctr"/>
-          <a:lstStyle/>
-          <a:p>
-            <a:pPr algn="ctr" indent="0" marL="0">
-              <a:buNone/>
-            </a:pPr>
-            <a:r>
-              <a:rPr lang="en-US" sz="1600" b="1" dirty="0">
-                <a:solidFill>
-                  <a:srgbClr val="0D9488"/>
+          <p:cNvPr id="34" name="Shape 32"/>
+          <p:cNvSpPr/>
+          <p:nvPr/>
+        </p:nvSpPr>
+        <p:spPr>
+          <a:xfrm>
+            <a:off x="365760" y="4096512"/>
+            <a:ext cx="1371600" cy="804672"/>
+          </a:xfrm>
+          <a:prstGeom prst="rect">
+            <a:avLst>
+              <a:gd name="adj" fmla="val 6818"/>
+            </a:avLst>
+          </a:prstGeom>
+          <a:solidFill>
+            <a:srgbClr val="E2E8F0"/>
+          </a:solidFill>
+          <a:ln w="12700">
+            <a:solidFill>
+              <a:srgbClr val="E2E8F0"/>
+            </a:solidFill>
+            <a:prstDash val="solid"/>
+          </a:ln>
+        </p:spPr>
+      </p:sp>
+      <p:sp>
+        <p:nvSpPr>
+          <p:cNvPr id="35" name="Text 33"/>
+          <p:cNvSpPr/>
+          <p:nvPr/>
+        </p:nvSpPr>
+        <p:spPr>
+          <a:xfrm>
+            <a:off x="365760" y="4096512"/>
+            <a:ext cx="1371600" cy="804672"/>
+          </a:xfrm>
+          <a:prstGeom prst="rect">
+            <a:avLst/>
+          </a:prstGeom>
+          <a:noFill/>
+          <a:ln/>
+        </p:spPr>
+        <p:txBody>
+          <a:bodyPr wrap="square" lIns="0" tIns="0" rIns="0" bIns="0" rtlCol="0" anchor="ctr"/>
+          <a:lstStyle/>
+          <a:p>
+            <a:pPr algn="ctr" indent="0" marL="0">
+              <a:buNone/>
+            </a:pPr>
+            <a:r>
+              <a:rPr lang="en-US" sz="1100" b="1" dirty="0">
+                <a:solidFill>
+                  <a:srgbClr val="475569"/>
                 </a:solidFill>
                 <a:latin typeface="Trebuchet MS" pitchFamily="34" charset="0"/>
                 <a:ea typeface="Trebuchet MS" pitchFamily="34" charset="-122"/>
                 <a:cs typeface="Trebuchet MS" pitchFamily="34" charset="-120"/>
               </a:rPr>
-              <a:t>·</a:t>
-            </a:r>
-            <a:endParaRPr lang="en-US" sz="1600" dirty="0"/>
-          </a:p>
-        </p:txBody>
-      </p:sp>
-      <p:sp>
-        <p:nvSpPr>
-          <p:cNvPr id="34" name="Shape 32"/>
-          <p:cNvSpPr/>
-          <p:nvPr/>
-        </p:nvSpPr>
-        <p:spPr>
-          <a:xfrm>
-            <a:off x="6428232" y="3364992"/>
-            <a:ext cx="1645920" cy="475488"/>
-          </a:xfrm>
-          <a:prstGeom prst="rect">
-            <a:avLst>
-              <a:gd name="adj" fmla="val 9615"/>
-            </a:avLst>
-          </a:prstGeom>
-          <a:solidFill>
-            <a:srgbClr val="FFFFFF"/>
-          </a:solidFill>
-          <a:ln w="12700">
-            <a:solidFill>
-              <a:srgbClr val="0D9488"/>
-            </a:solidFill>
-            <a:prstDash val="solid"/>
-          </a:ln>
-        </p:spPr>
-      </p:sp>
-      <p:sp>
-        <p:nvSpPr>
-          <p:cNvPr id="35" name="Text 33"/>
-          <p:cNvSpPr/>
-          <p:nvPr/>
-        </p:nvSpPr>
-        <p:spPr>
-          <a:xfrm>
-            <a:off x="6428232" y="3364992"/>
-            <a:ext cx="1645920" cy="475488"/>
-          </a:xfrm>
-          <a:prstGeom prst="rect">
-            <a:avLst/>
-          </a:prstGeom>
-          <a:noFill/>
-          <a:ln/>
-        </p:spPr>
-        <p:txBody>
-          <a:bodyPr wrap="square" lIns="0" tIns="0" rIns="0" bIns="0" rtlCol="0" anchor="ctr"/>
-          <a:lstStyle/>
-          <a:p>
-            <a:pPr algn="ctr" indent="0" marL="0">
-              <a:buNone/>
-            </a:pPr>
-            <a:r>
-              <a:rPr lang="en-US" sz="1400" b="1" dirty="0">
-                <a:solidFill>
-                  <a:srgbClr val="0D9488"/>
-                </a:solidFill>
-                <a:latin typeface="Trebuchet MS" pitchFamily="34" charset="0"/>
-                <a:ea typeface="Trebuchet MS" pitchFamily="34" charset="-122"/>
-                <a:cs typeface="Trebuchet MS" pitchFamily="34" charset="-120"/>
-              </a:rPr>
-              <a:t>tist</a:t>
-            </a:r>
-            <a:endParaRPr lang="en-US" sz="1400" dirty="0"/>
+              <a:t>Phonemes</a:t>
+            </a:r>
+            <a:endParaRPr lang="en-US" sz="1100" dirty="0"/>
           </a:p>
         </p:txBody>
       </p:sp>
@@ -26532,8 +26398,8 @@
         </p:nvSpPr>
         <p:spPr>
           <a:xfrm>
-            <a:off x="365760" y="4096512"/>
-            <a:ext cx="1371600" cy="804672"/>
+            <a:off x="1874520" y="4096512"/>
+            <a:ext cx="6903720" cy="804672"/>
           </a:xfrm>
           <a:prstGeom prst="rect">
             <a:avLst>
@@ -26541,85 +26407,19 @@
             </a:avLst>
           </a:prstGeom>
           <a:solidFill>
-            <a:srgbClr val="E2E8F0"/>
+            <a:srgbClr val="F8FAFC"/>
           </a:solidFill>
           <a:ln w="12700">
             <a:solidFill>
               <a:srgbClr val="E2E8F0"/>
             </a:solidFill>
-            <a:prstDash val="solid"/>
+            <a:prstDash val="dash"/>
           </a:ln>
         </p:spPr>
       </p:sp>
       <p:sp>
         <p:nvSpPr>
           <p:cNvPr id="37" name="Text 35"/>
-          <p:cNvSpPr/>
-          <p:nvPr/>
-        </p:nvSpPr>
-        <p:spPr>
-          <a:xfrm>
-            <a:off x="365760" y="4096512"/>
-            <a:ext cx="1371600" cy="804672"/>
-          </a:xfrm>
-          <a:prstGeom prst="rect">
-            <a:avLst/>
-          </a:prstGeom>
-          <a:noFill/>
-          <a:ln/>
-        </p:spPr>
-        <p:txBody>
-          <a:bodyPr wrap="square" lIns="0" tIns="0" rIns="0" bIns="0" rtlCol="0" anchor="ctr"/>
-          <a:lstStyle/>
-          <a:p>
-            <a:pPr algn="ctr" indent="0" marL="0">
-              <a:buNone/>
-            </a:pPr>
-            <a:r>
-              <a:rPr lang="en-US" sz="1100" b="1" dirty="0">
-                <a:solidFill>
-                  <a:srgbClr val="475569"/>
-                </a:solidFill>
-                <a:latin typeface="Trebuchet MS" pitchFamily="34" charset="0"/>
-                <a:ea typeface="Trebuchet MS" pitchFamily="34" charset="-122"/>
-                <a:cs typeface="Trebuchet MS" pitchFamily="34" charset="-120"/>
-              </a:rPr>
-              <a:t>Phonemes</a:t>
-            </a:r>
-            <a:endParaRPr lang="en-US" sz="1100" dirty="0"/>
-          </a:p>
-        </p:txBody>
-      </p:sp>
-      <p:sp>
-        <p:nvSpPr>
-          <p:cNvPr id="38" name="Shape 36"/>
-          <p:cNvSpPr/>
-          <p:nvPr/>
-        </p:nvSpPr>
-        <p:spPr>
-          <a:xfrm>
-            <a:off x="1874520" y="4096512"/>
-            <a:ext cx="6903720" cy="804672"/>
-          </a:xfrm>
-          <a:prstGeom prst="rect">
-            <a:avLst>
-              <a:gd name="adj" fmla="val 6818"/>
-            </a:avLst>
-          </a:prstGeom>
-          <a:solidFill>
-            <a:srgbClr val="F8FAFC"/>
-          </a:solidFill>
-          <a:ln w="12700">
-            <a:solidFill>
-              <a:srgbClr val="E2E8F0"/>
-            </a:solidFill>
-            <a:prstDash val="dash"/>
-          </a:ln>
-        </p:spPr>
-      </p:sp>
-      <p:sp>
-        <p:nvSpPr>
-          <p:cNvPr id="39" name="Text 37"/>
           <p:cNvSpPr/>
           <p:nvPr/>
         </p:nvSpPr>
@@ -27161,7 +26961,7 @@
         </p:nvSpPr>
         <p:spPr>
           <a:xfrm>
-            <a:off x="2221992" y="2258568"/>
+            <a:off x="2938272" y="2258568"/>
             <a:ext cx="1828800" cy="292608"/>
           </a:xfrm>
           <a:prstGeom prst="rect">
@@ -27195,7 +26995,7 @@
         </p:nvSpPr>
         <p:spPr>
           <a:xfrm>
-            <a:off x="2221992" y="2258568"/>
+            <a:off x="2938272" y="2258568"/>
             <a:ext cx="1828800" cy="292608"/>
           </a:xfrm>
           <a:prstGeom prst="rect">
@@ -27220,7 +27020,7 @@
                 <a:ea typeface="Trebuchet MS" pitchFamily="34" charset="-122"/>
                 <a:cs typeface="Trebuchet MS" pitchFamily="34" charset="-120"/>
               </a:rPr>
-              <a:t>scien</a:t>
+              <a:t>scienc</a:t>
             </a:r>
             <a:endParaRPr lang="en-US" sz="1300" dirty="0"/>
           </a:p>
@@ -27234,7 +27034,7 @@
         </p:nvSpPr>
         <p:spPr>
           <a:xfrm>
-            <a:off x="2221992" y="2569464"/>
+            <a:off x="2938272" y="2569464"/>
             <a:ext cx="1828800" cy="201168"/>
           </a:xfrm>
           <a:prstGeom prst="rect">
@@ -27259,7 +27059,7 @@
                 <a:ea typeface="Calibri" pitchFamily="34" charset="-122"/>
                 <a:cs typeface="Calibri" pitchFamily="34" charset="-120"/>
               </a:rPr>
-              <a:t>knowledge</a:t>
+              <a:t>knowledge, study of nature</a:t>
             </a:r>
             <a:endParaRPr lang="en-US" sz="850" dirty="0"/>
           </a:p>
@@ -27267,13 +27067,52 @@
       </p:sp>
       <p:sp>
         <p:nvSpPr>
-          <p:cNvPr id="19" name="Shape 17"/>
-          <p:cNvSpPr/>
-          <p:nvPr/>
-        </p:nvSpPr>
-        <p:spPr>
-          <a:xfrm>
-            <a:off x="4370832" y="2258568"/>
+          <p:cNvPr id="19" name="Text 17"/>
+          <p:cNvSpPr/>
+          <p:nvPr/>
+        </p:nvSpPr>
+        <p:spPr>
+          <a:xfrm>
+            <a:off x="2938272" y="2752344"/>
+            <a:ext cx="1828800" cy="182880"/>
+          </a:xfrm>
+          <a:prstGeom prst="rect">
+            <a:avLst/>
+          </a:prstGeom>
+          <a:noFill/>
+          <a:ln/>
+        </p:spPr>
+        <p:txBody>
+          <a:bodyPr wrap="square" lIns="0" tIns="0" rIns="0" bIns="0" rtlCol="0" anchor="t"/>
+          <a:lstStyle/>
+          <a:p>
+            <a:pPr algn="ctr" indent="0" marL="0">
+              <a:buNone/>
+            </a:pPr>
+            <a:r>
+              <a:rPr lang="en-US" sz="700" i="1" dirty="0">
+                <a:solidFill>
+                  <a:srgbClr val="94A3B8"/>
+                </a:solidFill>
+                <a:latin typeface="Calibri" pitchFamily="34" charset="0"/>
+                <a:ea typeface="Calibri" pitchFamily="34" charset="-122"/>
+                <a:cs typeface="Calibri" pitchFamily="34" charset="-120"/>
+              </a:rPr>
+              <a:t>'e' dropped before vowel suffix</a:t>
+            </a:r>
+            <a:endParaRPr lang="en-US" sz="700" dirty="0"/>
+          </a:p>
+        </p:txBody>
+      </p:sp>
+      <p:sp>
+        <p:nvSpPr>
+          <p:cNvPr id="20" name="Shape 18"/>
+          <p:cNvSpPr/>
+          <p:nvPr/>
+        </p:nvSpPr>
+        <p:spPr>
+          <a:xfrm>
+            <a:off x="5803392" y="2258568"/>
             <a:ext cx="1828800" cy="292608"/>
           </a:xfrm>
           <a:prstGeom prst="rect">
@@ -27282,11 +27121,11 @@
             </a:avLst>
           </a:prstGeom>
           <a:solidFill>
-            <a:srgbClr val="FCE7F3"/>
+            <a:srgbClr val="CCFBF1"/>
           </a:solidFill>
           <a:ln w="19050">
             <a:solidFill>
-              <a:srgbClr val="DB2777"/>
+              <a:srgbClr val="0D9488"/>
             </a:solidFill>
             <a:prstDash val="solid"/>
           </a:ln>
@@ -27301,13 +27140,13 @@
       </p:sp>
       <p:sp>
         <p:nvSpPr>
-          <p:cNvPr id="20" name="Text 18"/>
-          <p:cNvSpPr/>
-          <p:nvPr/>
-        </p:nvSpPr>
-        <p:spPr>
-          <a:xfrm>
-            <a:off x="4370832" y="2258568"/>
+          <p:cNvPr id="21" name="Text 19"/>
+          <p:cNvSpPr/>
+          <p:nvPr/>
+        </p:nvSpPr>
+        <p:spPr>
+          <a:xfrm>
+            <a:off x="5803392" y="2258568"/>
             <a:ext cx="1828800" cy="292608"/>
           </a:xfrm>
           <a:prstGeom prst="rect">
@@ -27326,13 +27165,13 @@
             <a:r>
               <a:rPr lang="en-US" sz="1300" b="1" dirty="0">
                 <a:solidFill>
-                  <a:srgbClr val="9D174D"/>
+                  <a:srgbClr val="0F766E"/>
                 </a:solidFill>
                 <a:latin typeface="Trebuchet MS" pitchFamily="34" charset="0"/>
                 <a:ea typeface="Trebuchet MS" pitchFamily="34" charset="-122"/>
                 <a:cs typeface="Trebuchet MS" pitchFamily="34" charset="-120"/>
               </a:rPr>
-              <a:t>t</a:t>
+              <a:t>ist</a:t>
             </a:r>
             <a:endParaRPr lang="en-US" sz="1300" dirty="0"/>
           </a:p>
@@ -27340,13 +27179,13 @@
       </p:sp>
       <p:sp>
         <p:nvSpPr>
-          <p:cNvPr id="21" name="Text 19"/>
-          <p:cNvSpPr/>
-          <p:nvPr/>
-        </p:nvSpPr>
-        <p:spPr>
-          <a:xfrm>
-            <a:off x="4370832" y="2569464"/>
+          <p:cNvPr id="22" name="Text 20"/>
+          <p:cNvSpPr/>
+          <p:nvPr/>
+        </p:nvSpPr>
+        <p:spPr>
+          <a:xfrm>
+            <a:off x="5803392" y="2569464"/>
             <a:ext cx="1828800" cy="201168"/>
           </a:xfrm>
           <a:prstGeom prst="rect">
@@ -27371,7 +27210,7 @@
                 <a:ea typeface="Calibri" pitchFamily="34" charset="-122"/>
                 <a:cs typeface="Calibri" pitchFamily="34" charset="-120"/>
               </a:rPr>
-              <a:t>connecting letter</a:t>
+              <a:t>person who does</a:t>
             </a:r>
             <a:endParaRPr lang="en-US" sz="850" dirty="0"/>
           </a:p>
@@ -27379,87 +27218,542 @@
       </p:sp>
       <p:sp>
         <p:nvSpPr>
-          <p:cNvPr id="22" name="Shape 20"/>
-          <p:cNvSpPr/>
-          <p:nvPr/>
-        </p:nvSpPr>
-        <p:spPr>
-          <a:xfrm>
-            <a:off x="6519672" y="2258568"/>
-            <a:ext cx="1828800" cy="292608"/>
+          <p:cNvPr id="23" name="Shape 21"/>
+          <p:cNvSpPr/>
+          <p:nvPr/>
+        </p:nvSpPr>
+        <p:spPr>
+          <a:xfrm>
+            <a:off x="365760" y="3273552"/>
+            <a:ext cx="1371600" cy="658368"/>
           </a:xfrm>
           <a:prstGeom prst="rect">
             <a:avLst>
-              <a:gd name="adj" fmla="val 25000"/>
+              <a:gd name="adj" fmla="val 8333"/>
             </a:avLst>
           </a:prstGeom>
           <a:solidFill>
-            <a:srgbClr val="CCFBF1"/>
-          </a:solidFill>
-          <a:ln w="19050">
-            <a:solidFill>
-              <a:srgbClr val="0D9488"/>
-            </a:solidFill>
-            <a:prstDash val="solid"/>
-          </a:ln>
-          <a:effectLst>
-            <a:outerShdw sx="100000" sy="100000" kx="0" ky="0" algn="bl" rotWithShape="0" blurRad="101600" dist="38100" dir="8100000">
-              <a:srgbClr val="000000">
-                <a:alpha val="12000"/>
-              </a:srgbClr>
-            </a:outerShdw>
-          </a:effectLst>
-        </p:spPr>
-      </p:sp>
-      <p:sp>
-        <p:nvSpPr>
-          <p:cNvPr id="23" name="Text 21"/>
-          <p:cNvSpPr/>
-          <p:nvPr/>
-        </p:nvSpPr>
-        <p:spPr>
-          <a:xfrm>
-            <a:off x="6519672" y="2258568"/>
-            <a:ext cx="1828800" cy="292608"/>
-          </a:xfrm>
-          <a:prstGeom prst="rect">
-            <a:avLst/>
-          </a:prstGeom>
-          <a:noFill/>
-          <a:ln/>
-        </p:spPr>
-        <p:txBody>
-          <a:bodyPr wrap="square" lIns="0" tIns="0" rIns="0" bIns="0" rtlCol="0" anchor="ctr"/>
-          <a:lstStyle/>
-          <a:p>
-            <a:pPr algn="ctr" indent="0" marL="0">
-              <a:buNone/>
-            </a:pPr>
-            <a:r>
-              <a:rPr lang="en-US" sz="1300" b="1" dirty="0">
-                <a:solidFill>
-                  <a:srgbClr val="0F766E"/>
+            <a:srgbClr val="E2E8F0"/>
+          </a:solidFill>
+          <a:ln w="12700">
+            <a:solidFill>
+              <a:srgbClr val="E2E8F0"/>
+            </a:solidFill>
+            <a:prstDash val="solid"/>
+          </a:ln>
+        </p:spPr>
+      </p:sp>
+      <p:sp>
+        <p:nvSpPr>
+          <p:cNvPr id="24" name="Text 22"/>
+          <p:cNvSpPr/>
+          <p:nvPr/>
+        </p:nvSpPr>
+        <p:spPr>
+          <a:xfrm>
+            <a:off x="365760" y="3273552"/>
+            <a:ext cx="1371600" cy="658368"/>
+          </a:xfrm>
+          <a:prstGeom prst="rect">
+            <a:avLst/>
+          </a:prstGeom>
+          <a:noFill/>
+          <a:ln/>
+        </p:spPr>
+        <p:txBody>
+          <a:bodyPr wrap="square" lIns="0" tIns="0" rIns="0" bIns="0" rtlCol="0" anchor="ctr"/>
+          <a:lstStyle/>
+          <a:p>
+            <a:pPr algn="ctr" indent="0" marL="0">
+              <a:buNone/>
+            </a:pPr>
+            <a:r>
+              <a:rPr lang="en-US" sz="1100" b="1" dirty="0">
+                <a:solidFill>
+                  <a:srgbClr val="475569"/>
                 </a:solidFill>
                 <a:latin typeface="Trebuchet MS" pitchFamily="34" charset="0"/>
                 <a:ea typeface="Trebuchet MS" pitchFamily="34" charset="-122"/>
                 <a:cs typeface="Trebuchet MS" pitchFamily="34" charset="-120"/>
               </a:rPr>
-              <a:t>ist</a:t>
-            </a:r>
-            <a:endParaRPr lang="en-US" sz="1300" dirty="0"/>
-          </a:p>
-        </p:txBody>
-      </p:sp>
-      <p:sp>
-        <p:nvSpPr>
-          <p:cNvPr id="24" name="Text 22"/>
-          <p:cNvSpPr/>
-          <p:nvPr/>
-        </p:nvSpPr>
-        <p:spPr>
-          <a:xfrm>
-            <a:off x="6519672" y="2569464"/>
-            <a:ext cx="1828800" cy="201168"/>
+              <a:t>Syllables</a:t>
+            </a:r>
+            <a:endParaRPr lang="en-US" sz="1100" dirty="0"/>
+          </a:p>
+        </p:txBody>
+      </p:sp>
+      <p:sp>
+        <p:nvSpPr>
+          <p:cNvPr id="25" name="Shape 23"/>
+          <p:cNvSpPr/>
+          <p:nvPr/>
+        </p:nvSpPr>
+        <p:spPr>
+          <a:xfrm>
+            <a:off x="1874520" y="3273552"/>
+            <a:ext cx="6903720" cy="658368"/>
+          </a:xfrm>
+          <a:prstGeom prst="rect">
+            <a:avLst>
+              <a:gd name="adj" fmla="val 8333"/>
+            </a:avLst>
+          </a:prstGeom>
+          <a:solidFill>
+            <a:srgbClr val="CCFBF1"/>
+          </a:solidFill>
+          <a:ln w="12700">
+            <a:solidFill>
+              <a:srgbClr val="0D9488"/>
+            </a:solidFill>
+            <a:prstDash val="solid"/>
+          </a:ln>
+        </p:spPr>
+      </p:sp>
+      <p:sp>
+        <p:nvSpPr>
+          <p:cNvPr id="26" name="Shape 24"/>
+          <p:cNvSpPr/>
+          <p:nvPr/>
+        </p:nvSpPr>
+        <p:spPr>
+          <a:xfrm>
+            <a:off x="2313432" y="3364992"/>
+            <a:ext cx="1645920" cy="475488"/>
+          </a:xfrm>
+          <a:prstGeom prst="rect">
+            <a:avLst>
+              <a:gd name="adj" fmla="val 9615"/>
+            </a:avLst>
+          </a:prstGeom>
+          <a:solidFill>
+            <a:srgbClr val="FFFFFF"/>
+          </a:solidFill>
+          <a:ln w="12700">
+            <a:solidFill>
+              <a:srgbClr val="0D9488"/>
+            </a:solidFill>
+            <a:prstDash val="solid"/>
+          </a:ln>
+        </p:spPr>
+      </p:sp>
+      <p:sp>
+        <p:nvSpPr>
+          <p:cNvPr id="27" name="Text 25"/>
+          <p:cNvSpPr/>
+          <p:nvPr/>
+        </p:nvSpPr>
+        <p:spPr>
+          <a:xfrm>
+            <a:off x="2313432" y="3364992"/>
+            <a:ext cx="1645920" cy="475488"/>
+          </a:xfrm>
+          <a:prstGeom prst="rect">
+            <a:avLst/>
+          </a:prstGeom>
+          <a:noFill/>
+          <a:ln/>
+        </p:spPr>
+        <p:txBody>
+          <a:bodyPr wrap="square" lIns="0" tIns="0" rIns="0" bIns="0" rtlCol="0" anchor="ctr"/>
+          <a:lstStyle/>
+          <a:p>
+            <a:pPr algn="ctr" indent="0" marL="0">
+              <a:buNone/>
+            </a:pPr>
+            <a:r>
+              <a:rPr lang="en-US" sz="1400" b="1" dirty="0">
+                <a:solidFill>
+                  <a:srgbClr val="0D9488"/>
+                </a:solidFill>
+                <a:latin typeface="Trebuchet MS" pitchFamily="34" charset="0"/>
+                <a:ea typeface="Trebuchet MS" pitchFamily="34" charset="-122"/>
+                <a:cs typeface="Trebuchet MS" pitchFamily="34" charset="-120"/>
+              </a:rPr>
+              <a:t>sci</a:t>
+            </a:r>
+            <a:endParaRPr lang="en-US" sz="1400" dirty="0"/>
+          </a:p>
+        </p:txBody>
+      </p:sp>
+      <p:sp>
+        <p:nvSpPr>
+          <p:cNvPr id="28" name="Text 26"/>
+          <p:cNvSpPr/>
+          <p:nvPr/>
+        </p:nvSpPr>
+        <p:spPr>
+          <a:xfrm>
+            <a:off x="3959352" y="3364992"/>
+            <a:ext cx="411480" cy="475488"/>
+          </a:xfrm>
+          <a:prstGeom prst="rect">
+            <a:avLst/>
+          </a:prstGeom>
+          <a:noFill/>
+          <a:ln/>
+        </p:spPr>
+        <p:txBody>
+          <a:bodyPr wrap="square" lIns="0" tIns="0" rIns="0" bIns="0" rtlCol="0" anchor="ctr"/>
+          <a:lstStyle/>
+          <a:p>
+            <a:pPr algn="ctr" indent="0" marL="0">
+              <a:buNone/>
+            </a:pPr>
+            <a:r>
+              <a:rPr lang="en-US" sz="1600" b="1" dirty="0">
+                <a:solidFill>
+                  <a:srgbClr val="0D9488"/>
+                </a:solidFill>
+                <a:latin typeface="Trebuchet MS" pitchFamily="34" charset="0"/>
+                <a:ea typeface="Trebuchet MS" pitchFamily="34" charset="-122"/>
+                <a:cs typeface="Trebuchet MS" pitchFamily="34" charset="-120"/>
+              </a:rPr>
+              <a:t>·</a:t>
+            </a:r>
+            <a:endParaRPr lang="en-US" sz="1600" dirty="0"/>
+          </a:p>
+        </p:txBody>
+      </p:sp>
+      <p:sp>
+        <p:nvSpPr>
+          <p:cNvPr id="29" name="Shape 27"/>
+          <p:cNvSpPr/>
+          <p:nvPr/>
+        </p:nvSpPr>
+        <p:spPr>
+          <a:xfrm>
+            <a:off x="4370832" y="3364992"/>
+            <a:ext cx="1645920" cy="475488"/>
+          </a:xfrm>
+          <a:prstGeom prst="rect">
+            <a:avLst>
+              <a:gd name="adj" fmla="val 9615"/>
+            </a:avLst>
+          </a:prstGeom>
+          <a:solidFill>
+            <a:srgbClr val="FFFFFF"/>
+          </a:solidFill>
+          <a:ln w="12700">
+            <a:solidFill>
+              <a:srgbClr val="0D9488"/>
+            </a:solidFill>
+            <a:prstDash val="solid"/>
+          </a:ln>
+        </p:spPr>
+      </p:sp>
+      <p:sp>
+        <p:nvSpPr>
+          <p:cNvPr id="30" name="Text 28"/>
+          <p:cNvSpPr/>
+          <p:nvPr/>
+        </p:nvSpPr>
+        <p:spPr>
+          <a:xfrm>
+            <a:off x="4370832" y="3364992"/>
+            <a:ext cx="1645920" cy="475488"/>
+          </a:xfrm>
+          <a:prstGeom prst="rect">
+            <a:avLst/>
+          </a:prstGeom>
+          <a:noFill/>
+          <a:ln/>
+        </p:spPr>
+        <p:txBody>
+          <a:bodyPr wrap="square" lIns="0" tIns="0" rIns="0" bIns="0" rtlCol="0" anchor="ctr"/>
+          <a:lstStyle/>
+          <a:p>
+            <a:pPr algn="ctr" indent="0" marL="0">
+              <a:buNone/>
+            </a:pPr>
+            <a:r>
+              <a:rPr lang="en-US" sz="1400" b="1" dirty="0">
+                <a:solidFill>
+                  <a:srgbClr val="0D9488"/>
+                </a:solidFill>
+                <a:latin typeface="Trebuchet MS" pitchFamily="34" charset="0"/>
+                <a:ea typeface="Trebuchet MS" pitchFamily="34" charset="-122"/>
+                <a:cs typeface="Trebuchet MS" pitchFamily="34" charset="-120"/>
+              </a:rPr>
+              <a:t>en</a:t>
+            </a:r>
+            <a:endParaRPr lang="en-US" sz="1400" dirty="0"/>
+          </a:p>
+        </p:txBody>
+      </p:sp>
+      <p:sp>
+        <p:nvSpPr>
+          <p:cNvPr id="31" name="Text 29"/>
+          <p:cNvSpPr/>
+          <p:nvPr/>
+        </p:nvSpPr>
+        <p:spPr>
+          <a:xfrm>
+            <a:off x="6016752" y="3364992"/>
+            <a:ext cx="411480" cy="475488"/>
+          </a:xfrm>
+          <a:prstGeom prst="rect">
+            <a:avLst/>
+          </a:prstGeom>
+          <a:noFill/>
+          <a:ln/>
+        </p:spPr>
+        <p:txBody>
+          <a:bodyPr wrap="square" lIns="0" tIns="0" rIns="0" bIns="0" rtlCol="0" anchor="ctr"/>
+          <a:lstStyle/>
+          <a:p>
+            <a:pPr algn="ctr" indent="0" marL="0">
+              <a:buNone/>
+            </a:pPr>
+            <a:r>
+              <a:rPr lang="en-US" sz="1600" b="1" dirty="0">
+                <a:solidFill>
+                  <a:srgbClr val="0D9488"/>
+                </a:solidFill>
+                <a:latin typeface="Trebuchet MS" pitchFamily="34" charset="0"/>
+                <a:ea typeface="Trebuchet MS" pitchFamily="34" charset="-122"/>
+                <a:cs typeface="Trebuchet MS" pitchFamily="34" charset="-120"/>
+              </a:rPr>
+              <a:t>·</a:t>
+            </a:r>
+            <a:endParaRPr lang="en-US" sz="1600" dirty="0"/>
+          </a:p>
+        </p:txBody>
+      </p:sp>
+      <p:sp>
+        <p:nvSpPr>
+          <p:cNvPr id="32" name="Shape 30"/>
+          <p:cNvSpPr/>
+          <p:nvPr/>
+        </p:nvSpPr>
+        <p:spPr>
+          <a:xfrm>
+            <a:off x="6428232" y="3364992"/>
+            <a:ext cx="1645920" cy="475488"/>
+          </a:xfrm>
+          <a:prstGeom prst="rect">
+            <a:avLst>
+              <a:gd name="adj" fmla="val 9615"/>
+            </a:avLst>
+          </a:prstGeom>
+          <a:solidFill>
+            <a:srgbClr val="FFFFFF"/>
+          </a:solidFill>
+          <a:ln w="12700">
+            <a:solidFill>
+              <a:srgbClr val="0D9488"/>
+            </a:solidFill>
+            <a:prstDash val="solid"/>
+          </a:ln>
+        </p:spPr>
+      </p:sp>
+      <p:sp>
+        <p:nvSpPr>
+          <p:cNvPr id="33" name="Text 31"/>
+          <p:cNvSpPr/>
+          <p:nvPr/>
+        </p:nvSpPr>
+        <p:spPr>
+          <a:xfrm>
+            <a:off x="6428232" y="3364992"/>
+            <a:ext cx="1645920" cy="475488"/>
+          </a:xfrm>
+          <a:prstGeom prst="rect">
+            <a:avLst/>
+          </a:prstGeom>
+          <a:noFill/>
+          <a:ln/>
+        </p:spPr>
+        <p:txBody>
+          <a:bodyPr wrap="square" lIns="0" tIns="0" rIns="0" bIns="0" rtlCol="0" anchor="ctr"/>
+          <a:lstStyle/>
+          <a:p>
+            <a:pPr algn="ctr" indent="0" marL="0">
+              <a:buNone/>
+            </a:pPr>
+            <a:r>
+              <a:rPr lang="en-US" sz="1400" b="1" dirty="0">
+                <a:solidFill>
+                  <a:srgbClr val="0D9488"/>
+                </a:solidFill>
+                <a:latin typeface="Trebuchet MS" pitchFamily="34" charset="0"/>
+                <a:ea typeface="Trebuchet MS" pitchFamily="34" charset="-122"/>
+                <a:cs typeface="Trebuchet MS" pitchFamily="34" charset="-120"/>
+              </a:rPr>
+              <a:t>tist</a:t>
+            </a:r>
+            <a:endParaRPr lang="en-US" sz="1400" dirty="0"/>
+          </a:p>
+        </p:txBody>
+      </p:sp>
+      <p:sp>
+        <p:nvSpPr>
+          <p:cNvPr id="34" name="Shape 32"/>
+          <p:cNvSpPr/>
+          <p:nvPr/>
+        </p:nvSpPr>
+        <p:spPr>
+          <a:xfrm>
+            <a:off x="365760" y="4096512"/>
+            <a:ext cx="1371600" cy="804672"/>
+          </a:xfrm>
+          <a:prstGeom prst="rect">
+            <a:avLst>
+              <a:gd name="adj" fmla="val 6818"/>
+            </a:avLst>
+          </a:prstGeom>
+          <a:solidFill>
+            <a:srgbClr val="E2E8F0"/>
+          </a:solidFill>
+          <a:ln w="12700">
+            <a:solidFill>
+              <a:srgbClr val="E2E8F0"/>
+            </a:solidFill>
+            <a:prstDash val="solid"/>
+          </a:ln>
+        </p:spPr>
+      </p:sp>
+      <p:sp>
+        <p:nvSpPr>
+          <p:cNvPr id="35" name="Text 33"/>
+          <p:cNvSpPr/>
+          <p:nvPr/>
+        </p:nvSpPr>
+        <p:spPr>
+          <a:xfrm>
+            <a:off x="365760" y="4096512"/>
+            <a:ext cx="1371600" cy="804672"/>
+          </a:xfrm>
+          <a:prstGeom prst="rect">
+            <a:avLst/>
+          </a:prstGeom>
+          <a:noFill/>
+          <a:ln/>
+        </p:spPr>
+        <p:txBody>
+          <a:bodyPr wrap="square" lIns="0" tIns="0" rIns="0" bIns="0" rtlCol="0" anchor="ctr"/>
+          <a:lstStyle/>
+          <a:p>
+            <a:pPr algn="ctr" indent="0" marL="0">
+              <a:buNone/>
+            </a:pPr>
+            <a:r>
+              <a:rPr lang="en-US" sz="1100" b="1" dirty="0">
+                <a:solidFill>
+                  <a:srgbClr val="475569"/>
+                </a:solidFill>
+                <a:latin typeface="Trebuchet MS" pitchFamily="34" charset="0"/>
+                <a:ea typeface="Trebuchet MS" pitchFamily="34" charset="-122"/>
+                <a:cs typeface="Trebuchet MS" pitchFamily="34" charset="-120"/>
+              </a:rPr>
+              <a:t>Phonemes</a:t>
+            </a:r>
+            <a:endParaRPr lang="en-US" sz="1100" dirty="0"/>
+          </a:p>
+        </p:txBody>
+      </p:sp>
+      <p:sp>
+        <p:nvSpPr>
+          <p:cNvPr id="36" name="Shape 34"/>
+          <p:cNvSpPr/>
+          <p:nvPr/>
+        </p:nvSpPr>
+        <p:spPr>
+          <a:xfrm>
+            <a:off x="1874520" y="4096512"/>
+            <a:ext cx="6903720" cy="804672"/>
+          </a:xfrm>
+          <a:prstGeom prst="rect">
+            <a:avLst>
+              <a:gd name="adj" fmla="val 6818"/>
+            </a:avLst>
+          </a:prstGeom>
+          <a:solidFill>
+            <a:srgbClr val="FCE7F3"/>
+          </a:solidFill>
+          <a:ln w="12700">
+            <a:solidFill>
+              <a:srgbClr val="DB2777"/>
+            </a:solidFill>
+            <a:prstDash val="solid"/>
+          </a:ln>
+        </p:spPr>
+      </p:sp>
+      <p:sp>
+        <p:nvSpPr>
+          <p:cNvPr id="37" name="Shape 35"/>
+          <p:cNvSpPr/>
+          <p:nvPr/>
+        </p:nvSpPr>
+        <p:spPr>
+          <a:xfrm>
+            <a:off x="2023872" y="4169664"/>
+            <a:ext cx="685800" cy="384048"/>
+          </a:xfrm>
+          <a:prstGeom prst="rect">
+            <a:avLst>
+              <a:gd name="adj" fmla="val 9524"/>
+            </a:avLst>
+          </a:prstGeom>
+          <a:solidFill>
+            <a:srgbClr val="FFFFFF"/>
+          </a:solidFill>
+          <a:ln w="12700">
+            <a:solidFill>
+              <a:srgbClr val="DB2777"/>
+            </a:solidFill>
+            <a:prstDash val="solid"/>
+          </a:ln>
+        </p:spPr>
+      </p:sp>
+      <p:sp>
+        <p:nvSpPr>
+          <p:cNvPr id="38" name="Text 36"/>
+          <p:cNvSpPr/>
+          <p:nvPr/>
+        </p:nvSpPr>
+        <p:spPr>
+          <a:xfrm>
+            <a:off x="2023872" y="4169664"/>
+            <a:ext cx="685800" cy="384048"/>
+          </a:xfrm>
+          <a:prstGeom prst="rect">
+            <a:avLst/>
+          </a:prstGeom>
+          <a:noFill/>
+          <a:ln/>
+        </p:spPr>
+        <p:txBody>
+          <a:bodyPr wrap="square" lIns="0" tIns="0" rIns="0" bIns="0" rtlCol="0" anchor="ctr"/>
+          <a:lstStyle/>
+          <a:p>
+            <a:pPr algn="ctr" indent="0" marL="0">
+              <a:buNone/>
+            </a:pPr>
+            <a:r>
+              <a:rPr lang="en-US" sz="900" b="1" dirty="0">
+                <a:solidFill>
+                  <a:srgbClr val="9D174D"/>
+                </a:solidFill>
+                <a:latin typeface="Trebuchet MS" pitchFamily="34" charset="0"/>
+                <a:ea typeface="Trebuchet MS" pitchFamily="34" charset="-122"/>
+                <a:cs typeface="Trebuchet MS" pitchFamily="34" charset="-120"/>
+              </a:rPr>
+              <a:t>sc</a:t>
+            </a:r>
+            <a:endParaRPr lang="en-US" sz="900" dirty="0"/>
+          </a:p>
+        </p:txBody>
+      </p:sp>
+      <p:sp>
+        <p:nvSpPr>
+          <p:cNvPr id="39" name="Text 37"/>
+          <p:cNvSpPr/>
+          <p:nvPr/>
+        </p:nvSpPr>
+        <p:spPr>
+          <a:xfrm>
+            <a:off x="2023872" y="4572000"/>
+            <a:ext cx="685800" cy="219456"/>
           </a:xfrm>
           <a:prstGeom prst="rect">
             <a:avLst/>
@@ -27475,232 +27769,232 @@
               <a:buNone/>
             </a:pPr>
             <a:r>
-              <a:rPr lang="en-US" sz="850" dirty="0">
-                <a:solidFill>
-                  <a:srgbClr val="475569"/>
+              <a:rPr lang="en-US" sz="750" i="1" dirty="0">
+                <a:solidFill>
+                  <a:srgbClr val="94A3B8"/>
                 </a:solidFill>
                 <a:latin typeface="Calibri" pitchFamily="34" charset="0"/>
                 <a:ea typeface="Calibri" pitchFamily="34" charset="-122"/>
                 <a:cs typeface="Calibri" pitchFamily="34" charset="-120"/>
               </a:rPr>
-              <a:t>person who does or believes</a:t>
-            </a:r>
-            <a:endParaRPr lang="en-US" sz="850" dirty="0"/>
-          </a:p>
-        </p:txBody>
-      </p:sp>
-      <p:sp>
-        <p:nvSpPr>
-          <p:cNvPr id="25" name="Shape 23"/>
-          <p:cNvSpPr/>
-          <p:nvPr/>
-        </p:nvSpPr>
-        <p:spPr>
-          <a:xfrm>
-            <a:off x="365760" y="3273552"/>
-            <a:ext cx="1371600" cy="658368"/>
+              <a:t>/s/</a:t>
+            </a:r>
+            <a:endParaRPr lang="en-US" sz="750" dirty="0"/>
+          </a:p>
+        </p:txBody>
+      </p:sp>
+      <p:sp>
+        <p:nvSpPr>
+          <p:cNvPr id="40" name="Shape 38"/>
+          <p:cNvSpPr/>
+          <p:nvPr/>
+        </p:nvSpPr>
+        <p:spPr>
+          <a:xfrm>
+            <a:off x="2831592" y="4169664"/>
+            <a:ext cx="685800" cy="384048"/>
           </a:xfrm>
           <a:prstGeom prst="rect">
             <a:avLst>
-              <a:gd name="adj" fmla="val 8333"/>
+              <a:gd name="adj" fmla="val 9524"/>
             </a:avLst>
           </a:prstGeom>
           <a:solidFill>
-            <a:srgbClr val="E2E8F0"/>
-          </a:solidFill>
-          <a:ln w="12700">
-            <a:solidFill>
-              <a:srgbClr val="E2E8F0"/>
-            </a:solidFill>
-            <a:prstDash val="solid"/>
-          </a:ln>
-        </p:spPr>
-      </p:sp>
-      <p:sp>
-        <p:nvSpPr>
-          <p:cNvPr id="26" name="Text 24"/>
-          <p:cNvSpPr/>
-          <p:nvPr/>
-        </p:nvSpPr>
-        <p:spPr>
-          <a:xfrm>
-            <a:off x="365760" y="3273552"/>
-            <a:ext cx="1371600" cy="658368"/>
-          </a:xfrm>
-          <a:prstGeom prst="rect">
-            <a:avLst/>
-          </a:prstGeom>
-          <a:noFill/>
-          <a:ln/>
-        </p:spPr>
-        <p:txBody>
-          <a:bodyPr wrap="square" lIns="0" tIns="0" rIns="0" bIns="0" rtlCol="0" anchor="ctr"/>
-          <a:lstStyle/>
-          <a:p>
-            <a:pPr algn="ctr" indent="0" marL="0">
-              <a:buNone/>
-            </a:pPr>
-            <a:r>
-              <a:rPr lang="en-US" sz="1100" b="1" dirty="0">
-                <a:solidFill>
-                  <a:srgbClr val="475569"/>
+            <a:srgbClr val="FFFFFF"/>
+          </a:solidFill>
+          <a:ln w="12700">
+            <a:solidFill>
+              <a:srgbClr val="DB2777"/>
+            </a:solidFill>
+            <a:prstDash val="solid"/>
+          </a:ln>
+        </p:spPr>
+      </p:sp>
+      <p:sp>
+        <p:nvSpPr>
+          <p:cNvPr id="41" name="Text 39"/>
+          <p:cNvSpPr/>
+          <p:nvPr/>
+        </p:nvSpPr>
+        <p:spPr>
+          <a:xfrm>
+            <a:off x="2831592" y="4169664"/>
+            <a:ext cx="685800" cy="384048"/>
+          </a:xfrm>
+          <a:prstGeom prst="rect">
+            <a:avLst/>
+          </a:prstGeom>
+          <a:noFill/>
+          <a:ln/>
+        </p:spPr>
+        <p:txBody>
+          <a:bodyPr wrap="square" lIns="0" tIns="0" rIns="0" bIns="0" rtlCol="0" anchor="ctr"/>
+          <a:lstStyle/>
+          <a:p>
+            <a:pPr algn="ctr" indent="0" marL="0">
+              <a:buNone/>
+            </a:pPr>
+            <a:r>
+              <a:rPr lang="en-US" sz="900" b="1" dirty="0">
+                <a:solidFill>
+                  <a:srgbClr val="9D174D"/>
                 </a:solidFill>
                 <a:latin typeface="Trebuchet MS" pitchFamily="34" charset="0"/>
                 <a:ea typeface="Trebuchet MS" pitchFamily="34" charset="-122"/>
                 <a:cs typeface="Trebuchet MS" pitchFamily="34" charset="-120"/>
               </a:rPr>
-              <a:t>Syllables</a:t>
-            </a:r>
-            <a:endParaRPr lang="en-US" sz="1100" dirty="0"/>
-          </a:p>
-        </p:txBody>
-      </p:sp>
-      <p:sp>
-        <p:nvSpPr>
-          <p:cNvPr id="27" name="Shape 25"/>
-          <p:cNvSpPr/>
-          <p:nvPr/>
-        </p:nvSpPr>
-        <p:spPr>
-          <a:xfrm>
-            <a:off x="1874520" y="3273552"/>
-            <a:ext cx="6903720" cy="658368"/>
+              <a:t>i</a:t>
+            </a:r>
+            <a:endParaRPr lang="en-US" sz="900" dirty="0"/>
+          </a:p>
+        </p:txBody>
+      </p:sp>
+      <p:sp>
+        <p:nvSpPr>
+          <p:cNvPr id="42" name="Shape 40"/>
+          <p:cNvSpPr/>
+          <p:nvPr/>
+        </p:nvSpPr>
+        <p:spPr>
+          <a:xfrm>
+            <a:off x="3639312" y="4169664"/>
+            <a:ext cx="685800" cy="384048"/>
           </a:xfrm>
           <a:prstGeom prst="rect">
             <a:avLst>
-              <a:gd name="adj" fmla="val 8333"/>
+              <a:gd name="adj" fmla="val 9524"/>
             </a:avLst>
           </a:prstGeom>
           <a:solidFill>
-            <a:srgbClr val="CCFBF1"/>
-          </a:solidFill>
-          <a:ln w="12700">
-            <a:solidFill>
-              <a:srgbClr val="0D9488"/>
-            </a:solidFill>
-            <a:prstDash val="solid"/>
-          </a:ln>
-        </p:spPr>
-      </p:sp>
-      <p:sp>
-        <p:nvSpPr>
-          <p:cNvPr id="28" name="Shape 26"/>
-          <p:cNvSpPr/>
-          <p:nvPr/>
-        </p:nvSpPr>
-        <p:spPr>
-          <a:xfrm>
-            <a:off x="2313432" y="3364992"/>
-            <a:ext cx="1645920" cy="475488"/>
-          </a:xfrm>
-          <a:prstGeom prst="rect">
-            <a:avLst>
-              <a:gd name="adj" fmla="val 9615"/>
-            </a:avLst>
-          </a:prstGeom>
-          <a:solidFill>
             <a:srgbClr val="FFFFFF"/>
           </a:solidFill>
           <a:ln w="12700">
             <a:solidFill>
-              <a:srgbClr val="0D9488"/>
-            </a:solidFill>
-            <a:prstDash val="solid"/>
-          </a:ln>
-        </p:spPr>
-      </p:sp>
-      <p:sp>
-        <p:nvSpPr>
-          <p:cNvPr id="29" name="Text 27"/>
-          <p:cNvSpPr/>
-          <p:nvPr/>
-        </p:nvSpPr>
-        <p:spPr>
-          <a:xfrm>
-            <a:off x="2313432" y="3364992"/>
-            <a:ext cx="1645920" cy="475488"/>
-          </a:xfrm>
-          <a:prstGeom prst="rect">
-            <a:avLst/>
-          </a:prstGeom>
-          <a:noFill/>
-          <a:ln/>
-        </p:spPr>
-        <p:txBody>
-          <a:bodyPr wrap="square" lIns="0" tIns="0" rIns="0" bIns="0" rtlCol="0" anchor="ctr"/>
-          <a:lstStyle/>
-          <a:p>
-            <a:pPr algn="ctr" indent="0" marL="0">
-              <a:buNone/>
-            </a:pPr>
-            <a:r>
-              <a:rPr lang="en-US" sz="1400" b="1" dirty="0">
-                <a:solidFill>
-                  <a:srgbClr val="0D9488"/>
+              <a:srgbClr val="DB2777"/>
+            </a:solidFill>
+            <a:prstDash val="solid"/>
+          </a:ln>
+        </p:spPr>
+      </p:sp>
+      <p:sp>
+        <p:nvSpPr>
+          <p:cNvPr id="43" name="Text 41"/>
+          <p:cNvSpPr/>
+          <p:nvPr/>
+        </p:nvSpPr>
+        <p:spPr>
+          <a:xfrm>
+            <a:off x="3639312" y="4169664"/>
+            <a:ext cx="685800" cy="384048"/>
+          </a:xfrm>
+          <a:prstGeom prst="rect">
+            <a:avLst/>
+          </a:prstGeom>
+          <a:noFill/>
+          <a:ln/>
+        </p:spPr>
+        <p:txBody>
+          <a:bodyPr wrap="square" lIns="0" tIns="0" rIns="0" bIns="0" rtlCol="0" anchor="ctr"/>
+          <a:lstStyle/>
+          <a:p>
+            <a:pPr algn="ctr" indent="0" marL="0">
+              <a:buNone/>
+            </a:pPr>
+            <a:r>
+              <a:rPr lang="en-US" sz="900" b="1" dirty="0">
+                <a:solidFill>
+                  <a:srgbClr val="9D174D"/>
                 </a:solidFill>
                 <a:latin typeface="Trebuchet MS" pitchFamily="34" charset="0"/>
                 <a:ea typeface="Trebuchet MS" pitchFamily="34" charset="-122"/>
                 <a:cs typeface="Trebuchet MS" pitchFamily="34" charset="-120"/>
               </a:rPr>
-              <a:t>sci</a:t>
-            </a:r>
-            <a:endParaRPr lang="en-US" sz="1400" dirty="0"/>
-          </a:p>
-        </p:txBody>
-      </p:sp>
-      <p:sp>
-        <p:nvSpPr>
-          <p:cNvPr id="30" name="Text 28"/>
-          <p:cNvSpPr/>
-          <p:nvPr/>
-        </p:nvSpPr>
-        <p:spPr>
-          <a:xfrm>
-            <a:off x="3959352" y="3364992"/>
-            <a:ext cx="411480" cy="475488"/>
-          </a:xfrm>
-          <a:prstGeom prst="rect">
-            <a:avLst/>
-          </a:prstGeom>
-          <a:noFill/>
-          <a:ln/>
-        </p:spPr>
-        <p:txBody>
-          <a:bodyPr wrap="square" lIns="0" tIns="0" rIns="0" bIns="0" rtlCol="0" anchor="ctr"/>
-          <a:lstStyle/>
-          <a:p>
-            <a:pPr algn="ctr" indent="0" marL="0">
-              <a:buNone/>
-            </a:pPr>
-            <a:r>
-              <a:rPr lang="en-US" sz="1600" b="1" dirty="0">
-                <a:solidFill>
-                  <a:srgbClr val="0D9488"/>
+              <a:t>e</a:t>
+            </a:r>
+            <a:endParaRPr lang="en-US" sz="900" dirty="0"/>
+          </a:p>
+        </p:txBody>
+      </p:sp>
+      <p:sp>
+        <p:nvSpPr>
+          <p:cNvPr id="44" name="Shape 42"/>
+          <p:cNvSpPr/>
+          <p:nvPr/>
+        </p:nvSpPr>
+        <p:spPr>
+          <a:xfrm>
+            <a:off x="4447032" y="4169664"/>
+            <a:ext cx="685800" cy="384048"/>
+          </a:xfrm>
+          <a:prstGeom prst="rect">
+            <a:avLst>
+              <a:gd name="adj" fmla="val 9524"/>
+            </a:avLst>
+          </a:prstGeom>
+          <a:solidFill>
+            <a:srgbClr val="FFFFFF"/>
+          </a:solidFill>
+          <a:ln w="12700">
+            <a:solidFill>
+              <a:srgbClr val="DB2777"/>
+            </a:solidFill>
+            <a:prstDash val="solid"/>
+          </a:ln>
+        </p:spPr>
+      </p:sp>
+      <p:sp>
+        <p:nvSpPr>
+          <p:cNvPr id="45" name="Text 43"/>
+          <p:cNvSpPr/>
+          <p:nvPr/>
+        </p:nvSpPr>
+        <p:spPr>
+          <a:xfrm>
+            <a:off x="4447032" y="4169664"/>
+            <a:ext cx="685800" cy="384048"/>
+          </a:xfrm>
+          <a:prstGeom prst="rect">
+            <a:avLst/>
+          </a:prstGeom>
+          <a:noFill/>
+          <a:ln/>
+        </p:spPr>
+        <p:txBody>
+          <a:bodyPr wrap="square" lIns="0" tIns="0" rIns="0" bIns="0" rtlCol="0" anchor="ctr"/>
+          <a:lstStyle/>
+          <a:p>
+            <a:pPr algn="ctr" indent="0" marL="0">
+              <a:buNone/>
+            </a:pPr>
+            <a:r>
+              <a:rPr lang="en-US" sz="900" b="1" dirty="0">
+                <a:solidFill>
+                  <a:srgbClr val="9D174D"/>
                 </a:solidFill>
                 <a:latin typeface="Trebuchet MS" pitchFamily="34" charset="0"/>
                 <a:ea typeface="Trebuchet MS" pitchFamily="34" charset="-122"/>
                 <a:cs typeface="Trebuchet MS" pitchFamily="34" charset="-120"/>
               </a:rPr>
-              <a:t>·</a:t>
-            </a:r>
-            <a:endParaRPr lang="en-US" sz="1600" dirty="0"/>
-          </a:p>
-        </p:txBody>
-      </p:sp>
-      <p:sp>
-        <p:nvSpPr>
-          <p:cNvPr id="31" name="Shape 29"/>
-          <p:cNvSpPr/>
-          <p:nvPr/>
-        </p:nvSpPr>
-        <p:spPr>
-          <a:xfrm>
-            <a:off x="4370832" y="3364992"/>
-            <a:ext cx="1645920" cy="475488"/>
+              <a:t>n</a:t>
+            </a:r>
+            <a:endParaRPr lang="en-US" sz="900" dirty="0"/>
+          </a:p>
+        </p:txBody>
+      </p:sp>
+      <p:sp>
+        <p:nvSpPr>
+          <p:cNvPr id="46" name="Shape 44"/>
+          <p:cNvSpPr/>
+          <p:nvPr/>
+        </p:nvSpPr>
+        <p:spPr>
+          <a:xfrm>
+            <a:off x="5254752" y="4169664"/>
+            <a:ext cx="685800" cy="384048"/>
           </a:xfrm>
           <a:prstGeom prst="rect">
             <a:avLst>
-              <a:gd name="adj" fmla="val 9615"/>
+              <a:gd name="adj" fmla="val 9524"/>
             </a:avLst>
           </a:prstGeom>
           <a:solidFill>
@@ -27708,104 +28002,131 @@
           </a:solidFill>
           <a:ln w="12700">
             <a:solidFill>
-              <a:srgbClr val="0D9488"/>
-            </a:solidFill>
-            <a:prstDash val="solid"/>
-          </a:ln>
-        </p:spPr>
-      </p:sp>
-      <p:sp>
-        <p:nvSpPr>
-          <p:cNvPr id="32" name="Text 30"/>
-          <p:cNvSpPr/>
-          <p:nvPr/>
-        </p:nvSpPr>
-        <p:spPr>
-          <a:xfrm>
-            <a:off x="4370832" y="3364992"/>
-            <a:ext cx="1645920" cy="475488"/>
-          </a:xfrm>
-          <a:prstGeom prst="rect">
-            <a:avLst/>
-          </a:prstGeom>
-          <a:noFill/>
-          <a:ln/>
-        </p:spPr>
-        <p:txBody>
-          <a:bodyPr wrap="square" lIns="0" tIns="0" rIns="0" bIns="0" rtlCol="0" anchor="ctr"/>
-          <a:lstStyle/>
-          <a:p>
-            <a:pPr algn="ctr" indent="0" marL="0">
-              <a:buNone/>
-            </a:pPr>
-            <a:r>
-              <a:rPr lang="en-US" sz="1400" b="1" dirty="0">
-                <a:solidFill>
-                  <a:srgbClr val="0D9488"/>
+              <a:srgbClr val="DB2777"/>
+            </a:solidFill>
+            <a:prstDash val="solid"/>
+          </a:ln>
+        </p:spPr>
+      </p:sp>
+      <p:sp>
+        <p:nvSpPr>
+          <p:cNvPr id="47" name="Text 45"/>
+          <p:cNvSpPr/>
+          <p:nvPr/>
+        </p:nvSpPr>
+        <p:spPr>
+          <a:xfrm>
+            <a:off x="5254752" y="4169664"/>
+            <a:ext cx="685800" cy="384048"/>
+          </a:xfrm>
+          <a:prstGeom prst="rect">
+            <a:avLst/>
+          </a:prstGeom>
+          <a:noFill/>
+          <a:ln/>
+        </p:spPr>
+        <p:txBody>
+          <a:bodyPr wrap="square" lIns="0" tIns="0" rIns="0" bIns="0" rtlCol="0" anchor="ctr"/>
+          <a:lstStyle/>
+          <a:p>
+            <a:pPr algn="ctr" indent="0" marL="0">
+              <a:buNone/>
+            </a:pPr>
+            <a:r>
+              <a:rPr lang="en-US" sz="900" b="1" dirty="0">
+                <a:solidFill>
+                  <a:srgbClr val="9D174D"/>
                 </a:solidFill>
                 <a:latin typeface="Trebuchet MS" pitchFamily="34" charset="0"/>
                 <a:ea typeface="Trebuchet MS" pitchFamily="34" charset="-122"/>
                 <a:cs typeface="Trebuchet MS" pitchFamily="34" charset="-120"/>
               </a:rPr>
-              <a:t>en</a:t>
-            </a:r>
-            <a:endParaRPr lang="en-US" sz="1400" dirty="0"/>
-          </a:p>
-        </p:txBody>
-      </p:sp>
-      <p:sp>
-        <p:nvSpPr>
-          <p:cNvPr id="33" name="Text 31"/>
-          <p:cNvSpPr/>
-          <p:nvPr/>
-        </p:nvSpPr>
-        <p:spPr>
-          <a:xfrm>
-            <a:off x="6016752" y="3364992"/>
-            <a:ext cx="411480" cy="475488"/>
-          </a:xfrm>
-          <a:prstGeom prst="rect">
-            <a:avLst/>
-          </a:prstGeom>
-          <a:noFill/>
-          <a:ln/>
-        </p:spPr>
-        <p:txBody>
-          <a:bodyPr wrap="square" lIns="0" tIns="0" rIns="0" bIns="0" rtlCol="0" anchor="ctr"/>
-          <a:lstStyle/>
-          <a:p>
-            <a:pPr algn="ctr" indent="0" marL="0">
-              <a:buNone/>
-            </a:pPr>
-            <a:r>
-              <a:rPr lang="en-US" sz="1600" b="1" dirty="0">
-                <a:solidFill>
-                  <a:srgbClr val="0D9488"/>
+              <a:t>t</a:t>
+            </a:r>
+            <a:endParaRPr lang="en-US" sz="900" dirty="0"/>
+          </a:p>
+        </p:txBody>
+      </p:sp>
+      <p:sp>
+        <p:nvSpPr>
+          <p:cNvPr id="48" name="Shape 46"/>
+          <p:cNvSpPr/>
+          <p:nvPr/>
+        </p:nvSpPr>
+        <p:spPr>
+          <a:xfrm>
+            <a:off x="6062472" y="4169664"/>
+            <a:ext cx="685800" cy="384048"/>
+          </a:xfrm>
+          <a:prstGeom prst="rect">
+            <a:avLst>
+              <a:gd name="adj" fmla="val 9524"/>
+            </a:avLst>
+          </a:prstGeom>
+          <a:solidFill>
+            <a:srgbClr val="FFFFFF"/>
+          </a:solidFill>
+          <a:ln w="12700">
+            <a:solidFill>
+              <a:srgbClr val="DB2777"/>
+            </a:solidFill>
+            <a:prstDash val="solid"/>
+          </a:ln>
+        </p:spPr>
+      </p:sp>
+      <p:sp>
+        <p:nvSpPr>
+          <p:cNvPr id="49" name="Text 47"/>
+          <p:cNvSpPr/>
+          <p:nvPr/>
+        </p:nvSpPr>
+        <p:spPr>
+          <a:xfrm>
+            <a:off x="6062472" y="4169664"/>
+            <a:ext cx="685800" cy="384048"/>
+          </a:xfrm>
+          <a:prstGeom prst="rect">
+            <a:avLst/>
+          </a:prstGeom>
+          <a:noFill/>
+          <a:ln/>
+        </p:spPr>
+        <p:txBody>
+          <a:bodyPr wrap="square" lIns="0" tIns="0" rIns="0" bIns="0" rtlCol="0" anchor="ctr"/>
+          <a:lstStyle/>
+          <a:p>
+            <a:pPr algn="ctr" indent="0" marL="0">
+              <a:buNone/>
+            </a:pPr>
+            <a:r>
+              <a:rPr lang="en-US" sz="900" b="1" dirty="0">
+                <a:solidFill>
+                  <a:srgbClr val="9D174D"/>
                 </a:solidFill>
                 <a:latin typeface="Trebuchet MS" pitchFamily="34" charset="0"/>
                 <a:ea typeface="Trebuchet MS" pitchFamily="34" charset="-122"/>
                 <a:cs typeface="Trebuchet MS" pitchFamily="34" charset="-120"/>
               </a:rPr>
-              <a:t>·</a:t>
-            </a:r>
-            <a:endParaRPr lang="en-US" sz="1600" dirty="0"/>
-          </a:p>
-        </p:txBody>
-      </p:sp>
-      <p:sp>
-        <p:nvSpPr>
-          <p:cNvPr id="34" name="Shape 32"/>
-          <p:cNvSpPr/>
-          <p:nvPr/>
-        </p:nvSpPr>
-        <p:spPr>
-          <a:xfrm>
-            <a:off x="6428232" y="3364992"/>
-            <a:ext cx="1645920" cy="475488"/>
+              <a:t>i</a:t>
+            </a:r>
+            <a:endParaRPr lang="en-US" sz="900" dirty="0"/>
+          </a:p>
+        </p:txBody>
+      </p:sp>
+      <p:sp>
+        <p:nvSpPr>
+          <p:cNvPr id="50" name="Shape 48"/>
+          <p:cNvSpPr/>
+          <p:nvPr/>
+        </p:nvSpPr>
+        <p:spPr>
+          <a:xfrm>
+            <a:off x="6870192" y="4169664"/>
+            <a:ext cx="685800" cy="384048"/>
           </a:xfrm>
           <a:prstGeom prst="rect">
             <a:avLst>
-              <a:gd name="adj" fmla="val 9615"/>
+              <a:gd name="adj" fmla="val 9524"/>
             </a:avLst>
           </a:prstGeom>
           <a:solidFill>
@@ -27813,153 +28134,60 @@
           </a:solidFill>
           <a:ln w="12700">
             <a:solidFill>
-              <a:srgbClr val="0D9488"/>
-            </a:solidFill>
-            <a:prstDash val="solid"/>
-          </a:ln>
-        </p:spPr>
-      </p:sp>
-      <p:sp>
-        <p:nvSpPr>
-          <p:cNvPr id="35" name="Text 33"/>
-          <p:cNvSpPr/>
-          <p:nvPr/>
-        </p:nvSpPr>
-        <p:spPr>
-          <a:xfrm>
-            <a:off x="6428232" y="3364992"/>
-            <a:ext cx="1645920" cy="475488"/>
-          </a:xfrm>
-          <a:prstGeom prst="rect">
-            <a:avLst/>
-          </a:prstGeom>
-          <a:noFill/>
-          <a:ln/>
-        </p:spPr>
-        <p:txBody>
-          <a:bodyPr wrap="square" lIns="0" tIns="0" rIns="0" bIns="0" rtlCol="0" anchor="ctr"/>
-          <a:lstStyle/>
-          <a:p>
-            <a:pPr algn="ctr" indent="0" marL="0">
-              <a:buNone/>
-            </a:pPr>
-            <a:r>
-              <a:rPr lang="en-US" sz="1400" b="1" dirty="0">
-                <a:solidFill>
-                  <a:srgbClr val="0D9488"/>
+              <a:srgbClr val="DB2777"/>
+            </a:solidFill>
+            <a:prstDash val="solid"/>
+          </a:ln>
+        </p:spPr>
+      </p:sp>
+      <p:sp>
+        <p:nvSpPr>
+          <p:cNvPr id="51" name="Text 49"/>
+          <p:cNvSpPr/>
+          <p:nvPr/>
+        </p:nvSpPr>
+        <p:spPr>
+          <a:xfrm>
+            <a:off x="6870192" y="4169664"/>
+            <a:ext cx="685800" cy="384048"/>
+          </a:xfrm>
+          <a:prstGeom prst="rect">
+            <a:avLst/>
+          </a:prstGeom>
+          <a:noFill/>
+          <a:ln/>
+        </p:spPr>
+        <p:txBody>
+          <a:bodyPr wrap="square" lIns="0" tIns="0" rIns="0" bIns="0" rtlCol="0" anchor="ctr"/>
+          <a:lstStyle/>
+          <a:p>
+            <a:pPr algn="ctr" indent="0" marL="0">
+              <a:buNone/>
+            </a:pPr>
+            <a:r>
+              <a:rPr lang="en-US" sz="900" b="1" dirty="0">
+                <a:solidFill>
+                  <a:srgbClr val="9D174D"/>
                 </a:solidFill>
                 <a:latin typeface="Trebuchet MS" pitchFamily="34" charset="0"/>
                 <a:ea typeface="Trebuchet MS" pitchFamily="34" charset="-122"/>
                 <a:cs typeface="Trebuchet MS" pitchFamily="34" charset="-120"/>
               </a:rPr>
-              <a:t>tist</a:t>
-            </a:r>
-            <a:endParaRPr lang="en-US" sz="1400" dirty="0"/>
-          </a:p>
-        </p:txBody>
-      </p:sp>
-      <p:sp>
-        <p:nvSpPr>
-          <p:cNvPr id="36" name="Shape 34"/>
-          <p:cNvSpPr/>
-          <p:nvPr/>
-        </p:nvSpPr>
-        <p:spPr>
-          <a:xfrm>
-            <a:off x="365760" y="4096512"/>
-            <a:ext cx="1371600" cy="804672"/>
-          </a:xfrm>
-          <a:prstGeom prst="rect">
-            <a:avLst>
-              <a:gd name="adj" fmla="val 6818"/>
-            </a:avLst>
-          </a:prstGeom>
-          <a:solidFill>
-            <a:srgbClr val="E2E8F0"/>
-          </a:solidFill>
-          <a:ln w="12700">
-            <a:solidFill>
-              <a:srgbClr val="E2E8F0"/>
-            </a:solidFill>
-            <a:prstDash val="solid"/>
-          </a:ln>
-        </p:spPr>
-      </p:sp>
-      <p:sp>
-        <p:nvSpPr>
-          <p:cNvPr id="37" name="Text 35"/>
-          <p:cNvSpPr/>
-          <p:nvPr/>
-        </p:nvSpPr>
-        <p:spPr>
-          <a:xfrm>
-            <a:off x="365760" y="4096512"/>
-            <a:ext cx="1371600" cy="804672"/>
-          </a:xfrm>
-          <a:prstGeom prst="rect">
-            <a:avLst/>
-          </a:prstGeom>
-          <a:noFill/>
-          <a:ln/>
-        </p:spPr>
-        <p:txBody>
-          <a:bodyPr wrap="square" lIns="0" tIns="0" rIns="0" bIns="0" rtlCol="0" anchor="ctr"/>
-          <a:lstStyle/>
-          <a:p>
-            <a:pPr algn="ctr" indent="0" marL="0">
-              <a:buNone/>
-            </a:pPr>
-            <a:r>
-              <a:rPr lang="en-US" sz="1100" b="1" dirty="0">
-                <a:solidFill>
-                  <a:srgbClr val="475569"/>
-                </a:solidFill>
-                <a:latin typeface="Trebuchet MS" pitchFamily="34" charset="0"/>
-                <a:ea typeface="Trebuchet MS" pitchFamily="34" charset="-122"/>
-                <a:cs typeface="Trebuchet MS" pitchFamily="34" charset="-120"/>
-              </a:rPr>
-              <a:t>Phonemes</a:t>
-            </a:r>
-            <a:endParaRPr lang="en-US" sz="1100" dirty="0"/>
-          </a:p>
-        </p:txBody>
-      </p:sp>
-      <p:sp>
-        <p:nvSpPr>
-          <p:cNvPr id="38" name="Shape 36"/>
-          <p:cNvSpPr/>
-          <p:nvPr/>
-        </p:nvSpPr>
-        <p:spPr>
-          <a:xfrm>
-            <a:off x="1874520" y="4096512"/>
-            <a:ext cx="6903720" cy="804672"/>
-          </a:xfrm>
-          <a:prstGeom prst="rect">
-            <a:avLst>
-              <a:gd name="adj" fmla="val 6818"/>
-            </a:avLst>
-          </a:prstGeom>
-          <a:solidFill>
-            <a:srgbClr val="FCE7F3"/>
-          </a:solidFill>
-          <a:ln w="12700">
-            <a:solidFill>
-              <a:srgbClr val="DB2777"/>
-            </a:solidFill>
-            <a:prstDash val="solid"/>
-          </a:ln>
-        </p:spPr>
-      </p:sp>
-      <p:sp>
-        <p:nvSpPr>
-          <p:cNvPr id="39" name="Shape 37"/>
-          <p:cNvSpPr/>
-          <p:nvPr/>
-        </p:nvSpPr>
-        <p:spPr>
-          <a:xfrm>
-            <a:off x="2023872" y="4169664"/>
+              <a:t>s</a:t>
+            </a:r>
+            <a:endParaRPr lang="en-US" sz="900" dirty="0"/>
+          </a:p>
+        </p:txBody>
+      </p:sp>
+      <p:sp>
+        <p:nvSpPr>
+          <p:cNvPr id="52" name="Shape 50"/>
+          <p:cNvSpPr/>
+          <p:nvPr/>
+        </p:nvSpPr>
+        <p:spPr>
+          <a:xfrm>
+            <a:off x="7677912" y="4169664"/>
             <a:ext cx="685800" cy="384048"/>
           </a:xfrm>
           <a:prstGeom prst="rect">
@@ -27980,508 +28208,7 @@
       </p:sp>
       <p:sp>
         <p:nvSpPr>
-          <p:cNvPr id="40" name="Text 38"/>
-          <p:cNvSpPr/>
-          <p:nvPr/>
-        </p:nvSpPr>
-        <p:spPr>
-          <a:xfrm>
-            <a:off x="2023872" y="4169664"/>
-            <a:ext cx="685800" cy="384048"/>
-          </a:xfrm>
-          <a:prstGeom prst="rect">
-            <a:avLst/>
-          </a:prstGeom>
-          <a:noFill/>
-          <a:ln/>
-        </p:spPr>
-        <p:txBody>
-          <a:bodyPr wrap="square" lIns="0" tIns="0" rIns="0" bIns="0" rtlCol="0" anchor="ctr"/>
-          <a:lstStyle/>
-          <a:p>
-            <a:pPr algn="ctr" indent="0" marL="0">
-              <a:buNone/>
-            </a:pPr>
-            <a:r>
-              <a:rPr lang="en-US" sz="900" b="1" dirty="0">
-                <a:solidFill>
-                  <a:srgbClr val="9D174D"/>
-                </a:solidFill>
-                <a:latin typeface="Trebuchet MS" pitchFamily="34" charset="0"/>
-                <a:ea typeface="Trebuchet MS" pitchFamily="34" charset="-122"/>
-                <a:cs typeface="Trebuchet MS" pitchFamily="34" charset="-120"/>
-              </a:rPr>
-              <a:t>sc</a:t>
-            </a:r>
-            <a:endParaRPr lang="en-US" sz="900" dirty="0"/>
-          </a:p>
-        </p:txBody>
-      </p:sp>
-      <p:sp>
-        <p:nvSpPr>
-          <p:cNvPr id="41" name="Text 39"/>
-          <p:cNvSpPr/>
-          <p:nvPr/>
-        </p:nvSpPr>
-        <p:spPr>
-          <a:xfrm>
-            <a:off x="2023872" y="4572000"/>
-            <a:ext cx="685800" cy="219456"/>
-          </a:xfrm>
-          <a:prstGeom prst="rect">
-            <a:avLst/>
-          </a:prstGeom>
-          <a:noFill/>
-          <a:ln/>
-        </p:spPr>
-        <p:txBody>
-          <a:bodyPr wrap="square" lIns="0" tIns="0" rIns="0" bIns="0" rtlCol="0" anchor="t"/>
-          <a:lstStyle/>
-          <a:p>
-            <a:pPr algn="ctr" indent="0" marL="0">
-              <a:buNone/>
-            </a:pPr>
-            <a:r>
-              <a:rPr lang="en-US" sz="750" i="1" dirty="0">
-                <a:solidFill>
-                  <a:srgbClr val="94A3B8"/>
-                </a:solidFill>
-                <a:latin typeface="Calibri" pitchFamily="34" charset="0"/>
-                <a:ea typeface="Calibri" pitchFamily="34" charset="-122"/>
-                <a:cs typeface="Calibri" pitchFamily="34" charset="-120"/>
-              </a:rPr>
-              <a:t>/s/</a:t>
-            </a:r>
-            <a:endParaRPr lang="en-US" sz="750" dirty="0"/>
-          </a:p>
-        </p:txBody>
-      </p:sp>
-      <p:sp>
-        <p:nvSpPr>
-          <p:cNvPr id="42" name="Shape 40"/>
-          <p:cNvSpPr/>
-          <p:nvPr/>
-        </p:nvSpPr>
-        <p:spPr>
-          <a:xfrm>
-            <a:off x="2831592" y="4169664"/>
-            <a:ext cx="685800" cy="384048"/>
-          </a:xfrm>
-          <a:prstGeom prst="rect">
-            <a:avLst>
-              <a:gd name="adj" fmla="val 9524"/>
-            </a:avLst>
-          </a:prstGeom>
-          <a:solidFill>
-            <a:srgbClr val="FFFFFF"/>
-          </a:solidFill>
-          <a:ln w="12700">
-            <a:solidFill>
-              <a:srgbClr val="DB2777"/>
-            </a:solidFill>
-            <a:prstDash val="solid"/>
-          </a:ln>
-        </p:spPr>
-      </p:sp>
-      <p:sp>
-        <p:nvSpPr>
-          <p:cNvPr id="43" name="Text 41"/>
-          <p:cNvSpPr/>
-          <p:nvPr/>
-        </p:nvSpPr>
-        <p:spPr>
-          <a:xfrm>
-            <a:off x="2831592" y="4169664"/>
-            <a:ext cx="685800" cy="384048"/>
-          </a:xfrm>
-          <a:prstGeom prst="rect">
-            <a:avLst/>
-          </a:prstGeom>
-          <a:noFill/>
-          <a:ln/>
-        </p:spPr>
-        <p:txBody>
-          <a:bodyPr wrap="square" lIns="0" tIns="0" rIns="0" bIns="0" rtlCol="0" anchor="ctr"/>
-          <a:lstStyle/>
-          <a:p>
-            <a:pPr algn="ctr" indent="0" marL="0">
-              <a:buNone/>
-            </a:pPr>
-            <a:r>
-              <a:rPr lang="en-US" sz="900" b="1" dirty="0">
-                <a:solidFill>
-                  <a:srgbClr val="9D174D"/>
-                </a:solidFill>
-                <a:latin typeface="Trebuchet MS" pitchFamily="34" charset="0"/>
-                <a:ea typeface="Trebuchet MS" pitchFamily="34" charset="-122"/>
-                <a:cs typeface="Trebuchet MS" pitchFamily="34" charset="-120"/>
-              </a:rPr>
-              <a:t>i</a:t>
-            </a:r>
-            <a:endParaRPr lang="en-US" sz="900" dirty="0"/>
-          </a:p>
-        </p:txBody>
-      </p:sp>
-      <p:sp>
-        <p:nvSpPr>
-          <p:cNvPr id="44" name="Shape 42"/>
-          <p:cNvSpPr/>
-          <p:nvPr/>
-        </p:nvSpPr>
-        <p:spPr>
-          <a:xfrm>
-            <a:off x="3639312" y="4169664"/>
-            <a:ext cx="685800" cy="384048"/>
-          </a:xfrm>
-          <a:prstGeom prst="rect">
-            <a:avLst>
-              <a:gd name="adj" fmla="val 9524"/>
-            </a:avLst>
-          </a:prstGeom>
-          <a:solidFill>
-            <a:srgbClr val="FFFFFF"/>
-          </a:solidFill>
-          <a:ln w="12700">
-            <a:solidFill>
-              <a:srgbClr val="DB2777"/>
-            </a:solidFill>
-            <a:prstDash val="solid"/>
-          </a:ln>
-        </p:spPr>
-      </p:sp>
-      <p:sp>
-        <p:nvSpPr>
-          <p:cNvPr id="45" name="Text 43"/>
-          <p:cNvSpPr/>
-          <p:nvPr/>
-        </p:nvSpPr>
-        <p:spPr>
-          <a:xfrm>
-            <a:off x="3639312" y="4169664"/>
-            <a:ext cx="685800" cy="384048"/>
-          </a:xfrm>
-          <a:prstGeom prst="rect">
-            <a:avLst/>
-          </a:prstGeom>
-          <a:noFill/>
-          <a:ln/>
-        </p:spPr>
-        <p:txBody>
-          <a:bodyPr wrap="square" lIns="0" tIns="0" rIns="0" bIns="0" rtlCol="0" anchor="ctr"/>
-          <a:lstStyle/>
-          <a:p>
-            <a:pPr algn="ctr" indent="0" marL="0">
-              <a:buNone/>
-            </a:pPr>
-            <a:r>
-              <a:rPr lang="en-US" sz="900" b="1" dirty="0">
-                <a:solidFill>
-                  <a:srgbClr val="9D174D"/>
-                </a:solidFill>
-                <a:latin typeface="Trebuchet MS" pitchFamily="34" charset="0"/>
-                <a:ea typeface="Trebuchet MS" pitchFamily="34" charset="-122"/>
-                <a:cs typeface="Trebuchet MS" pitchFamily="34" charset="-120"/>
-              </a:rPr>
-              <a:t>e</a:t>
-            </a:r>
-            <a:endParaRPr lang="en-US" sz="900" dirty="0"/>
-          </a:p>
-        </p:txBody>
-      </p:sp>
-      <p:sp>
-        <p:nvSpPr>
-          <p:cNvPr id="46" name="Shape 44"/>
-          <p:cNvSpPr/>
-          <p:nvPr/>
-        </p:nvSpPr>
-        <p:spPr>
-          <a:xfrm>
-            <a:off x="4447032" y="4169664"/>
-            <a:ext cx="685800" cy="384048"/>
-          </a:xfrm>
-          <a:prstGeom prst="rect">
-            <a:avLst>
-              <a:gd name="adj" fmla="val 9524"/>
-            </a:avLst>
-          </a:prstGeom>
-          <a:solidFill>
-            <a:srgbClr val="FFFFFF"/>
-          </a:solidFill>
-          <a:ln w="12700">
-            <a:solidFill>
-              <a:srgbClr val="DB2777"/>
-            </a:solidFill>
-            <a:prstDash val="solid"/>
-          </a:ln>
-        </p:spPr>
-      </p:sp>
-      <p:sp>
-        <p:nvSpPr>
-          <p:cNvPr id="47" name="Text 45"/>
-          <p:cNvSpPr/>
-          <p:nvPr/>
-        </p:nvSpPr>
-        <p:spPr>
-          <a:xfrm>
-            <a:off x="4447032" y="4169664"/>
-            <a:ext cx="685800" cy="384048"/>
-          </a:xfrm>
-          <a:prstGeom prst="rect">
-            <a:avLst/>
-          </a:prstGeom>
-          <a:noFill/>
-          <a:ln/>
-        </p:spPr>
-        <p:txBody>
-          <a:bodyPr wrap="square" lIns="0" tIns="0" rIns="0" bIns="0" rtlCol="0" anchor="ctr"/>
-          <a:lstStyle/>
-          <a:p>
-            <a:pPr algn="ctr" indent="0" marL="0">
-              <a:buNone/>
-            </a:pPr>
-            <a:r>
-              <a:rPr lang="en-US" sz="900" b="1" dirty="0">
-                <a:solidFill>
-                  <a:srgbClr val="9D174D"/>
-                </a:solidFill>
-                <a:latin typeface="Trebuchet MS" pitchFamily="34" charset="0"/>
-                <a:ea typeface="Trebuchet MS" pitchFamily="34" charset="-122"/>
-                <a:cs typeface="Trebuchet MS" pitchFamily="34" charset="-120"/>
-              </a:rPr>
-              <a:t>n</a:t>
-            </a:r>
-            <a:endParaRPr lang="en-US" sz="900" dirty="0"/>
-          </a:p>
-        </p:txBody>
-      </p:sp>
-      <p:sp>
-        <p:nvSpPr>
-          <p:cNvPr id="48" name="Shape 46"/>
-          <p:cNvSpPr/>
-          <p:nvPr/>
-        </p:nvSpPr>
-        <p:spPr>
-          <a:xfrm>
-            <a:off x="5254752" y="4169664"/>
-            <a:ext cx="685800" cy="384048"/>
-          </a:xfrm>
-          <a:prstGeom prst="rect">
-            <a:avLst>
-              <a:gd name="adj" fmla="val 9524"/>
-            </a:avLst>
-          </a:prstGeom>
-          <a:solidFill>
-            <a:srgbClr val="FFFFFF"/>
-          </a:solidFill>
-          <a:ln w="12700">
-            <a:solidFill>
-              <a:srgbClr val="DB2777"/>
-            </a:solidFill>
-            <a:prstDash val="solid"/>
-          </a:ln>
-        </p:spPr>
-      </p:sp>
-      <p:sp>
-        <p:nvSpPr>
-          <p:cNvPr id="49" name="Text 47"/>
-          <p:cNvSpPr/>
-          <p:nvPr/>
-        </p:nvSpPr>
-        <p:spPr>
-          <a:xfrm>
-            <a:off x="5254752" y="4169664"/>
-            <a:ext cx="685800" cy="384048"/>
-          </a:xfrm>
-          <a:prstGeom prst="rect">
-            <a:avLst/>
-          </a:prstGeom>
-          <a:noFill/>
-          <a:ln/>
-        </p:spPr>
-        <p:txBody>
-          <a:bodyPr wrap="square" lIns="0" tIns="0" rIns="0" bIns="0" rtlCol="0" anchor="ctr"/>
-          <a:lstStyle/>
-          <a:p>
-            <a:pPr algn="ctr" indent="0" marL="0">
-              <a:buNone/>
-            </a:pPr>
-            <a:r>
-              <a:rPr lang="en-US" sz="900" b="1" dirty="0">
-                <a:solidFill>
-                  <a:srgbClr val="9D174D"/>
-                </a:solidFill>
-                <a:latin typeface="Trebuchet MS" pitchFamily="34" charset="0"/>
-                <a:ea typeface="Trebuchet MS" pitchFamily="34" charset="-122"/>
-                <a:cs typeface="Trebuchet MS" pitchFamily="34" charset="-120"/>
-              </a:rPr>
-              <a:t>t</a:t>
-            </a:r>
-            <a:endParaRPr lang="en-US" sz="900" dirty="0"/>
-          </a:p>
-        </p:txBody>
-      </p:sp>
-      <p:sp>
-        <p:nvSpPr>
-          <p:cNvPr id="50" name="Shape 48"/>
-          <p:cNvSpPr/>
-          <p:nvPr/>
-        </p:nvSpPr>
-        <p:spPr>
-          <a:xfrm>
-            <a:off x="6062472" y="4169664"/>
-            <a:ext cx="685800" cy="384048"/>
-          </a:xfrm>
-          <a:prstGeom prst="rect">
-            <a:avLst>
-              <a:gd name="adj" fmla="val 9524"/>
-            </a:avLst>
-          </a:prstGeom>
-          <a:solidFill>
-            <a:srgbClr val="FFFFFF"/>
-          </a:solidFill>
-          <a:ln w="12700">
-            <a:solidFill>
-              <a:srgbClr val="DB2777"/>
-            </a:solidFill>
-            <a:prstDash val="solid"/>
-          </a:ln>
-        </p:spPr>
-      </p:sp>
-      <p:sp>
-        <p:nvSpPr>
-          <p:cNvPr id="51" name="Text 49"/>
-          <p:cNvSpPr/>
-          <p:nvPr/>
-        </p:nvSpPr>
-        <p:spPr>
-          <a:xfrm>
-            <a:off x="6062472" y="4169664"/>
-            <a:ext cx="685800" cy="384048"/>
-          </a:xfrm>
-          <a:prstGeom prst="rect">
-            <a:avLst/>
-          </a:prstGeom>
-          <a:noFill/>
-          <a:ln/>
-        </p:spPr>
-        <p:txBody>
-          <a:bodyPr wrap="square" lIns="0" tIns="0" rIns="0" bIns="0" rtlCol="0" anchor="ctr"/>
-          <a:lstStyle/>
-          <a:p>
-            <a:pPr algn="ctr" indent="0" marL="0">
-              <a:buNone/>
-            </a:pPr>
-            <a:r>
-              <a:rPr lang="en-US" sz="900" b="1" dirty="0">
-                <a:solidFill>
-                  <a:srgbClr val="9D174D"/>
-                </a:solidFill>
-                <a:latin typeface="Trebuchet MS" pitchFamily="34" charset="0"/>
-                <a:ea typeface="Trebuchet MS" pitchFamily="34" charset="-122"/>
-                <a:cs typeface="Trebuchet MS" pitchFamily="34" charset="-120"/>
-              </a:rPr>
-              <a:t>i</a:t>
-            </a:r>
-            <a:endParaRPr lang="en-US" sz="900" dirty="0"/>
-          </a:p>
-        </p:txBody>
-      </p:sp>
-      <p:sp>
-        <p:nvSpPr>
-          <p:cNvPr id="52" name="Shape 50"/>
-          <p:cNvSpPr/>
-          <p:nvPr/>
-        </p:nvSpPr>
-        <p:spPr>
-          <a:xfrm>
-            <a:off x="6870192" y="4169664"/>
-            <a:ext cx="685800" cy="384048"/>
-          </a:xfrm>
-          <a:prstGeom prst="rect">
-            <a:avLst>
-              <a:gd name="adj" fmla="val 9524"/>
-            </a:avLst>
-          </a:prstGeom>
-          <a:solidFill>
-            <a:srgbClr val="FFFFFF"/>
-          </a:solidFill>
-          <a:ln w="12700">
-            <a:solidFill>
-              <a:srgbClr val="DB2777"/>
-            </a:solidFill>
-            <a:prstDash val="solid"/>
-          </a:ln>
-        </p:spPr>
-      </p:sp>
-      <p:sp>
-        <p:nvSpPr>
           <p:cNvPr id="53" name="Text 51"/>
-          <p:cNvSpPr/>
-          <p:nvPr/>
-        </p:nvSpPr>
-        <p:spPr>
-          <a:xfrm>
-            <a:off x="6870192" y="4169664"/>
-            <a:ext cx="685800" cy="384048"/>
-          </a:xfrm>
-          <a:prstGeom prst="rect">
-            <a:avLst/>
-          </a:prstGeom>
-          <a:noFill/>
-          <a:ln/>
-        </p:spPr>
-        <p:txBody>
-          <a:bodyPr wrap="square" lIns="0" tIns="0" rIns="0" bIns="0" rtlCol="0" anchor="ctr"/>
-          <a:lstStyle/>
-          <a:p>
-            <a:pPr algn="ctr" indent="0" marL="0">
-              <a:buNone/>
-            </a:pPr>
-            <a:r>
-              <a:rPr lang="en-US" sz="900" b="1" dirty="0">
-                <a:solidFill>
-                  <a:srgbClr val="9D174D"/>
-                </a:solidFill>
-                <a:latin typeface="Trebuchet MS" pitchFamily="34" charset="0"/>
-                <a:ea typeface="Trebuchet MS" pitchFamily="34" charset="-122"/>
-                <a:cs typeface="Trebuchet MS" pitchFamily="34" charset="-120"/>
-              </a:rPr>
-              <a:t>s</a:t>
-            </a:r>
-            <a:endParaRPr lang="en-US" sz="900" dirty="0"/>
-          </a:p>
-        </p:txBody>
-      </p:sp>
-      <p:sp>
-        <p:nvSpPr>
-          <p:cNvPr id="54" name="Shape 52"/>
-          <p:cNvSpPr/>
-          <p:nvPr/>
-        </p:nvSpPr>
-        <p:spPr>
-          <a:xfrm>
-            <a:off x="7677912" y="4169664"/>
-            <a:ext cx="685800" cy="384048"/>
-          </a:xfrm>
-          <a:prstGeom prst="rect">
-            <a:avLst>
-              <a:gd name="adj" fmla="val 9524"/>
-            </a:avLst>
-          </a:prstGeom>
-          <a:solidFill>
-            <a:srgbClr val="FFFFFF"/>
-          </a:solidFill>
-          <a:ln w="12700">
-            <a:solidFill>
-              <a:srgbClr val="DB2777"/>
-            </a:solidFill>
-            <a:prstDash val="solid"/>
-          </a:ln>
-        </p:spPr>
-      </p:sp>
-      <p:sp>
-        <p:nvSpPr>
-          <p:cNvPr id="55" name="Text 53"/>
           <p:cNvSpPr/>
           <p:nvPr/>
         </p:nvSpPr>
@@ -28943,7 +28670,7 @@
                 <a:ea typeface="Trebuchet MS" pitchFamily="34" charset="-122"/>
                 <a:cs typeface="Trebuchet MS" pitchFamily="34" charset="-120"/>
               </a:rPr>
-              <a:t>specialist</a:t>
+              <a:t>finalist</a:t>
             </a:r>
             <a:endParaRPr lang="en-US" sz="2800" dirty="0"/>
           </a:p>
@@ -29770,7 +29497,7 @@
                 <a:ea typeface="Trebuchet MS" pitchFamily="34" charset="-122"/>
                 <a:cs typeface="Trebuchet MS" pitchFamily="34" charset="-120"/>
               </a:rPr>
-              <a:t>specialist</a:t>
+              <a:t>finalist</a:t>
             </a:r>
             <a:endParaRPr lang="en-US" sz="2800" dirty="0"/>
           </a:p>
@@ -29909,7 +29636,7 @@
                 <a:ea typeface="Trebuchet MS" pitchFamily="34" charset="-122"/>
                 <a:cs typeface="Trebuchet MS" pitchFamily="34" charset="-120"/>
               </a:rPr>
-              <a:t>special</a:t>
+              <a:t>final</a:t>
             </a:r>
             <a:endParaRPr lang="en-US" sz="1300" dirty="0"/>
           </a:p>
@@ -29948,7 +29675,7 @@
                 <a:ea typeface="Calibri" pitchFamily="34" charset="-122"/>
                 <a:cs typeface="Calibri" pitchFamily="34" charset="-120"/>
               </a:rPr>
-              <a:t>particular or unique</a:t>
+              <a:t>last, at the end</a:t>
             </a:r>
             <a:endParaRPr lang="en-US" sz="850" dirty="0"/>
           </a:p>
@@ -30060,7 +29787,7 @@
                 <a:ea typeface="Calibri" pitchFamily="34" charset="-122"/>
                 <a:cs typeface="Calibri" pitchFamily="34" charset="-120"/>
               </a:rPr>
-              <a:t>person who does or believes</a:t>
+              <a:t>person who does</a:t>
             </a:r>
             <a:endParaRPr lang="en-US" sz="850" dirty="0"/>
           </a:p>
@@ -30755,7 +30482,7 @@
                 <a:ea typeface="Trebuchet MS" pitchFamily="34" charset="-122"/>
                 <a:cs typeface="Trebuchet MS" pitchFamily="34" charset="-120"/>
               </a:rPr>
-              <a:t>specialist</a:t>
+              <a:t>finalist</a:t>
             </a:r>
             <a:endParaRPr lang="en-US" sz="2800" dirty="0"/>
           </a:p>
@@ -30894,7 +30621,7 @@
                 <a:ea typeface="Trebuchet MS" pitchFamily="34" charset="-122"/>
                 <a:cs typeface="Trebuchet MS" pitchFamily="34" charset="-120"/>
               </a:rPr>
-              <a:t>special</a:t>
+              <a:t>final</a:t>
             </a:r>
             <a:endParaRPr lang="en-US" sz="1300" dirty="0"/>
           </a:p>
@@ -30933,7 +30660,7 @@
                 <a:ea typeface="Calibri" pitchFamily="34" charset="-122"/>
                 <a:cs typeface="Calibri" pitchFamily="34" charset="-120"/>
               </a:rPr>
-              <a:t>particular or unique</a:t>
+              <a:t>last, at the end</a:t>
             </a:r>
             <a:endParaRPr lang="en-US" sz="850" dirty="0"/>
           </a:p>
@@ -31045,7 +30772,7 @@
                 <a:ea typeface="Calibri" pitchFamily="34" charset="-122"/>
                 <a:cs typeface="Calibri" pitchFamily="34" charset="-120"/>
               </a:rPr>
-              <a:t>person who does or believes</a:t>
+              <a:t>person who does</a:t>
             </a:r>
             <a:endParaRPr lang="en-US" sz="850" dirty="0"/>
           </a:p>
@@ -31204,7 +30931,7 @@
                 <a:ea typeface="Trebuchet MS" pitchFamily="34" charset="-122"/>
                 <a:cs typeface="Trebuchet MS" pitchFamily="34" charset="-120"/>
               </a:rPr>
-              <a:t>spe</a:t>
+              <a:t>fi</a:t>
             </a:r>
             <a:endParaRPr lang="en-US" sz="1400" dirty="0"/>
           </a:p>
@@ -31309,7 +31036,7 @@
                 <a:ea typeface="Trebuchet MS" pitchFamily="34" charset="-122"/>
                 <a:cs typeface="Trebuchet MS" pitchFamily="34" charset="-120"/>
               </a:rPr>
-              <a:t>cial</a:t>
+              <a:t>nal</a:t>
             </a:r>
             <a:endParaRPr lang="en-US" sz="1400" dirty="0"/>
           </a:p>
@@ -31977,7 +31704,7 @@
                 <a:ea typeface="Trebuchet MS" pitchFamily="34" charset="-122"/>
                 <a:cs typeface="Trebuchet MS" pitchFamily="34" charset="-120"/>
               </a:rPr>
-              <a:t>specialist</a:t>
+              <a:t>finalist</a:t>
             </a:r>
             <a:endParaRPr lang="en-US" sz="2800" dirty="0"/>
           </a:p>
@@ -32116,7 +31843,7 @@
                 <a:ea typeface="Trebuchet MS" pitchFamily="34" charset="-122"/>
                 <a:cs typeface="Trebuchet MS" pitchFamily="34" charset="-120"/>
               </a:rPr>
-              <a:t>special</a:t>
+              <a:t>final</a:t>
             </a:r>
             <a:endParaRPr lang="en-US" sz="1300" dirty="0"/>
           </a:p>
@@ -32155,7 +31882,7 @@
                 <a:ea typeface="Calibri" pitchFamily="34" charset="-122"/>
                 <a:cs typeface="Calibri" pitchFamily="34" charset="-120"/>
               </a:rPr>
-              <a:t>particular or unique</a:t>
+              <a:t>last, at the end</a:t>
             </a:r>
             <a:endParaRPr lang="en-US" sz="850" dirty="0"/>
           </a:p>
@@ -32267,7 +31994,7 @@
                 <a:ea typeface="Calibri" pitchFamily="34" charset="-122"/>
                 <a:cs typeface="Calibri" pitchFamily="34" charset="-120"/>
               </a:rPr>
-              <a:t>person who does or believes</a:t>
+              <a:t>person who does</a:t>
             </a:r>
             <a:endParaRPr lang="en-US" sz="850" dirty="0"/>
           </a:p>
@@ -32426,7 +32153,7 @@
                 <a:ea typeface="Trebuchet MS" pitchFamily="34" charset="-122"/>
                 <a:cs typeface="Trebuchet MS" pitchFamily="34" charset="-120"/>
               </a:rPr>
-              <a:t>spe</a:t>
+              <a:t>fi</a:t>
             </a:r>
             <a:endParaRPr lang="en-US" sz="1400" dirty="0"/>
           </a:p>
@@ -32531,7 +32258,7 @@
                 <a:ea typeface="Trebuchet MS" pitchFamily="34" charset="-122"/>
                 <a:cs typeface="Trebuchet MS" pitchFamily="34" charset="-120"/>
               </a:rPr>
-              <a:t>cial</a:t>
+              <a:t>nal</a:t>
             </a:r>
             <a:endParaRPr lang="en-US" sz="1400" dirty="0"/>
           </a:p>
@@ -32717,11 +32444,11 @@
         <p:spPr>
           <a:xfrm>
             <a:off x="1874520" y="4096512"/>
-            <a:ext cx="6903720" cy="804672"/>
+            <a:ext cx="6903720" cy="658368"/>
           </a:xfrm>
           <a:prstGeom prst="rect">
             <a:avLst>
-              <a:gd name="adj" fmla="val 6818"/>
+              <a:gd name="adj" fmla="val 8333"/>
             </a:avLst>
           </a:prstGeom>
           <a:solidFill>
@@ -32744,11 +32471,11 @@
         <p:spPr>
           <a:xfrm>
             <a:off x="2023872" y="4169664"/>
-            <a:ext cx="685800" cy="384048"/>
+            <a:ext cx="685800" cy="475488"/>
           </a:xfrm>
           <a:prstGeom prst="rect">
             <a:avLst>
-              <a:gd name="adj" fmla="val 9524"/>
+              <a:gd name="adj" fmla="val 7692"/>
             </a:avLst>
           </a:prstGeom>
           <a:solidFill>
@@ -32771,7 +32498,7 @@
         <p:spPr>
           <a:xfrm>
             <a:off x="2023872" y="4169664"/>
-            <a:ext cx="685800" cy="384048"/>
+            <a:ext cx="685800" cy="475488"/>
           </a:xfrm>
           <a:prstGeom prst="rect">
             <a:avLst/>
@@ -32795,7 +32522,7 @@
                 <a:ea typeface="Trebuchet MS" pitchFamily="34" charset="-122"/>
                 <a:cs typeface="Trebuchet MS" pitchFamily="34" charset="-120"/>
               </a:rPr>
-              <a:t>sp</a:t>
+              <a:t>f</a:t>
             </a:r>
             <a:endParaRPr lang="en-US" sz="900" dirty="0"/>
           </a:p>
@@ -32810,11 +32537,11 @@
         <p:spPr>
           <a:xfrm>
             <a:off x="2831592" y="4169664"/>
-            <a:ext cx="685800" cy="384048"/>
+            <a:ext cx="685800" cy="475488"/>
           </a:xfrm>
           <a:prstGeom prst="rect">
             <a:avLst>
-              <a:gd name="adj" fmla="val 9524"/>
+              <a:gd name="adj" fmla="val 7692"/>
             </a:avLst>
           </a:prstGeom>
           <a:solidFill>
@@ -32837,7 +32564,7 @@
         <p:spPr>
           <a:xfrm>
             <a:off x="2831592" y="4169664"/>
-            <a:ext cx="685800" cy="384048"/>
+            <a:ext cx="685800" cy="475488"/>
           </a:xfrm>
           <a:prstGeom prst="rect">
             <a:avLst/>
@@ -32861,7 +32588,7 @@
                 <a:ea typeface="Trebuchet MS" pitchFamily="34" charset="-122"/>
                 <a:cs typeface="Trebuchet MS" pitchFamily="34" charset="-120"/>
               </a:rPr>
-              <a:t>e</a:t>
+              <a:t>i</a:t>
             </a:r>
             <a:endParaRPr lang="en-US" sz="900" dirty="0"/>
           </a:p>
@@ -32876,11 +32603,11 @@
         <p:spPr>
           <a:xfrm>
             <a:off x="3639312" y="4169664"/>
-            <a:ext cx="685800" cy="384048"/>
+            <a:ext cx="685800" cy="475488"/>
           </a:xfrm>
           <a:prstGeom prst="rect">
             <a:avLst>
-              <a:gd name="adj" fmla="val 9524"/>
+              <a:gd name="adj" fmla="val 7692"/>
             </a:avLst>
           </a:prstGeom>
           <a:solidFill>
@@ -32903,7 +32630,7 @@
         <p:spPr>
           <a:xfrm>
             <a:off x="3639312" y="4169664"/>
-            <a:ext cx="685800" cy="384048"/>
+            <a:ext cx="685800" cy="475488"/>
           </a:xfrm>
           <a:prstGeom prst="rect">
             <a:avLst/>
@@ -32927,7 +32654,7 @@
                 <a:ea typeface="Trebuchet MS" pitchFamily="34" charset="-122"/>
                 <a:cs typeface="Trebuchet MS" pitchFamily="34" charset="-120"/>
               </a:rPr>
-              <a:t>ci</a:t>
+              <a:t>n</a:t>
             </a:r>
             <a:endParaRPr lang="en-US" sz="900" dirty="0"/>
           </a:p>
@@ -32935,57 +32662,18 @@
       </p:sp>
       <p:sp>
         <p:nvSpPr>
-          <p:cNvPr id="42" name="Text 40"/>
-          <p:cNvSpPr/>
-          <p:nvPr/>
-        </p:nvSpPr>
-        <p:spPr>
-          <a:xfrm>
-            <a:off x="3639312" y="4572000"/>
-            <a:ext cx="685800" cy="219456"/>
-          </a:xfrm>
-          <a:prstGeom prst="rect">
-            <a:avLst/>
-          </a:prstGeom>
-          <a:noFill/>
-          <a:ln/>
-        </p:spPr>
-        <p:txBody>
-          <a:bodyPr wrap="square" lIns="0" tIns="0" rIns="0" bIns="0" rtlCol="0" anchor="t"/>
-          <a:lstStyle/>
-          <a:p>
-            <a:pPr algn="ctr" indent="0" marL="0">
-              <a:buNone/>
-            </a:pPr>
-            <a:r>
-              <a:rPr lang="en-US" sz="750" i="1" dirty="0">
-                <a:solidFill>
-                  <a:srgbClr val="94A3B8"/>
-                </a:solidFill>
-                <a:latin typeface="Calibri" pitchFamily="34" charset="0"/>
-                <a:ea typeface="Calibri" pitchFamily="34" charset="-122"/>
-                <a:cs typeface="Calibri" pitchFamily="34" charset="-120"/>
-              </a:rPr>
-              <a:t>/sh/</a:t>
-            </a:r>
-            <a:endParaRPr lang="en-US" sz="750" dirty="0"/>
-          </a:p>
-        </p:txBody>
-      </p:sp>
-      <p:sp>
-        <p:nvSpPr>
-          <p:cNvPr id="43" name="Shape 41"/>
+          <p:cNvPr id="42" name="Shape 40"/>
           <p:cNvSpPr/>
           <p:nvPr/>
         </p:nvSpPr>
         <p:spPr>
           <a:xfrm>
             <a:off x="4447032" y="4169664"/>
-            <a:ext cx="685800" cy="384048"/>
+            <a:ext cx="685800" cy="475488"/>
           </a:xfrm>
           <a:prstGeom prst="rect">
             <a:avLst>
-              <a:gd name="adj" fmla="val 9524"/>
+              <a:gd name="adj" fmla="val 7692"/>
             </a:avLst>
           </a:prstGeom>
           <a:solidFill>
@@ -33001,14 +32689,14 @@
       </p:sp>
       <p:sp>
         <p:nvSpPr>
-          <p:cNvPr id="44" name="Text 42"/>
+          <p:cNvPr id="43" name="Text 41"/>
           <p:cNvSpPr/>
           <p:nvPr/>
         </p:nvSpPr>
         <p:spPr>
           <a:xfrm>
             <a:off x="4447032" y="4169664"/>
-            <a:ext cx="685800" cy="384048"/>
+            <a:ext cx="685800" cy="475488"/>
           </a:xfrm>
           <a:prstGeom prst="rect">
             <a:avLst/>
@@ -33040,18 +32728,18 @@
       </p:sp>
       <p:sp>
         <p:nvSpPr>
-          <p:cNvPr id="45" name="Shape 43"/>
+          <p:cNvPr id="44" name="Shape 42"/>
           <p:cNvSpPr/>
           <p:nvPr/>
         </p:nvSpPr>
         <p:spPr>
           <a:xfrm>
             <a:off x="5254752" y="4169664"/>
-            <a:ext cx="685800" cy="384048"/>
+            <a:ext cx="685800" cy="475488"/>
           </a:xfrm>
           <a:prstGeom prst="rect">
             <a:avLst>
-              <a:gd name="adj" fmla="val 9524"/>
+              <a:gd name="adj" fmla="val 7692"/>
             </a:avLst>
           </a:prstGeom>
           <a:solidFill>
@@ -33067,14 +32755,14 @@
       </p:sp>
       <p:sp>
         <p:nvSpPr>
-          <p:cNvPr id="46" name="Text 44"/>
+          <p:cNvPr id="45" name="Text 43"/>
           <p:cNvSpPr/>
           <p:nvPr/>
         </p:nvSpPr>
         <p:spPr>
           <a:xfrm>
             <a:off x="5254752" y="4169664"/>
-            <a:ext cx="685800" cy="384048"/>
+            <a:ext cx="685800" cy="475488"/>
           </a:xfrm>
           <a:prstGeom prst="rect">
             <a:avLst/>
@@ -33106,18 +32794,18 @@
       </p:sp>
       <p:sp>
         <p:nvSpPr>
-          <p:cNvPr id="47" name="Shape 45"/>
+          <p:cNvPr id="46" name="Shape 44"/>
           <p:cNvSpPr/>
           <p:nvPr/>
         </p:nvSpPr>
         <p:spPr>
           <a:xfrm>
             <a:off x="6062472" y="4169664"/>
-            <a:ext cx="685800" cy="384048"/>
+            <a:ext cx="685800" cy="475488"/>
           </a:xfrm>
           <a:prstGeom prst="rect">
             <a:avLst>
-              <a:gd name="adj" fmla="val 9524"/>
+              <a:gd name="adj" fmla="val 7692"/>
             </a:avLst>
           </a:prstGeom>
           <a:solidFill>
@@ -33133,14 +32821,14 @@
       </p:sp>
       <p:sp>
         <p:nvSpPr>
-          <p:cNvPr id="48" name="Text 46"/>
+          <p:cNvPr id="47" name="Text 45"/>
           <p:cNvSpPr/>
           <p:nvPr/>
         </p:nvSpPr>
         <p:spPr>
           <a:xfrm>
             <a:off x="6062472" y="4169664"/>
-            <a:ext cx="685800" cy="384048"/>
+            <a:ext cx="685800" cy="475488"/>
           </a:xfrm>
           <a:prstGeom prst="rect">
             <a:avLst/>
@@ -33172,18 +32860,18 @@
       </p:sp>
       <p:sp>
         <p:nvSpPr>
-          <p:cNvPr id="49" name="Shape 47"/>
+          <p:cNvPr id="48" name="Shape 46"/>
           <p:cNvSpPr/>
           <p:nvPr/>
         </p:nvSpPr>
         <p:spPr>
           <a:xfrm>
             <a:off x="6870192" y="4169664"/>
-            <a:ext cx="685800" cy="384048"/>
+            <a:ext cx="685800" cy="475488"/>
           </a:xfrm>
           <a:prstGeom prst="rect">
             <a:avLst>
-              <a:gd name="adj" fmla="val 9524"/>
+              <a:gd name="adj" fmla="val 7692"/>
             </a:avLst>
           </a:prstGeom>
           <a:solidFill>
@@ -33199,14 +32887,14 @@
       </p:sp>
       <p:sp>
         <p:nvSpPr>
-          <p:cNvPr id="50" name="Text 48"/>
+          <p:cNvPr id="49" name="Text 47"/>
           <p:cNvSpPr/>
           <p:nvPr/>
         </p:nvSpPr>
         <p:spPr>
           <a:xfrm>
             <a:off x="6870192" y="4169664"/>
-            <a:ext cx="685800" cy="384048"/>
+            <a:ext cx="685800" cy="475488"/>
           </a:xfrm>
           <a:prstGeom prst="rect">
             <a:avLst/>
@@ -33238,18 +32926,18 @@
       </p:sp>
       <p:sp>
         <p:nvSpPr>
-          <p:cNvPr id="51" name="Shape 49"/>
+          <p:cNvPr id="50" name="Shape 48"/>
           <p:cNvSpPr/>
           <p:nvPr/>
         </p:nvSpPr>
         <p:spPr>
           <a:xfrm>
             <a:off x="7677912" y="4169664"/>
-            <a:ext cx="685800" cy="384048"/>
+            <a:ext cx="685800" cy="475488"/>
           </a:xfrm>
           <a:prstGeom prst="rect">
             <a:avLst>
-              <a:gd name="adj" fmla="val 9524"/>
+              <a:gd name="adj" fmla="val 7692"/>
             </a:avLst>
           </a:prstGeom>
           <a:solidFill>
@@ -33265,14 +32953,14 @@
       </p:sp>
       <p:sp>
         <p:nvSpPr>
-          <p:cNvPr id="52" name="Text 50"/>
+          <p:cNvPr id="51" name="Text 49"/>
           <p:cNvSpPr/>
           <p:nvPr/>
         </p:nvSpPr>
         <p:spPr>
           <a:xfrm>
             <a:off x="7677912" y="4169664"/>
-            <a:ext cx="685800" cy="384048"/>
+            <a:ext cx="685800" cy="475488"/>
           </a:xfrm>
           <a:prstGeom prst="rect">
             <a:avLst/>
@@ -35403,7 +35091,7 @@
                 <a:ea typeface="Trebuchet MS" pitchFamily="34" charset="-122"/>
                 <a:cs typeface="Trebuchet MS" pitchFamily="34" charset="-120"/>
               </a:rPr>
-              <a:t>real-</a:t>
+              <a:t>gun-</a:t>
             </a:r>
             <a:endParaRPr lang="en-US" sz="1300" dirty="0"/>
           </a:p>
@@ -35467,7 +35155,7 @@
                 <a:ea typeface="Trebuchet MS" pitchFamily="34" charset="-122"/>
                 <a:cs typeface="Trebuchet MS" pitchFamily="34" charset="-120"/>
               </a:rPr>
-              <a:t>real</a:t>
+              <a:t>guitar</a:t>
             </a:r>
             <a:endParaRPr lang="en-US" sz="1300" dirty="0"/>
           </a:p>
@@ -35556,7 +35244,7 @@
                 <a:ea typeface="Trebuchet MS" pitchFamily="34" charset="-122"/>
                 <a:cs typeface="Trebuchet MS" pitchFamily="34" charset="-120"/>
               </a:rPr>
-              <a:t>special-</a:t>
+              <a:t>drug-</a:t>
             </a:r>
             <a:endParaRPr lang="en-US" sz="1300" dirty="0"/>
           </a:p>
@@ -35620,7 +35308,7 @@
                 <a:ea typeface="Trebuchet MS" pitchFamily="34" charset="-122"/>
                 <a:cs typeface="Trebuchet MS" pitchFamily="34" charset="-120"/>
               </a:rPr>
-              <a:t>special</a:t>
+              <a:t>cycle</a:t>
             </a:r>
             <a:endParaRPr lang="en-US" sz="1300" dirty="0"/>
           </a:p>
@@ -35709,7 +35397,7 @@
                 <a:ea typeface="Trebuchet MS" pitchFamily="34" charset="-122"/>
                 <a:cs typeface="Trebuchet MS" pitchFamily="34" charset="-120"/>
               </a:rPr>
-              <a:t>journal-</a:t>
+              <a:t>tour-</a:t>
             </a:r>
             <a:endParaRPr lang="en-US" sz="1300" dirty="0"/>
           </a:p>
@@ -35969,7 +35657,7 @@
                 <a:ea typeface="Trebuchet MS" pitchFamily="34" charset="-122"/>
                 <a:cs typeface="Trebuchet MS" pitchFamily="34" charset="-120"/>
               </a:rPr>
-              <a:t>scientist</a:t>
+              <a:t>cyclist</a:t>
             </a:r>
             <a:endParaRPr lang="en-US" sz="1200" dirty="0"/>
           </a:p>
@@ -36035,7 +35723,7 @@
                 <a:ea typeface="Trebuchet MS" pitchFamily="34" charset="-122"/>
                 <a:cs typeface="Trebuchet MS" pitchFamily="34" charset="-120"/>
               </a:rPr>
-              <a:t>cyclist</a:t>
+              <a:t>scientist</a:t>
             </a:r>
             <a:endParaRPr lang="en-US" sz="1200" dirty="0"/>
           </a:p>
@@ -36167,7 +35855,7 @@
                 <a:ea typeface="Trebuchet MS" pitchFamily="34" charset="-122"/>
                 <a:cs typeface="Trebuchet MS" pitchFamily="34" charset="-120"/>
               </a:rPr>
-              <a:t>dentist</a:t>
+              <a:t>guitarist</a:t>
             </a:r>
             <a:endParaRPr lang="en-US" sz="1200" dirty="0"/>
           </a:p>
@@ -36233,7 +35921,7 @@
                 <a:ea typeface="Trebuchet MS" pitchFamily="34" charset="-122"/>
                 <a:cs typeface="Trebuchet MS" pitchFamily="34" charset="-120"/>
               </a:rPr>
-              <a:t>realist</a:t>
+              <a:t>tourist</a:t>
             </a:r>
             <a:endParaRPr lang="en-US" sz="1200" dirty="0"/>
           </a:p>
@@ -36299,7 +35987,7 @@
                 <a:ea typeface="Trebuchet MS" pitchFamily="34" charset="-122"/>
                 <a:cs typeface="Trebuchet MS" pitchFamily="34" charset="-120"/>
               </a:rPr>
-              <a:t>finalist</a:t>
+              <a:t>dentist</a:t>
             </a:r>
             <a:endParaRPr lang="en-US" sz="1200" dirty="0"/>
           </a:p>
@@ -36365,7 +36053,7 @@
                 <a:ea typeface="Trebuchet MS" pitchFamily="34" charset="-122"/>
                 <a:cs typeface="Trebuchet MS" pitchFamily="34" charset="-120"/>
               </a:rPr>
-              <a:t>specialist</a:t>
+              <a:t>finalist</a:t>
             </a:r>
             <a:endParaRPr lang="en-US" sz="1200" dirty="0"/>
           </a:p>
@@ -37149,7 +36837,7 @@
                 <a:ea typeface="Calibri" pitchFamily="34" charset="-122"/>
                 <a:cs typeface="Calibri" pitchFamily="34" charset="-120"/>
               </a:rPr>
-              <a:t>A meaningful word part added to the beginning of a root to change its meaning. E.g. 'un-' in 'scientist' means 'not'.</a:t>
+              <a:t>A meaningful word part added to the beginning of a root to change its meaning. E.g. 'un-' in 'cyclist' means 'not'.</a:t>
             </a:r>
             <a:endParaRPr lang="en-US" sz="1350" dirty="0"/>
           </a:p>
@@ -37553,7 +37241,7 @@
                 <a:ea typeface="Calibri" pitchFamily="34" charset="-122"/>
                 <a:cs typeface="Calibri" pitchFamily="34" charset="-120"/>
               </a:rPr>
-              <a:t>1.  The suffix '-ist' comes from Greek.</a:t>
+              <a:t>1.  The suffix '-ist' always means a person who does or believes something.</a:t>
             </a:r>
             <a:endParaRPr lang="en-US" sz="1300" dirty="0"/>
           </a:p>
@@ -37692,7 +37380,7 @@
                 <a:ea typeface="Calibri" pitchFamily="34" charset="-122"/>
                 <a:cs typeface="Calibri" pitchFamily="34" charset="-120"/>
               </a:rPr>
-              <a:t>2.  The suffix '-ist' means 'without' or 'not'.</a:t>
+              <a:t>2.  Adding '-ist' to a word makes it into a verb (an action word).</a:t>
             </a:r>
             <a:endParaRPr lang="en-US" sz="1300" dirty="0"/>
           </a:p>
@@ -37831,7 +37519,7 @@
                 <a:ea typeface="Calibri" pitchFamily="34" charset="-122"/>
                 <a:cs typeface="Calibri" pitchFamily="34" charset="-120"/>
               </a:rPr>
-              <a:t>3.  Adding '-ist' to a base word usually creates a noun naming a person.</a:t>
+              <a:t>3.  The suffix '-ist' comes from Old English.</a:t>
             </a:r>
             <a:endParaRPr lang="en-US" sz="1300" dirty="0"/>
           </a:p>
@@ -37854,11 +37542,11 @@
             </a:avLst>
           </a:prstGeom>
           <a:solidFill>
-            <a:srgbClr val="DCFCE7"/>
-          </a:solidFill>
-          <a:ln w="12700">
-            <a:solidFill>
-              <a:srgbClr val="16A34A"/>
+            <a:srgbClr val="FEE2E2"/>
+          </a:solidFill>
+          <a:ln w="12700">
+            <a:solidFill>
+              <a:srgbClr val="DC2626"/>
             </a:solidFill>
             <a:prstDash val="solid"/>
           </a:ln>
@@ -37891,13 +37579,13 @@
             <a:r>
               <a:rPr lang="en-US" sz="1100" b="1" dirty="0">
                 <a:solidFill>
-                  <a:srgbClr val="16A34A"/>
+                  <a:srgbClr val="DC2626"/>
                 </a:solidFill>
                 <a:latin typeface="Trebuchet MS" pitchFamily="34" charset="0"/>
                 <a:ea typeface="Trebuchet MS" pitchFamily="34" charset="-122"/>
                 <a:cs typeface="Trebuchet MS" pitchFamily="34" charset="-120"/>
               </a:rPr>
-              <a:t>TRUE</a:t>
+              <a:t>FALSE</a:t>
             </a:r>
             <a:endParaRPr lang="en-US" sz="1100" dirty="0"/>
           </a:p>
@@ -37970,7 +37658,7 @@
                 <a:ea typeface="Calibri" pitchFamily="34" charset="-122"/>
                 <a:cs typeface="Calibri" pitchFamily="34" charset="-120"/>
               </a:rPr>
-              <a:t>4.  A 'cyclist' is a person who rides a bicycle.</a:t>
+              <a:t>4.  A 'cyclist' is a person who rides a bicycle, so '-ist' means a person who does something.</a:t>
             </a:r>
             <a:endParaRPr lang="en-US" sz="1300" dirty="0"/>
           </a:p>
@@ -38109,7 +37797,7 @@
                 <a:ea typeface="Calibri" pitchFamily="34" charset="-122"/>
                 <a:cs typeface="Calibri" pitchFamily="34" charset="-120"/>
               </a:rPr>
-              <a:t>5.  The suffix '-ist' can only be added to words from the English language.</a:t>
+              <a:t>5.  The word 'journalist' contains the suffix '-ist'.</a:t>
             </a:r>
             <a:endParaRPr lang="en-US" sz="1300" dirty="0"/>
           </a:p>
@@ -38132,11 +37820,11 @@
             </a:avLst>
           </a:prstGeom>
           <a:solidFill>
-            <a:srgbClr val="FEE2E2"/>
-          </a:solidFill>
-          <a:ln w="12700">
-            <a:solidFill>
-              <a:srgbClr val="DC2626"/>
+            <a:srgbClr val="DCFCE7"/>
+          </a:solidFill>
+          <a:ln w="12700">
+            <a:solidFill>
+              <a:srgbClr val="16A34A"/>
             </a:solidFill>
             <a:prstDash val="solid"/>
           </a:ln>
@@ -38169,13 +37857,13 @@
             <a:r>
               <a:rPr lang="en-US" sz="1100" b="1" dirty="0">
                 <a:solidFill>
-                  <a:srgbClr val="DC2626"/>
+                  <a:srgbClr val="16A34A"/>
                 </a:solidFill>
                 <a:latin typeface="Trebuchet MS" pitchFamily="34" charset="0"/>
                 <a:ea typeface="Trebuchet MS" pitchFamily="34" charset="-122"/>
                 <a:cs typeface="Trebuchet MS" pitchFamily="34" charset="-120"/>
               </a:rPr>
-              <a:t>FALSE</a:t>
+              <a:t>TRUE</a:t>
             </a:r>
             <a:endParaRPr lang="en-US" sz="1100" dirty="0"/>
           </a:p>
@@ -38643,7 +38331,7 @@
                 <a:ea typeface="Calibri" pitchFamily="34" charset="-122"/>
                 <a:cs typeface="Calibri" pitchFamily="34" charset="-120"/>
               </a:rPr>
-              <a:t>Origin: Greek: -istes</a:t>
+              <a:t>Origin: Greek: -istēs</a:t>
             </a:r>
             <a:endParaRPr lang="en-US" sz="1100" dirty="0"/>
           </a:p>
@@ -38814,7 +38502,7 @@
                 <a:ea typeface="Trebuchet MS" pitchFamily="34" charset="-122"/>
                 <a:cs typeface="Trebuchet MS" pitchFamily="34" charset="-120"/>
               </a:rPr>
-              <a:t>scientist</a:t>
+              <a:t>cyclist</a:t>
             </a:r>
             <a:endParaRPr lang="en-US" sz="1300" dirty="0"/>
           </a:p>
@@ -38880,7 +38568,7 @@
                 <a:ea typeface="Trebuchet MS" pitchFamily="34" charset="-122"/>
                 <a:cs typeface="Trebuchet MS" pitchFamily="34" charset="-120"/>
               </a:rPr>
-              <a:t>cyclist</a:t>
+              <a:t>scientist</a:t>
             </a:r>
             <a:endParaRPr lang="en-US" sz="1300" dirty="0"/>
           </a:p>
@@ -39012,7 +38700,7 @@
                 <a:ea typeface="Trebuchet MS" pitchFamily="34" charset="-122"/>
                 <a:cs typeface="Trebuchet MS" pitchFamily="34" charset="-120"/>
               </a:rPr>
-              <a:t>dentist</a:t>
+              <a:t>guitarist</a:t>
             </a:r>
             <a:endParaRPr lang="en-US" sz="1300" dirty="0"/>
           </a:p>
@@ -39078,7 +38766,7 @@
                 <a:ea typeface="Trebuchet MS" pitchFamily="34" charset="-122"/>
                 <a:cs typeface="Trebuchet MS" pitchFamily="34" charset="-120"/>
               </a:rPr>
-              <a:t>realist</a:t>
+              <a:t>tourist</a:t>
             </a:r>
             <a:endParaRPr lang="en-US" sz="1300" dirty="0"/>
           </a:p>
@@ -39144,7 +38832,7 @@
                 <a:ea typeface="Trebuchet MS" pitchFamily="34" charset="-122"/>
                 <a:cs typeface="Trebuchet MS" pitchFamily="34" charset="-120"/>
               </a:rPr>
-              <a:t>finalist</a:t>
+              <a:t>dentist</a:t>
             </a:r>
             <a:endParaRPr lang="en-US" sz="1300" dirty="0"/>
           </a:p>
@@ -40082,7 +39770,7 @@
                 <a:ea typeface="Trebuchet MS" pitchFamily="34" charset="-122"/>
                 <a:cs typeface="Trebuchet MS" pitchFamily="34" charset="-120"/>
               </a:rPr>
-              <a:t>real-</a:t>
+              <a:t>gun-</a:t>
             </a:r>
             <a:endParaRPr lang="en-US" sz="1300" dirty="0"/>
           </a:p>
@@ -40146,7 +39834,7 @@
                 <a:ea typeface="Trebuchet MS" pitchFamily="34" charset="-122"/>
                 <a:cs typeface="Trebuchet MS" pitchFamily="34" charset="-120"/>
               </a:rPr>
-              <a:t>real</a:t>
+              <a:t>guitar</a:t>
             </a:r>
             <a:endParaRPr lang="en-US" sz="1300" dirty="0"/>
           </a:p>
@@ -40235,7 +39923,7 @@
                 <a:ea typeface="Trebuchet MS" pitchFamily="34" charset="-122"/>
                 <a:cs typeface="Trebuchet MS" pitchFamily="34" charset="-120"/>
               </a:rPr>
-              <a:t>special-</a:t>
+              <a:t>drug-</a:t>
             </a:r>
             <a:endParaRPr lang="en-US" sz="1300" dirty="0"/>
           </a:p>
@@ -40299,7 +39987,7 @@
                 <a:ea typeface="Trebuchet MS" pitchFamily="34" charset="-122"/>
                 <a:cs typeface="Trebuchet MS" pitchFamily="34" charset="-120"/>
               </a:rPr>
-              <a:t>special</a:t>
+              <a:t>cycle</a:t>
             </a:r>
             <a:endParaRPr lang="en-US" sz="1300" dirty="0"/>
           </a:p>
@@ -40388,7 +40076,7 @@
                 <a:ea typeface="Trebuchet MS" pitchFamily="34" charset="-122"/>
                 <a:cs typeface="Trebuchet MS" pitchFamily="34" charset="-120"/>
               </a:rPr>
-              <a:t>journal-</a:t>
+              <a:t>tour-</a:t>
             </a:r>
             <a:endParaRPr lang="en-US" sz="1300" dirty="0"/>
           </a:p>
@@ -41388,7 +41076,7 @@
                 <a:ea typeface="Calibri" pitchFamily="34" charset="-122"/>
                 <a:cs typeface="Calibri" pitchFamily="34" charset="-120"/>
               </a:rPr>
-              <a:t>A person who has made it through to the last round of a competition.</a:t>
+              <a:t>A person trained to look after and fix people's teeth.</a:t>
             </a:r>
             <a:endParaRPr lang="en-US" sz="1200" dirty="0"/>
           </a:p>
@@ -41461,7 +41149,7 @@
                 <a:ea typeface="Trebuchet MS" pitchFamily="34" charset="-122"/>
                 <a:cs typeface="Trebuchet MS" pitchFamily="34" charset="-120"/>
               </a:rPr>
-              <a:t>scientist</a:t>
+              <a:t>cyclist</a:t>
             </a:r>
             <a:endParaRPr lang="en-US" sz="1200" dirty="0"/>
           </a:p>
@@ -41527,7 +41215,7 @@
                 <a:ea typeface="Calibri" pitchFamily="34" charset="-122"/>
                 <a:cs typeface="Calibri" pitchFamily="34" charset="-120"/>
               </a:rPr>
-              <a:t>A person who creates paintings, drawings, sculptures, or other works of art.</a:t>
+              <a:t>A person who creates paintings, drawings, or other forms of art.</a:t>
             </a:r>
             <a:endParaRPr lang="en-US" sz="1200" dirty="0"/>
           </a:p>
@@ -41600,7 +41288,7 @@
                 <a:ea typeface="Trebuchet MS" pitchFamily="34" charset="-122"/>
                 <a:cs typeface="Trebuchet MS" pitchFamily="34" charset="-120"/>
               </a:rPr>
-              <a:t>cyclist</a:t>
+              <a:t>scientist</a:t>
             </a:r>
             <a:endParaRPr lang="en-US" sz="1200" dirty="0"/>
           </a:p>
@@ -41666,7 +41354,7 @@
                 <a:ea typeface="Calibri" pitchFamily="34" charset="-122"/>
                 <a:cs typeface="Calibri" pitchFamily="34" charset="-120"/>
               </a:rPr>
-              <a:t>A person whose job is to gather and write news stories for newspapers, TV, or websites.</a:t>
+              <a:t>A person who writes news stories for newspapers, TV, or websites.</a:t>
             </a:r>
             <a:endParaRPr lang="en-US" sz="1200" dirty="0"/>
           </a:p>
@@ -41805,7 +41493,7 @@
                 <a:ea typeface="Calibri" pitchFamily="34" charset="-122"/>
                 <a:cs typeface="Calibri" pitchFamily="34" charset="-120"/>
               </a:rPr>
-              <a:t>A person trained to look after people's teeth and fix dental problems.</a:t>
+              <a:t>A person who plays the guitar.</a:t>
             </a:r>
             <a:endParaRPr lang="en-US" sz="1200" dirty="0"/>
           </a:p>
@@ -41878,7 +41566,7 @@
                 <a:ea typeface="Trebuchet MS" pitchFamily="34" charset="-122"/>
                 <a:cs typeface="Trebuchet MS" pitchFamily="34" charset="-120"/>
               </a:rPr>
-              <a:t>dentist</a:t>
+              <a:t>guitarist</a:t>
             </a:r>
             <a:endParaRPr lang="en-US" sz="1200" dirty="0"/>
           </a:p>
@@ -41944,7 +41632,7 @@
                 <a:ea typeface="Calibri" pitchFamily="34" charset="-122"/>
                 <a:cs typeface="Calibri" pitchFamily="34" charset="-120"/>
               </a:rPr>
-              <a:t>A person who sees things as they really are, rather than how they wish things would be.</a:t>
+              <a:t>A person who travels to visit interesting places for fun.</a:t>
             </a:r>
             <a:endParaRPr lang="en-US" sz="1200" dirty="0"/>
           </a:p>
@@ -42017,7 +41705,7 @@
                 <a:ea typeface="Trebuchet MS" pitchFamily="34" charset="-122"/>
                 <a:cs typeface="Trebuchet MS" pitchFamily="34" charset="-120"/>
               </a:rPr>
-              <a:t>realist</a:t>
+              <a:t>tourist</a:t>
             </a:r>
             <a:endParaRPr lang="en-US" sz="1200" dirty="0"/>
           </a:p>
@@ -42083,7 +41771,7 @@
                 <a:ea typeface="Calibri" pitchFamily="34" charset="-122"/>
                 <a:cs typeface="Calibri" pitchFamily="34" charset="-120"/>
               </a:rPr>
-              <a:t>A person who rides a bicycle, either for sport or to get around.</a:t>
+              <a:t>A person who studies and experiments to learn about the world.</a:t>
             </a:r>
             <a:endParaRPr lang="en-US" sz="1200" dirty="0"/>
           </a:p>
@@ -42156,7 +41844,7 @@
                 <a:ea typeface="Trebuchet MS" pitchFamily="34" charset="-122"/>
                 <a:cs typeface="Trebuchet MS" pitchFamily="34" charset="-120"/>
               </a:rPr>
-              <a:t>finalist</a:t>
+              <a:t>dentist</a:t>
             </a:r>
             <a:endParaRPr lang="en-US" sz="1200" dirty="0"/>
           </a:p>
@@ -42222,7 +41910,7 @@
                 <a:ea typeface="Calibri" pitchFamily="34" charset="-122"/>
                 <a:cs typeface="Calibri" pitchFamily="34" charset="-120"/>
               </a:rPr>
-              <a:t>A person who studies the natural world by doing experiments and asking questions.</a:t>
+              <a:t>A person who rides a bicycle.</a:t>
             </a:r>
             <a:endParaRPr lang="en-US" sz="1200" dirty="0"/>
           </a:p>
@@ -42717,7 +42405,7 @@
                 <a:ea typeface="Calibri" pitchFamily="34" charset="-122"/>
                 <a:cs typeface="Calibri" pitchFamily="34" charset="-120"/>
               </a:rPr>
-              <a:t>The young artist spent hours painting a colourful mural on the school wall.</a:t>
+              <a:t>The artist painted a beautiful picture of the Australian bush.</a:t>
             </a:r>
             <a:endParaRPr lang="en-US" sz="1500" dirty="0"/>
           </a:p>
@@ -42881,7 +42569,7 @@
                 <a:ea typeface="Calibri" pitchFamily="34" charset="-122"/>
                 <a:cs typeface="Calibri" pitchFamily="34" charset="-120"/>
               </a:rPr>
-              <a:t>Our local dentist reminded us to brush our teeth twice a day.</a:t>
+              <a:t>Our local dentist showed us the best way to brush our teeth.</a:t>
             </a:r>
             <a:endParaRPr lang="en-US" sz="1500" dirty="0"/>
           </a:p>
@@ -43045,7 +42733,7 @@
                 <a:ea typeface="Calibri" pitchFamily="34" charset="-122"/>
                 <a:cs typeface="Calibri" pitchFamily="34" charset="-120"/>
               </a:rPr>
-              <a:t>The scientist carefully recorded her results in a notebook after each experiment.</a:t>
+              <a:t>The tourist took lots of photos of the Sydney Opera House.</a:t>
             </a:r>
             <a:endParaRPr lang="en-US" sz="1500" dirty="0"/>
           </a:p>
